--- a/exports/pptx/lessons/middle-module-02-panchabhuta/day-06-cross-disciplinary.pptx
+++ b/exports/pptx/lessons/middle-module-02-panchabhuta/day-06-cross-disciplinary.pptx
@@ -17,9 +17,15 @@
     <p:sldId id="265" r:id="rId11"/>
     <p:sldId id="266" r:id="rId12"/>
     <p:sldId id="267" r:id="rId13"/>
+    <p:sldId id="268" r:id="rId14"/>
+    <p:sldId id="269" r:id="rId15"/>
+    <p:sldId id="270" r:id="rId16"/>
+    <p:sldId id="271" r:id="rId17"/>
+    <p:sldId id="272" r:id="rId18"/>
+    <p:sldId id="273" r:id="rId19"/>
   </p:sldIdLst>
   <p:notesMasterIdLst>
-    <p:notesMasterId r:id="rId14"/>
+    <p:notesMasterId r:id="rId20"/>
   </p:notesMasterIdLst>
   <p:sldSz cx="9144000" cy="5143500"/>
   <p:notesSz cx="5143500" cy="9144000"/>
@@ -801,6 +807,534 @@
             <a:fld id="{F7021451-1387-4CA6-816F-3879F97B5CBC}" type="slidenum">
               <a:rPr lang="en-US"/>
               <a:t>12</a:t>
+            </a:fld>
+            <a:endParaRPr lang="en-US"/>
+          </a:p>
+        </p:txBody>
+      </p:sp>
+    </p:spTree>
+    <p:extLst>
+      <p:ext uri="{BB962C8B-B14F-4D97-AF65-F5344CB8AC3E}">
+        <p14:creationId xmlns:p14="http://schemas.microsoft.com/office/powerpoint/2010/main" val="1024086991"/>
+      </p:ext>
+    </p:extLst>
+  </p:cSld>
+  <p:clrMapOvr>
+    <a:masterClrMapping/>
+  </p:clrMapOvr>
+</p:notes>
+</file>
+
+<file path=ppt/notesSlides/notesSlide13.xml><?xml version="1.0" encoding="utf-8"?>
+<p:notes xmlns:a="http://schemas.openxmlformats.org/drawingml/2006/main" xmlns:r="http://schemas.openxmlformats.org/officeDocument/2006/relationships" xmlns:p="http://schemas.openxmlformats.org/presentationml/2006/main">
+  <p:cSld>
+    <p:spTree>
+      <p:nvGrpSpPr>
+        <p:cNvPr id="1" name=""/>
+        <p:cNvGrpSpPr/>
+        <p:nvPr/>
+      </p:nvGrpSpPr>
+      <p:grpSpPr>
+        <a:xfrm>
+          <a:off x="0" y="0"/>
+          <a:ext cx="0" cy="0"/>
+          <a:chOff x="0" y="0"/>
+          <a:chExt cx="0" cy="0"/>
+        </a:xfrm>
+      </p:grpSpPr>
+      <p:sp>
+        <p:nvSpPr>
+          <p:cNvPr id="2" name="Slide Image Placeholder 1"/>
+          <p:cNvSpPr>
+            <a:spLocks noGrp="1" noRot="1" noChangeAspect="1"/>
+          </p:cNvSpPr>
+          <p:nvPr>
+            <p:ph type="sldImg"/>
+          </p:nvPr>
+        </p:nvSpPr>
+        <p:spPr/>
+      </p:sp>
+      <p:sp>
+        <p:nvSpPr>
+          <p:cNvPr id="3" name="Notes Placeholder 2"/>
+          <p:cNvSpPr>
+            <a:spLocks noGrp="1"/>
+          </p:cNvSpPr>
+          <p:nvPr>
+            <p:ph type="body" idx="1"/>
+          </p:nvPr>
+        </p:nvSpPr>
+        <p:spPr/>
+        <p:txBody>
+          <a:bodyPr/>
+          <a:lstStyle/>
+          <a:p>
+            <a:r>
+              <a:rPr lang="en-US" dirty="0"/>
+              <a:t/>
+            </a:r>
+            <a:endParaRPr lang="en-US" dirty="0"/>
+          </a:p>
+        </p:txBody>
+      </p:sp>
+      <p:sp>
+        <p:nvSpPr>
+          <p:cNvPr id="4" name="Slide Number Placeholder 3"/>
+          <p:cNvSpPr>
+            <a:spLocks noGrp="1"/>
+          </p:cNvSpPr>
+          <p:nvPr>
+            <p:ph type="sldNum" sz="quarter" idx="10"/>
+          </p:nvPr>
+        </p:nvSpPr>
+        <p:spPr/>
+        <p:txBody>
+          <a:bodyPr/>
+          <a:lstStyle/>
+          <a:p>
+            <a:fld id="{F7021451-1387-4CA6-816F-3879F97B5CBC}" type="slidenum">
+              <a:rPr lang="en-US"/>
+              <a:t>13</a:t>
+            </a:fld>
+            <a:endParaRPr lang="en-US"/>
+          </a:p>
+        </p:txBody>
+      </p:sp>
+    </p:spTree>
+    <p:extLst>
+      <p:ext uri="{BB962C8B-B14F-4D97-AF65-F5344CB8AC3E}">
+        <p14:creationId xmlns:p14="http://schemas.microsoft.com/office/powerpoint/2010/main" val="1024086991"/>
+      </p:ext>
+    </p:extLst>
+  </p:cSld>
+  <p:clrMapOvr>
+    <a:masterClrMapping/>
+  </p:clrMapOvr>
+</p:notes>
+</file>
+
+<file path=ppt/notesSlides/notesSlide14.xml><?xml version="1.0" encoding="utf-8"?>
+<p:notes xmlns:a="http://schemas.openxmlformats.org/drawingml/2006/main" xmlns:r="http://schemas.openxmlformats.org/officeDocument/2006/relationships" xmlns:p="http://schemas.openxmlformats.org/presentationml/2006/main">
+  <p:cSld>
+    <p:spTree>
+      <p:nvGrpSpPr>
+        <p:cNvPr id="1" name=""/>
+        <p:cNvGrpSpPr/>
+        <p:nvPr/>
+      </p:nvGrpSpPr>
+      <p:grpSpPr>
+        <a:xfrm>
+          <a:off x="0" y="0"/>
+          <a:ext cx="0" cy="0"/>
+          <a:chOff x="0" y="0"/>
+          <a:chExt cx="0" cy="0"/>
+        </a:xfrm>
+      </p:grpSpPr>
+      <p:sp>
+        <p:nvSpPr>
+          <p:cNvPr id="2" name="Slide Image Placeholder 1"/>
+          <p:cNvSpPr>
+            <a:spLocks noGrp="1" noRot="1" noChangeAspect="1"/>
+          </p:cNvSpPr>
+          <p:nvPr>
+            <p:ph type="sldImg"/>
+          </p:nvPr>
+        </p:nvSpPr>
+        <p:spPr/>
+      </p:sp>
+      <p:sp>
+        <p:nvSpPr>
+          <p:cNvPr id="3" name="Notes Placeholder 2"/>
+          <p:cNvSpPr>
+            <a:spLocks noGrp="1"/>
+          </p:cNvSpPr>
+          <p:nvPr>
+            <p:ph type="body" idx="1"/>
+          </p:nvPr>
+        </p:nvSpPr>
+        <p:spPr/>
+        <p:txBody>
+          <a:bodyPr/>
+          <a:lstStyle/>
+          <a:p>
+            <a:r>
+              <a:rPr lang="en-US" dirty="0"/>
+              <a:t/>
+            </a:r>
+            <a:endParaRPr lang="en-US" dirty="0"/>
+          </a:p>
+        </p:txBody>
+      </p:sp>
+      <p:sp>
+        <p:nvSpPr>
+          <p:cNvPr id="4" name="Slide Number Placeholder 3"/>
+          <p:cNvSpPr>
+            <a:spLocks noGrp="1"/>
+          </p:cNvSpPr>
+          <p:nvPr>
+            <p:ph type="sldNum" sz="quarter" idx="10"/>
+          </p:nvPr>
+        </p:nvSpPr>
+        <p:spPr/>
+        <p:txBody>
+          <a:bodyPr/>
+          <a:lstStyle/>
+          <a:p>
+            <a:fld id="{F7021451-1387-4CA6-816F-3879F97B5CBC}" type="slidenum">
+              <a:rPr lang="en-US"/>
+              <a:t>14</a:t>
+            </a:fld>
+            <a:endParaRPr lang="en-US"/>
+          </a:p>
+        </p:txBody>
+      </p:sp>
+    </p:spTree>
+    <p:extLst>
+      <p:ext uri="{BB962C8B-B14F-4D97-AF65-F5344CB8AC3E}">
+        <p14:creationId xmlns:p14="http://schemas.microsoft.com/office/powerpoint/2010/main" val="1024086991"/>
+      </p:ext>
+    </p:extLst>
+  </p:cSld>
+  <p:clrMapOvr>
+    <a:masterClrMapping/>
+  </p:clrMapOvr>
+</p:notes>
+</file>
+
+<file path=ppt/notesSlides/notesSlide15.xml><?xml version="1.0" encoding="utf-8"?>
+<p:notes xmlns:a="http://schemas.openxmlformats.org/drawingml/2006/main" xmlns:r="http://schemas.openxmlformats.org/officeDocument/2006/relationships" xmlns:p="http://schemas.openxmlformats.org/presentationml/2006/main">
+  <p:cSld>
+    <p:spTree>
+      <p:nvGrpSpPr>
+        <p:cNvPr id="1" name=""/>
+        <p:cNvGrpSpPr/>
+        <p:nvPr/>
+      </p:nvGrpSpPr>
+      <p:grpSpPr>
+        <a:xfrm>
+          <a:off x="0" y="0"/>
+          <a:ext cx="0" cy="0"/>
+          <a:chOff x="0" y="0"/>
+          <a:chExt cx="0" cy="0"/>
+        </a:xfrm>
+      </p:grpSpPr>
+      <p:sp>
+        <p:nvSpPr>
+          <p:cNvPr id="2" name="Slide Image Placeholder 1"/>
+          <p:cNvSpPr>
+            <a:spLocks noGrp="1" noRot="1" noChangeAspect="1"/>
+          </p:cNvSpPr>
+          <p:nvPr>
+            <p:ph type="sldImg"/>
+          </p:nvPr>
+        </p:nvSpPr>
+        <p:spPr/>
+      </p:sp>
+      <p:sp>
+        <p:nvSpPr>
+          <p:cNvPr id="3" name="Notes Placeholder 2"/>
+          <p:cNvSpPr>
+            <a:spLocks noGrp="1"/>
+          </p:cNvSpPr>
+          <p:nvPr>
+            <p:ph type="body" idx="1"/>
+          </p:nvPr>
+        </p:nvSpPr>
+        <p:spPr/>
+        <p:txBody>
+          <a:bodyPr/>
+          <a:lstStyle/>
+          <a:p>
+            <a:r>
+              <a:rPr lang="en-US" dirty="0"/>
+              <a:t/>
+            </a:r>
+            <a:endParaRPr lang="en-US" dirty="0"/>
+          </a:p>
+        </p:txBody>
+      </p:sp>
+      <p:sp>
+        <p:nvSpPr>
+          <p:cNvPr id="4" name="Slide Number Placeholder 3"/>
+          <p:cNvSpPr>
+            <a:spLocks noGrp="1"/>
+          </p:cNvSpPr>
+          <p:nvPr>
+            <p:ph type="sldNum" sz="quarter" idx="10"/>
+          </p:nvPr>
+        </p:nvSpPr>
+        <p:spPr/>
+        <p:txBody>
+          <a:bodyPr/>
+          <a:lstStyle/>
+          <a:p>
+            <a:fld id="{F7021451-1387-4CA6-816F-3879F97B5CBC}" type="slidenum">
+              <a:rPr lang="en-US"/>
+              <a:t>15</a:t>
+            </a:fld>
+            <a:endParaRPr lang="en-US"/>
+          </a:p>
+        </p:txBody>
+      </p:sp>
+    </p:spTree>
+    <p:extLst>
+      <p:ext uri="{BB962C8B-B14F-4D97-AF65-F5344CB8AC3E}">
+        <p14:creationId xmlns:p14="http://schemas.microsoft.com/office/powerpoint/2010/main" val="1024086991"/>
+      </p:ext>
+    </p:extLst>
+  </p:cSld>
+  <p:clrMapOvr>
+    <a:masterClrMapping/>
+  </p:clrMapOvr>
+</p:notes>
+</file>
+
+<file path=ppt/notesSlides/notesSlide16.xml><?xml version="1.0" encoding="utf-8"?>
+<p:notes xmlns:a="http://schemas.openxmlformats.org/drawingml/2006/main" xmlns:r="http://schemas.openxmlformats.org/officeDocument/2006/relationships" xmlns:p="http://schemas.openxmlformats.org/presentationml/2006/main">
+  <p:cSld>
+    <p:spTree>
+      <p:nvGrpSpPr>
+        <p:cNvPr id="1" name=""/>
+        <p:cNvGrpSpPr/>
+        <p:nvPr/>
+      </p:nvGrpSpPr>
+      <p:grpSpPr>
+        <a:xfrm>
+          <a:off x="0" y="0"/>
+          <a:ext cx="0" cy="0"/>
+          <a:chOff x="0" y="0"/>
+          <a:chExt cx="0" cy="0"/>
+        </a:xfrm>
+      </p:grpSpPr>
+      <p:sp>
+        <p:nvSpPr>
+          <p:cNvPr id="2" name="Slide Image Placeholder 1"/>
+          <p:cNvSpPr>
+            <a:spLocks noGrp="1" noRot="1" noChangeAspect="1"/>
+          </p:cNvSpPr>
+          <p:nvPr>
+            <p:ph type="sldImg"/>
+          </p:nvPr>
+        </p:nvSpPr>
+        <p:spPr/>
+      </p:sp>
+      <p:sp>
+        <p:nvSpPr>
+          <p:cNvPr id="3" name="Notes Placeholder 2"/>
+          <p:cNvSpPr>
+            <a:spLocks noGrp="1"/>
+          </p:cNvSpPr>
+          <p:nvPr>
+            <p:ph type="body" idx="1"/>
+          </p:nvPr>
+        </p:nvSpPr>
+        <p:spPr/>
+        <p:txBody>
+          <a:bodyPr/>
+          <a:lstStyle/>
+          <a:p>
+            <a:r>
+              <a:rPr lang="en-US" dirty="0"/>
+              <a:t/>
+            </a:r>
+            <a:endParaRPr lang="en-US" dirty="0"/>
+          </a:p>
+        </p:txBody>
+      </p:sp>
+      <p:sp>
+        <p:nvSpPr>
+          <p:cNvPr id="4" name="Slide Number Placeholder 3"/>
+          <p:cNvSpPr>
+            <a:spLocks noGrp="1"/>
+          </p:cNvSpPr>
+          <p:nvPr>
+            <p:ph type="sldNum" sz="quarter" idx="10"/>
+          </p:nvPr>
+        </p:nvSpPr>
+        <p:spPr/>
+        <p:txBody>
+          <a:bodyPr/>
+          <a:lstStyle/>
+          <a:p>
+            <a:fld id="{F7021451-1387-4CA6-816F-3879F97B5CBC}" type="slidenum">
+              <a:rPr lang="en-US"/>
+              <a:t>16</a:t>
+            </a:fld>
+            <a:endParaRPr lang="en-US"/>
+          </a:p>
+        </p:txBody>
+      </p:sp>
+    </p:spTree>
+    <p:extLst>
+      <p:ext uri="{BB962C8B-B14F-4D97-AF65-F5344CB8AC3E}">
+        <p14:creationId xmlns:p14="http://schemas.microsoft.com/office/powerpoint/2010/main" val="1024086991"/>
+      </p:ext>
+    </p:extLst>
+  </p:cSld>
+  <p:clrMapOvr>
+    <a:masterClrMapping/>
+  </p:clrMapOvr>
+</p:notes>
+</file>
+
+<file path=ppt/notesSlides/notesSlide17.xml><?xml version="1.0" encoding="utf-8"?>
+<p:notes xmlns:a="http://schemas.openxmlformats.org/drawingml/2006/main" xmlns:r="http://schemas.openxmlformats.org/officeDocument/2006/relationships" xmlns:p="http://schemas.openxmlformats.org/presentationml/2006/main">
+  <p:cSld>
+    <p:spTree>
+      <p:nvGrpSpPr>
+        <p:cNvPr id="1" name=""/>
+        <p:cNvGrpSpPr/>
+        <p:nvPr/>
+      </p:nvGrpSpPr>
+      <p:grpSpPr>
+        <a:xfrm>
+          <a:off x="0" y="0"/>
+          <a:ext cx="0" cy="0"/>
+          <a:chOff x="0" y="0"/>
+          <a:chExt cx="0" cy="0"/>
+        </a:xfrm>
+      </p:grpSpPr>
+      <p:sp>
+        <p:nvSpPr>
+          <p:cNvPr id="2" name="Slide Image Placeholder 1"/>
+          <p:cNvSpPr>
+            <a:spLocks noGrp="1" noRot="1" noChangeAspect="1"/>
+          </p:cNvSpPr>
+          <p:nvPr>
+            <p:ph type="sldImg"/>
+          </p:nvPr>
+        </p:nvSpPr>
+        <p:spPr/>
+      </p:sp>
+      <p:sp>
+        <p:nvSpPr>
+          <p:cNvPr id="3" name="Notes Placeholder 2"/>
+          <p:cNvSpPr>
+            <a:spLocks noGrp="1"/>
+          </p:cNvSpPr>
+          <p:nvPr>
+            <p:ph type="body" idx="1"/>
+          </p:nvPr>
+        </p:nvSpPr>
+        <p:spPr/>
+        <p:txBody>
+          <a:bodyPr/>
+          <a:lstStyle/>
+          <a:p>
+            <a:r>
+              <a:rPr lang="en-US" dirty="0"/>
+              <a:t/>
+            </a:r>
+            <a:endParaRPr lang="en-US" dirty="0"/>
+          </a:p>
+        </p:txBody>
+      </p:sp>
+      <p:sp>
+        <p:nvSpPr>
+          <p:cNvPr id="4" name="Slide Number Placeholder 3"/>
+          <p:cNvSpPr>
+            <a:spLocks noGrp="1"/>
+          </p:cNvSpPr>
+          <p:nvPr>
+            <p:ph type="sldNum" sz="quarter" idx="10"/>
+          </p:nvPr>
+        </p:nvSpPr>
+        <p:spPr/>
+        <p:txBody>
+          <a:bodyPr/>
+          <a:lstStyle/>
+          <a:p>
+            <a:fld id="{F7021451-1387-4CA6-816F-3879F97B5CBC}" type="slidenum">
+              <a:rPr lang="en-US"/>
+              <a:t>17</a:t>
+            </a:fld>
+            <a:endParaRPr lang="en-US"/>
+          </a:p>
+        </p:txBody>
+      </p:sp>
+    </p:spTree>
+    <p:extLst>
+      <p:ext uri="{BB962C8B-B14F-4D97-AF65-F5344CB8AC3E}">
+        <p14:creationId xmlns:p14="http://schemas.microsoft.com/office/powerpoint/2010/main" val="1024086991"/>
+      </p:ext>
+    </p:extLst>
+  </p:cSld>
+  <p:clrMapOvr>
+    <a:masterClrMapping/>
+  </p:clrMapOvr>
+</p:notes>
+</file>
+
+<file path=ppt/notesSlides/notesSlide18.xml><?xml version="1.0" encoding="utf-8"?>
+<p:notes xmlns:a="http://schemas.openxmlformats.org/drawingml/2006/main" xmlns:r="http://schemas.openxmlformats.org/officeDocument/2006/relationships" xmlns:p="http://schemas.openxmlformats.org/presentationml/2006/main">
+  <p:cSld>
+    <p:spTree>
+      <p:nvGrpSpPr>
+        <p:cNvPr id="1" name=""/>
+        <p:cNvGrpSpPr/>
+        <p:nvPr/>
+      </p:nvGrpSpPr>
+      <p:grpSpPr>
+        <a:xfrm>
+          <a:off x="0" y="0"/>
+          <a:ext cx="0" cy="0"/>
+          <a:chOff x="0" y="0"/>
+          <a:chExt cx="0" cy="0"/>
+        </a:xfrm>
+      </p:grpSpPr>
+      <p:sp>
+        <p:nvSpPr>
+          <p:cNvPr id="2" name="Slide Image Placeholder 1"/>
+          <p:cNvSpPr>
+            <a:spLocks noGrp="1" noRot="1" noChangeAspect="1"/>
+          </p:cNvSpPr>
+          <p:nvPr>
+            <p:ph type="sldImg"/>
+          </p:nvPr>
+        </p:nvSpPr>
+        <p:spPr/>
+      </p:sp>
+      <p:sp>
+        <p:nvSpPr>
+          <p:cNvPr id="3" name="Notes Placeholder 2"/>
+          <p:cNvSpPr>
+            <a:spLocks noGrp="1"/>
+          </p:cNvSpPr>
+          <p:nvPr>
+            <p:ph type="body" idx="1"/>
+          </p:nvPr>
+        </p:nvSpPr>
+        <p:spPr/>
+        <p:txBody>
+          <a:bodyPr/>
+          <a:lstStyle/>
+          <a:p>
+            <a:r>
+              <a:rPr lang="en-US" dirty="0"/>
+              <a:t/>
+            </a:r>
+            <a:endParaRPr lang="en-US" dirty="0"/>
+          </a:p>
+        </p:txBody>
+      </p:sp>
+      <p:sp>
+        <p:nvSpPr>
+          <p:cNvPr id="4" name="Slide Number Placeholder 3"/>
+          <p:cNvSpPr>
+            <a:spLocks noGrp="1"/>
+          </p:cNvSpPr>
+          <p:nvPr>
+            <p:ph type="sldNum" sz="quarter" idx="10"/>
+          </p:nvPr>
+        </p:nvSpPr>
+        <p:spPr/>
+        <p:txBody>
+          <a:bodyPr/>
+          <a:lstStyle/>
+          <a:p>
+            <a:fld id="{F7021451-1387-4CA6-816F-3879F97B5CBC}" type="slidenum">
+              <a:rPr lang="en-US"/>
+              <a:t>18</a:t>
             </a:fld>
             <a:endParaRPr lang="en-US"/>
           </a:p>
@@ -2100,148 +2634,6 @@
         </p:nvSpPr>
         <p:spPr>
           <a:xfrm>
-            <a:off x="406301" y="1574453"/>
-            <a:ext cx="8498026" cy="274290"/>
-          </a:xfrm>
-          <a:prstGeom prst="rect">
-            <a:avLst/>
-          </a:prstGeom>
-          <a:noFill/>
-          <a:ln/>
-        </p:spPr>
-        <p:txBody>
-          <a:bodyPr wrap="square" lIns="0" tIns="0" rIns="0" bIns="0" rtlCol="0" anchor="t"/>
-          <a:lstStyle/>
-          <a:p>
-            <a:pPr algn="l" indent="0" marL="0">
-              <a:lnSpc>
-                <a:spcPts val="2160"/>
-              </a:lnSpc>
-              <a:spcBef>
-                <a:spcPts val="600"/>
-              </a:spcBef>
-              <a:spcAft>
-                <a:spcPts val="800"/>
-              </a:spcAft>
-              <a:buNone/>
-            </a:pPr>
-            <a:r>
-              <a:rPr lang="en-US" sz="1800" b="1" dirty="0">
-                <a:solidFill>
-                  <a:srgbClr val="FE4447"/>
-                </a:solidFill>
-                <a:latin typeface="Georgia" pitchFamily="34" charset="0"/>
-                <a:ea typeface="Georgia" pitchFamily="34" charset="-122"/>
-                <a:cs typeface="Georgia" pitchFamily="34" charset="-120"/>
-              </a:rPr>
-              <a:t>Learning objective</a:t>
-            </a:r>
-            <a:endParaRPr lang="en-US" sz="1800" dirty="0"/>
-          </a:p>
-        </p:txBody>
-      </p:sp>
-      <p:sp>
-        <p:nvSpPr>
-          <p:cNvPr id="6" name="Text 4"/>
-          <p:cNvSpPr/>
-          <p:nvPr/>
-        </p:nvSpPr>
-        <p:spPr>
-          <a:xfrm>
-            <a:off x="406301" y="1988344"/>
-            <a:ext cx="8498026" cy="426541"/>
-          </a:xfrm>
-          <a:prstGeom prst="rect">
-            <a:avLst/>
-          </a:prstGeom>
-          <a:noFill/>
-          <a:ln/>
-        </p:spPr>
-        <p:txBody>
-          <a:bodyPr wrap="square" lIns="0" tIns="0" rIns="0" bIns="0" rtlCol="0" anchor="t"/>
-          <a:lstStyle/>
-          <a:p>
-            <a:pPr algn="l" indent="0" marL="0">
-              <a:lnSpc>
-                <a:spcPts val="1680"/>
-              </a:lnSpc>
-              <a:spcBef>
-                <a:spcPts val="300"/>
-              </a:spcBef>
-              <a:spcAft>
-                <a:spcPts val="300"/>
-              </a:spcAft>
-              <a:buNone/>
-            </a:pPr>
-            <a:r>
-              <a:rPr lang="en-US" sz="1200" dirty="0">
-                <a:solidFill>
-                  <a:srgbClr val="1C2833"/>
-                </a:solidFill>
-                <a:latin typeface="Arial" pitchFamily="34" charset="0"/>
-                <a:ea typeface="Arial" pitchFamily="34" charset="-122"/>
-                <a:cs typeface="Arial" pitchFamily="34" charset="-120"/>
-              </a:rPr>
-              <a:t>By the end of this lesson, students will compare the </a:t>
-            </a:r>
-            <a:pPr algn="l" indent="0" marL="0">
-              <a:lnSpc>
-                <a:spcPts val="1680"/>
-              </a:lnSpc>
-              <a:spcBef>
-                <a:spcPts val="300"/>
-              </a:spcBef>
-              <a:spcAft>
-                <a:spcPts val="300"/>
-              </a:spcAft>
-              <a:buNone/>
-            </a:pPr>
-            <a:r>
-              <a:rPr lang="en-US" sz="1200" i="1" dirty="0">
-                <a:solidFill>
-                  <a:srgbClr val="1C2833"/>
-                </a:solidFill>
-                <a:latin typeface="Arial" pitchFamily="34" charset="0"/>
-                <a:ea typeface="Arial" pitchFamily="34" charset="-122"/>
-                <a:cs typeface="Arial" pitchFamily="34" charset="-120"/>
-              </a:rPr>
-              <a:t>pañcabhūta</a:t>
-            </a:r>
-            <a:pPr algn="l" indent="0" marL="0">
-              <a:lnSpc>
-                <a:spcPts val="1680"/>
-              </a:lnSpc>
-              <a:spcBef>
-                <a:spcPts val="300"/>
-              </a:spcBef>
-              <a:spcAft>
-                <a:spcPts val="300"/>
-              </a:spcAft>
-              <a:buNone/>
-            </a:pPr>
-            <a:r>
-              <a:rPr lang="en-US" sz="1200" dirty="0">
-                <a:solidFill>
-                  <a:srgbClr val="1C2833"/>
-                </a:solidFill>
-                <a:latin typeface="Arial" pitchFamily="34" charset="0"/>
-                <a:ea typeface="Arial" pitchFamily="34" charset="-122"/>
-                <a:cs typeface="Arial" pitchFamily="34" charset="-120"/>
-              </a:rPr>
-              <a:t> framework with the modern states-of-matter / periodic-table framework, identifying what each captures that the other does not.</a:t>
-            </a:r>
-            <a:endParaRPr lang="en-US" sz="1200" dirty="0"/>
-          </a:p>
-        </p:txBody>
-      </p:sp>
-      <p:sp>
-        <p:nvSpPr>
-          <p:cNvPr id="7" name="Text 5"/>
-          <p:cNvSpPr/>
-          <p:nvPr/>
-        </p:nvSpPr>
-        <p:spPr>
-          <a:xfrm>
             <a:off x="406301" y="4434929"/>
             <a:ext cx="8498026" cy="213271"/>
           </a:xfrm>
@@ -2386,7 +2778,7 @@
                 <a:ea typeface="Georgia" pitchFamily="34" charset="-122"/>
                 <a:cs typeface="Georgia" pitchFamily="34" charset="-120"/>
               </a:rPr>
-              <a:t>Differentiation</a:t>
+              <a:t>Core (25 min) (cont.)</a:t>
             </a:r>
             <a:endParaRPr lang="en-US" sz="1800" dirty="0"/>
           </a:p>
@@ -2401,7 +2793,7 @@
         <p:spPr>
           <a:xfrm>
             <a:off x="634901" y="883593"/>
-            <a:ext cx="8102798" cy="937022"/>
+            <a:ext cx="8102798" cy="281880"/>
           </a:xfrm>
           <a:prstGeom prst="rect">
             <a:avLst/>
@@ -2432,7 +2824,7 @@
                 <a:ea typeface="Arial" pitchFamily="34" charset="-122"/>
                 <a:cs typeface="Arial" pitchFamily="34" charset="-120"/>
               </a:rPr>
-              <a:t>One tier up:</a:t>
+              <a:t>Useful for</a:t>
             </a:r>
             <a:pPr algn="l" indent="0" marL="0">
               <a:lnSpc>
@@ -2452,130 +2844,32 @@
                 <a:ea typeface="Arial" pitchFamily="34" charset="-122"/>
                 <a:cs typeface="Arial" pitchFamily="34" charset="-120"/>
               </a:rPr>
-              <a:t> Read about </a:t>
-            </a:r>
-            <a:pPr algn="l" indent="0" marL="0">
-              <a:lnSpc>
-                <a:spcPts val="1620"/>
-              </a:lnSpc>
-              <a:spcAft>
-                <a:spcPts val="300"/>
-              </a:spcAft>
-              <a:buNone/>
-            </a:pPr>
-            <a:r>
-              <a:rPr lang="en-US" sz="1200" i="1" dirty="0">
-                <a:solidFill>
-                  <a:srgbClr val="1C2833"/>
-                </a:solidFill>
-                <a:latin typeface="Arial" pitchFamily="34" charset="0"/>
-                <a:ea typeface="Arial" pitchFamily="34" charset="-122"/>
-                <a:cs typeface="Arial" pitchFamily="34" charset="-120"/>
-              </a:rPr>
-              <a:t>plasma</a:t>
-            </a:r>
-            <a:pPr algn="l" indent="0" marL="0">
-              <a:lnSpc>
-                <a:spcPts val="1620"/>
-              </a:lnSpc>
-              <a:spcAft>
-                <a:spcPts val="300"/>
-              </a:spcAft>
-              <a:buNone/>
-            </a:pPr>
-            <a:r>
-              <a:rPr lang="en-US" sz="1200" dirty="0">
-                <a:solidFill>
-                  <a:srgbClr val="1C2833"/>
-                </a:solidFill>
-                <a:latin typeface="Arial" pitchFamily="34" charset="0"/>
-                <a:ea typeface="Arial" pitchFamily="34" charset="-122"/>
-                <a:cs typeface="Arial" pitchFamily="34" charset="-120"/>
-              </a:rPr>
-              <a:t> as a fourth state of matter. Where would </a:t>
-            </a:r>
-            <a:pPr algn="l" indent="0" marL="0">
-              <a:lnSpc>
-                <a:spcPts val="1620"/>
-              </a:lnSpc>
-              <a:spcAft>
-                <a:spcPts val="300"/>
-              </a:spcAft>
-              <a:buNone/>
-            </a:pPr>
-            <a:r>
-              <a:rPr lang="en-US" sz="1200" i="1" dirty="0">
-                <a:solidFill>
-                  <a:srgbClr val="1C2833"/>
-                </a:solidFill>
-                <a:latin typeface="Arial" pitchFamily="34" charset="0"/>
-                <a:ea typeface="Arial" pitchFamily="34" charset="-122"/>
-                <a:cs typeface="Arial" pitchFamily="34" charset="-120"/>
-              </a:rPr>
-              <a:t>plasma</a:t>
-            </a:r>
-            <a:pPr algn="l" indent="0" marL="0">
-              <a:lnSpc>
-                <a:spcPts val="1620"/>
-              </a:lnSpc>
-              <a:spcAft>
-                <a:spcPts val="300"/>
-              </a:spcAft>
-              <a:buNone/>
-            </a:pPr>
-            <a:r>
-              <a:rPr lang="en-US" sz="1200" dirty="0">
-                <a:solidFill>
-                  <a:srgbClr val="1C2833"/>
-                </a:solidFill>
-                <a:latin typeface="Arial" pitchFamily="34" charset="0"/>
-                <a:ea typeface="Arial" pitchFamily="34" charset="-122"/>
-                <a:cs typeface="Arial" pitchFamily="34" charset="-120"/>
-              </a:rPr>
-              <a:t> fit in </a:t>
-            </a:r>
-            <a:pPr algn="l" indent="0" marL="0">
-              <a:lnSpc>
-                <a:spcPts val="1620"/>
-              </a:lnSpc>
-              <a:spcAft>
-                <a:spcPts val="300"/>
-              </a:spcAft>
-              <a:buNone/>
-            </a:pPr>
-            <a:r>
-              <a:rPr lang="en-US" sz="1200" i="1" dirty="0">
-                <a:solidFill>
-                  <a:srgbClr val="1C2833"/>
-                </a:solidFill>
-                <a:latin typeface="Arial" pitchFamily="34" charset="0"/>
-                <a:ea typeface="Arial" pitchFamily="34" charset="-122"/>
-                <a:cs typeface="Arial" pitchFamily="34" charset="-120"/>
-              </a:rPr>
-              <a:t>pañcabhūta</a:t>
-            </a:r>
-            <a:pPr algn="l" indent="0" marL="0">
-              <a:lnSpc>
-                <a:spcPts val="1620"/>
-              </a:lnSpc>
-              <a:spcAft>
-                <a:spcPts val="300"/>
-              </a:spcAft>
-              <a:buNone/>
-            </a:pPr>
-            <a:r>
-              <a:rPr lang="en-US" sz="1200" dirty="0">
-                <a:solidFill>
-                  <a:srgbClr val="1C2833"/>
-                </a:solidFill>
-                <a:latin typeface="Arial" pitchFamily="34" charset="0"/>
-                <a:ea typeface="Arial" pitchFamily="34" charset="-122"/>
-                <a:cs typeface="Arial" pitchFamily="34" charset="-120"/>
-              </a:rPr>
-              <a:t>? Defend your placement.</a:t>
+              <a:t> — Sorting your everyday environment, ecology, Ayurveda · Chemistry, materials science, physics</a:t>
             </a:r>
             <a:endParaRPr lang="en-US" sz="1200" dirty="0"/>
           </a:p>
+        </p:txBody>
+      </p:sp>
+      <p:sp>
+        <p:nvSpPr>
+          <p:cNvPr id="5" name="Text 3"/>
+          <p:cNvSpPr/>
+          <p:nvPr/>
+        </p:nvSpPr>
+        <p:spPr>
+          <a:xfrm>
+            <a:off x="634901" y="1266974"/>
+            <a:ext cx="8102798" cy="281880"/>
+          </a:xfrm>
+          <a:prstGeom prst="rect">
+            <a:avLst/>
+          </a:prstGeom>
+          <a:noFill/>
+          <a:ln/>
+        </p:spPr>
+        <p:txBody>
+          <a:bodyPr wrap="square" lIns="0" tIns="0" rIns="0" bIns="0" rtlCol="0" anchor="t"/>
+          <a:lstStyle/>
           <a:p>
             <a:pPr algn="l" marL="342900" indent="-342900">
               <a:lnSpc>
@@ -2596,67 +2890,7 @@
                 <a:ea typeface="Arial" pitchFamily="34" charset="-122"/>
                 <a:cs typeface="Arial" pitchFamily="34" charset="-120"/>
               </a:rPr>
-              <a:t>One tier down:</a:t>
-            </a:r>
-            <a:pPr algn="l" indent="0" marL="0">
-              <a:lnSpc>
-                <a:spcPts val="1620"/>
-              </a:lnSpc>
-              <a:spcAft>
-                <a:spcPts val="300"/>
-              </a:spcAft>
-              <a:buNone/>
-            </a:pPr>
-            <a:r>
-              <a:rPr lang="en-US" sz="1200" dirty="0">
-                <a:solidFill>
-                  <a:srgbClr val="1C2833"/>
-                </a:solidFill>
-                <a:latin typeface="Arial" pitchFamily="34" charset="0"/>
-                <a:ea typeface="Arial" pitchFamily="34" charset="-122"/>
-                <a:cs typeface="Arial" pitchFamily="34" charset="-120"/>
-              </a:rPr>
-              <a:t> Just remember the framing: </a:t>
-            </a:r>
-            <a:pPr algn="l" indent="0" marL="0">
-              <a:lnSpc>
-                <a:spcPts val="1620"/>
-              </a:lnSpc>
-              <a:spcAft>
-                <a:spcPts val="300"/>
-              </a:spcAft>
-              <a:buNone/>
-            </a:pPr>
-            <a:r>
-              <a:rPr lang="en-US" sz="1200" i="1" dirty="0">
-                <a:solidFill>
-                  <a:srgbClr val="1C2833"/>
-                </a:solidFill>
-                <a:latin typeface="Arial" pitchFamily="34" charset="0"/>
-                <a:ea typeface="Arial" pitchFamily="34" charset="-122"/>
-                <a:cs typeface="Arial" pitchFamily="34" charset="-120"/>
-              </a:rPr>
-              <a:t>both frameworks survive because both are useful.</a:t>
-            </a:r>
-            <a:pPr algn="l" indent="0" marL="0">
-              <a:lnSpc>
-                <a:spcPts val="1620"/>
-              </a:lnSpc>
-              <a:spcAft>
-                <a:spcPts val="300"/>
-              </a:spcAft>
-              <a:buNone/>
-            </a:pPr>
-            <a:r>
-              <a:rPr lang="en-US" sz="1200" dirty="0">
-                <a:solidFill>
-                  <a:srgbClr val="1C2833"/>
-                </a:solidFill>
-                <a:latin typeface="Arial" pitchFamily="34" charset="0"/>
-                <a:ea typeface="Arial" pitchFamily="34" charset="-122"/>
-                <a:cs typeface="Arial" pitchFamily="34" charset="-120"/>
-              </a:rPr>
-              <a:t> The comparisons can be filled in over the next few days.</a:t>
+              <a:t>Important framing (write large on the board):</a:t>
             </a:r>
             <a:endParaRPr lang="en-US" sz="1200" dirty="0"/>
           </a:p>
@@ -2664,7 +2898,223 @@
       </p:sp>
       <p:sp>
         <p:nvSpPr>
-          <p:cNvPr id="5" name="Text 3"/>
+          <p:cNvPr id="6" name="Text 4"/>
+          <p:cNvSpPr/>
+          <p:nvPr/>
+        </p:nvSpPr>
+        <p:spPr>
+          <a:xfrm>
+            <a:off x="406301" y="1650355"/>
+            <a:ext cx="8331398" cy="842963"/>
+          </a:xfrm>
+          <a:prstGeom prst="rect">
+            <a:avLst/>
+          </a:prstGeom>
+          <a:solidFill>
+            <a:srgbClr val="F4F8F9"/>
+          </a:solidFill>
+          <a:ln/>
+        </p:spPr>
+        <p:txBody>
+          <a:bodyPr wrap="square" rtlCol="0" anchor="ctr"/>
+          <a:lstStyle/>
+          <a:p>
+            <a:pPr indent="0" marL="0">
+              <a:buNone/>
+            </a:pPr>
+            <a:endParaRPr lang="en-US" dirty="0"/>
+          </a:p>
+        </p:txBody>
+      </p:sp>
+      <p:sp>
+        <p:nvSpPr>
+          <p:cNvPr id="7" name="Shape 5"/>
+          <p:cNvSpPr/>
+          <p:nvPr/>
+        </p:nvSpPr>
+        <p:spPr>
+          <a:xfrm>
+            <a:off x="434876" y="1650355"/>
+            <a:ext cx="0" cy="842963"/>
+          </a:xfrm>
+          <a:prstGeom prst="line">
+            <a:avLst/>
+          </a:prstGeom>
+          <a:noFill/>
+          <a:ln w="57150">
+            <a:solidFill>
+              <a:srgbClr val="FE4447"/>
+            </a:solidFill>
+            <a:prstDash val="solid"/>
+          </a:ln>
+        </p:spPr>
+      </p:sp>
+      <p:sp>
+        <p:nvSpPr>
+          <p:cNvPr id="8" name="Text 6"/>
+          <p:cNvSpPr/>
+          <p:nvPr/>
+        </p:nvSpPr>
+        <p:spPr>
+          <a:xfrm>
+            <a:off x="692051" y="1840855"/>
+            <a:ext cx="7973389" cy="461963"/>
+          </a:xfrm>
+          <a:prstGeom prst="rect">
+            <a:avLst/>
+          </a:prstGeom>
+          <a:noFill/>
+          <a:ln/>
+        </p:spPr>
+        <p:txBody>
+          <a:bodyPr wrap="square" lIns="0" tIns="0" rIns="0" bIns="0" rtlCol="0" anchor="t"/>
+          <a:lstStyle/>
+          <a:p>
+            <a:pPr algn="l" indent="0" marL="0">
+              <a:lnSpc>
+                <a:spcPts val="1820"/>
+              </a:lnSpc>
+              <a:spcBef>
+                <a:spcPts val="300"/>
+              </a:spcBef>
+              <a:spcAft>
+                <a:spcPts val="300"/>
+              </a:spcAft>
+              <a:buNone/>
+            </a:pPr>
+            <a:r>
+              <a:rPr lang="en-US" sz="1300" b="1" i="1" dirty="0">
+                <a:solidFill>
+                  <a:srgbClr val="1C2833"/>
+                </a:solidFill>
+                <a:latin typeface="Georgia" pitchFamily="34" charset="0"/>
+                <a:ea typeface="Georgia" pitchFamily="34" charset="-122"/>
+                <a:cs typeface="Georgia" pitchFamily="34" charset="-120"/>
+              </a:rPr>
+              <a:t>It is not a competition.</a:t>
+            </a:r>
+            <a:pPr algn="l" indent="0" marL="0">
+              <a:lnSpc>
+                <a:spcPts val="1820"/>
+              </a:lnSpc>
+              <a:spcBef>
+                <a:spcPts val="300"/>
+              </a:spcBef>
+              <a:spcAft>
+                <a:spcPts val="300"/>
+              </a:spcAft>
+              <a:buNone/>
+            </a:pPr>
+            <a:r>
+              <a:rPr lang="en-US" sz="1300" dirty="0">
+                <a:solidFill>
+                  <a:srgbClr val="1C2833"/>
+                </a:solidFill>
+                <a:latin typeface="Georgia" pitchFamily="34" charset="0"/>
+                <a:ea typeface="Georgia" pitchFamily="34" charset="-122"/>
+                <a:cs typeface="Georgia" pitchFamily="34" charset="-120"/>
+              </a:rPr>
+              <a:t> A modern chemist still uses the words </a:t>
+            </a:r>
+            <a:pPr algn="l" indent="0" marL="0">
+              <a:lnSpc>
+                <a:spcPts val="1820"/>
+              </a:lnSpc>
+              <a:spcBef>
+                <a:spcPts val="300"/>
+              </a:spcBef>
+              <a:spcAft>
+                <a:spcPts val="300"/>
+              </a:spcAft>
+              <a:buNone/>
+            </a:pPr>
+            <a:r>
+              <a:rPr lang="en-US" sz="1300" i="1" dirty="0">
+                <a:solidFill>
+                  <a:srgbClr val="1C2833"/>
+                </a:solidFill>
+                <a:latin typeface="Georgia" pitchFamily="34" charset="0"/>
+                <a:ea typeface="Georgia" pitchFamily="34" charset="-122"/>
+                <a:cs typeface="Georgia" pitchFamily="34" charset="-120"/>
+              </a:rPr>
+              <a:t>solid, liquid, gas</a:t>
+            </a:r>
+            <a:pPr algn="l" indent="0" marL="0">
+              <a:lnSpc>
+                <a:spcPts val="1820"/>
+              </a:lnSpc>
+              <a:spcBef>
+                <a:spcPts val="300"/>
+              </a:spcBef>
+              <a:spcAft>
+                <a:spcPts val="300"/>
+              </a:spcAft>
+              <a:buNone/>
+            </a:pPr>
+            <a:r>
+              <a:rPr lang="en-US" sz="1300" dirty="0">
+                <a:solidFill>
+                  <a:srgbClr val="1C2833"/>
+                </a:solidFill>
+                <a:latin typeface="Georgia" pitchFamily="34" charset="0"/>
+                <a:ea typeface="Georgia" pitchFamily="34" charset="-122"/>
+                <a:cs typeface="Georgia" pitchFamily="34" charset="-120"/>
+              </a:rPr>
+              <a:t>. Modern Indian classical music still teaches </a:t>
+            </a:r>
+            <a:pPr algn="l" indent="0" marL="0">
+              <a:lnSpc>
+                <a:spcPts val="1820"/>
+              </a:lnSpc>
+              <a:spcBef>
+                <a:spcPts val="300"/>
+              </a:spcBef>
+              <a:spcAft>
+                <a:spcPts val="300"/>
+              </a:spcAft>
+              <a:buNone/>
+            </a:pPr>
+            <a:r>
+              <a:rPr lang="en-US" sz="1300" i="1" dirty="0">
+                <a:solidFill>
+                  <a:srgbClr val="1C2833"/>
+                </a:solidFill>
+                <a:latin typeface="Georgia" pitchFamily="34" charset="0"/>
+                <a:ea typeface="Georgia" pitchFamily="34" charset="-122"/>
+                <a:cs typeface="Georgia" pitchFamily="34" charset="-120"/>
+              </a:rPr>
+              <a:t>śabda</a:t>
+            </a:r>
+            <a:pPr algn="l" indent="0" marL="0">
+              <a:lnSpc>
+                <a:spcPts val="1820"/>
+              </a:lnSpc>
+              <a:spcBef>
+                <a:spcPts val="300"/>
+              </a:spcBef>
+              <a:spcAft>
+                <a:spcPts val="300"/>
+              </a:spcAft>
+              <a:buNone/>
+            </a:pPr>
+            <a:r>
+              <a:rPr lang="en-US" sz="1300" dirty="0">
+                <a:solidFill>
+                  <a:srgbClr val="1C2833"/>
+                </a:solidFill>
+                <a:latin typeface="Georgia" pitchFamily="34" charset="0"/>
+                <a:ea typeface="Georgia" pitchFamily="34" charset="-122"/>
+                <a:cs typeface="Georgia" pitchFamily="34" charset="-120"/>
+              </a:rPr>
+              <a:t>. Both frameworks survive because both are useful.</a:t>
+            </a:r>
+            <a:endParaRPr lang="en-US" sz="1300" dirty="0"/>
+          </a:p>
+        </p:txBody>
+      </p:sp>
+      <p:sp>
+        <p:nvSpPr>
+          <p:cNvPr id="9" name="Text 7"/>
           <p:cNvSpPr/>
           <p:nvPr/>
         </p:nvSpPr>
@@ -2814,7 +3264,7 @@
                 <a:ea typeface="Georgia" pitchFamily="34" charset="-122"/>
                 <a:cs typeface="Georgia" pitchFamily="34" charset="-120"/>
               </a:rPr>
-              <a:t>Teacher notes</a:t>
+              <a:t>Core (25 min) (cont.)</a:t>
             </a:r>
             <a:endParaRPr lang="en-US" sz="1800" dirty="0"/>
           </a:p>
@@ -2828,8 +3278,8 @@
         </p:nvSpPr>
         <p:spPr>
           <a:xfrm>
-            <a:off x="406301" y="870942"/>
-            <a:ext cx="8498026" cy="1279624"/>
+            <a:off x="634901" y="883593"/>
+            <a:ext cx="8102798" cy="281880"/>
           </a:xfrm>
           <a:prstGeom prst="rect">
             <a:avLst/>
@@ -2841,13 +3291,77 @@
           <a:bodyPr wrap="square" lIns="0" tIns="0" rIns="0" bIns="0" rtlCol="0" anchor="t"/>
           <a:lstStyle/>
           <a:p>
-            <a:pPr algn="l" indent="0" marL="0">
-              <a:lnSpc>
-                <a:spcPts val="1680"/>
-              </a:lnSpc>
-              <a:spcBef>
-                <a:spcPts val="300"/>
-              </a:spcBef>
+            <a:pPr algn="l" marL="342900" indent="-342900">
+              <a:lnSpc>
+                <a:spcPts val="1620"/>
+              </a:lnSpc>
+              <a:spcAft>
+                <a:spcPts val="300"/>
+              </a:spcAft>
+              <a:buSzPct val="100000"/>
+              <a:buChar char="•"/>
+            </a:pPr>
+            <a:r>
+              <a:rPr lang="en-US" sz="1200" b="1" dirty="0">
+                <a:solidFill>
+                  <a:srgbClr val="1C2833"/>
+                </a:solidFill>
+                <a:latin typeface="Arial" pitchFamily="34" charset="0"/>
+                <a:ea typeface="Arial" pitchFamily="34" charset="-122"/>
+                <a:cs typeface="Arial" pitchFamily="34" charset="-120"/>
+              </a:rPr>
+              <a:t>One worked example: a candle flame.</a:t>
+            </a:r>
+            <a:endParaRPr lang="en-US" sz="1200" dirty="0"/>
+          </a:p>
+        </p:txBody>
+      </p:sp>
+      <p:sp>
+        <p:nvSpPr>
+          <p:cNvPr id="5" name="Text 3"/>
+          <p:cNvSpPr/>
+          <p:nvPr/>
+        </p:nvSpPr>
+        <p:spPr>
+          <a:xfrm>
+            <a:off x="634901" y="1266974"/>
+            <a:ext cx="8102798" cy="1180802"/>
+          </a:xfrm>
+          <a:prstGeom prst="rect">
+            <a:avLst/>
+          </a:prstGeom>
+          <a:noFill/>
+          <a:ln/>
+        </p:spPr>
+        <p:txBody>
+          <a:bodyPr wrap="square" lIns="0" tIns="0" rIns="0" bIns="0" rtlCol="0" anchor="t"/>
+          <a:lstStyle/>
+          <a:p>
+            <a:pPr algn="l" marL="342900" indent="-342900">
+              <a:lnSpc>
+                <a:spcPts val="1620"/>
+              </a:lnSpc>
+              <a:spcAft>
+                <a:spcPts val="300"/>
+              </a:spcAft>
+              <a:buSzPct val="100000"/>
+              <a:buChar char="•"/>
+            </a:pPr>
+            <a:r>
+              <a:rPr lang="en-US" sz="1200" i="1" dirty="0">
+                <a:solidFill>
+                  <a:srgbClr val="1C2833"/>
+                </a:solidFill>
+                <a:latin typeface="Arial" pitchFamily="34" charset="0"/>
+                <a:ea typeface="Arial" pitchFamily="34" charset="-122"/>
+                <a:cs typeface="Arial" pitchFamily="34" charset="-120"/>
+              </a:rPr>
+              <a:t>Pañcabhūta</a:t>
+            </a:r>
+            <a:pPr algn="l" indent="0" marL="0">
+              <a:lnSpc>
+                <a:spcPts val="1620"/>
+              </a:lnSpc>
               <a:spcAft>
                 <a:spcPts val="300"/>
               </a:spcAft>
@@ -2862,15 +3376,12 @@
                 <a:ea typeface="Arial" pitchFamily="34" charset="-122"/>
                 <a:cs typeface="Arial" pitchFamily="34" charset="-120"/>
               </a:rPr>
-              <a:t>– This is the day skeptical students will engage most. Welcome it. Do not retreat into "ancient Indians were right too" — that defeats the lesson. The honest stance is </a:t>
-            </a:r>
-            <a:pPr algn="l" indent="0" marL="0">
-              <a:lnSpc>
-                <a:spcPts val="1680"/>
-              </a:lnSpc>
-              <a:spcBef>
-                <a:spcPts val="300"/>
-              </a:spcBef>
+              <a:t> lens: dominantly </a:t>
+            </a:r>
+            <a:pPr algn="l" indent="0" marL="0">
+              <a:lnSpc>
+                <a:spcPts val="1620"/>
+              </a:lnSpc>
               <a:spcAft>
                 <a:spcPts val="300"/>
               </a:spcAft>
@@ -2885,15 +3396,12 @@
                 <a:ea typeface="Arial" pitchFamily="34" charset="-122"/>
                 <a:cs typeface="Arial" pitchFamily="34" charset="-120"/>
               </a:rPr>
-              <a:t>both frameworks are real intellectual achievements with different scopes</a:t>
-            </a:r>
-            <a:pPr algn="l" indent="0" marL="0">
-              <a:lnSpc>
-                <a:spcPts val="1680"/>
-              </a:lnSpc>
-              <a:spcBef>
-                <a:spcPts val="300"/>
-              </a:spcBef>
+              <a:t>tejas</a:t>
+            </a:r>
+            <a:pPr algn="l" indent="0" marL="0">
+              <a:lnSpc>
+                <a:spcPts val="1620"/>
+              </a:lnSpc>
               <a:spcAft>
                 <a:spcPts val="300"/>
               </a:spcAft>
@@ -2908,15 +3416,12 @@
                 <a:ea typeface="Arial" pitchFamily="34" charset="-122"/>
                 <a:cs typeface="Arial" pitchFamily="34" charset="-120"/>
               </a:rPr>
-              <a:t>. – If a student says "the pañcabhūta framework is incomplete because it can't predict chemistry" — they're correct. Acknowledge that. Then ask: "Can the periodic table predict whether the air in this room feels stuffy or fresh? Both frameworks have limits." – For NEP §4.6 compliance, the framing is integration, not replacement. The line to hold: students are learning </a:t>
-            </a:r>
-            <a:pPr algn="l" indent="0" marL="0">
-              <a:lnSpc>
-                <a:spcPts val="1680"/>
-              </a:lnSpc>
-              <a:spcBef>
-                <a:spcPts val="300"/>
-              </a:spcBef>
+              <a:t> (heat + light + transformation). Touching air (</a:t>
+            </a:r>
+            <a:pPr algn="l" indent="0" marL="0">
+              <a:lnSpc>
+                <a:spcPts val="1620"/>
+              </a:lnSpc>
               <a:spcAft>
                 <a:spcPts val="300"/>
               </a:spcAft>
@@ -2931,15 +3436,12 @@
                 <a:ea typeface="Arial" pitchFamily="34" charset="-122"/>
                 <a:cs typeface="Arial" pitchFamily="34" charset="-120"/>
               </a:rPr>
-              <a:t>two</a:t>
-            </a:r>
-            <a:pPr algn="l" indent="0" marL="0">
-              <a:lnSpc>
-                <a:spcPts val="1680"/>
-              </a:lnSpc>
-              <a:spcBef>
-                <a:spcPts val="300"/>
-              </a:spcBef>
+              <a:t>vāyu</a:t>
+            </a:r>
+            <a:pPr algn="l" indent="0" marL="0">
+              <a:lnSpc>
+                <a:spcPts val="1620"/>
+              </a:lnSpc>
               <a:spcAft>
                 <a:spcPts val="300"/>
               </a:spcAft>
@@ -2954,15 +3456,103 @@
                 <a:ea typeface="Arial" pitchFamily="34" charset="-122"/>
                 <a:cs typeface="Arial" pitchFamily="34" charset="-120"/>
               </a:rPr>
-              <a:t> useful frameworks, not one true one.</a:t>
+              <a:t>) which feeds it. Made possible by </a:t>
+            </a:r>
+            <a:pPr algn="l" indent="0" marL="0">
+              <a:lnSpc>
+                <a:spcPts val="1620"/>
+              </a:lnSpc>
+              <a:spcAft>
+                <a:spcPts val="300"/>
+              </a:spcAft>
+              <a:buNone/>
+            </a:pPr>
+            <a:r>
+              <a:rPr lang="en-US" sz="1200" i="1" dirty="0">
+                <a:solidFill>
+                  <a:srgbClr val="1C2833"/>
+                </a:solidFill>
+                <a:latin typeface="Arial" pitchFamily="34" charset="0"/>
+                <a:ea typeface="Arial" pitchFamily="34" charset="-122"/>
+                <a:cs typeface="Arial" pitchFamily="34" charset="-120"/>
+              </a:rPr>
+              <a:t>ākāśa</a:t>
+            </a:r>
+            <a:pPr algn="l" indent="0" marL="0">
+              <a:lnSpc>
+                <a:spcPts val="1620"/>
+              </a:lnSpc>
+              <a:spcAft>
+                <a:spcPts val="300"/>
+              </a:spcAft>
+              <a:buNone/>
+            </a:pPr>
+            <a:r>
+              <a:rPr lang="en-US" sz="1200" dirty="0">
+                <a:solidFill>
+                  <a:srgbClr val="1C2833"/>
+                </a:solidFill>
+                <a:latin typeface="Arial" pitchFamily="34" charset="0"/>
+                <a:ea typeface="Arial" pitchFamily="34" charset="-122"/>
+                <a:cs typeface="Arial" pitchFamily="34" charset="-120"/>
+              </a:rPr>
+              <a:t> around it.</a:t>
             </a:r>
             <a:endParaRPr lang="en-US" sz="1200" dirty="0"/>
           </a:p>
-        </p:txBody>
-      </p:sp>
-      <p:sp>
-        <p:nvSpPr>
-          <p:cNvPr id="5" name="Text 3"/>
+          <a:p>
+            <a:pPr algn="l" marL="342900" indent="-342900">
+              <a:lnSpc>
+                <a:spcPts val="1620"/>
+              </a:lnSpc>
+              <a:spcAft>
+                <a:spcPts val="300"/>
+              </a:spcAft>
+              <a:buSzPct val="100000"/>
+              <a:buChar char="•"/>
+            </a:pPr>
+            <a:r>
+              <a:rPr lang="en-US" sz="1200" dirty="0">
+                <a:solidFill>
+                  <a:srgbClr val="1C2833"/>
+                </a:solidFill>
+                <a:latin typeface="Arial" pitchFamily="34" charset="0"/>
+                <a:ea typeface="Arial" pitchFamily="34" charset="-122"/>
+                <a:cs typeface="Arial" pitchFamily="34" charset="-120"/>
+              </a:rPr>
+              <a:t>Modern chemistry lens: combustion reaction — hydrocarbon (wax) + O₂ → CO₂ + H₂O + light + heat. The "flame" is incandescent gas (mostly soot particles glowing).</a:t>
+            </a:r>
+            <a:endParaRPr lang="en-US" sz="1200" dirty="0"/>
+          </a:p>
+          <a:p>
+            <a:pPr algn="l" marL="342900" indent="-342900">
+              <a:lnSpc>
+                <a:spcPts val="1620"/>
+              </a:lnSpc>
+              <a:spcAft>
+                <a:spcPts val="300"/>
+              </a:spcAft>
+              <a:buSzPct val="100000"/>
+              <a:buChar char="•"/>
+            </a:pPr>
+            <a:r>
+              <a:rPr lang="en-US" sz="1200" dirty="0">
+                <a:solidFill>
+                  <a:srgbClr val="1C2833"/>
+                </a:solidFill>
+                <a:latin typeface="Arial" pitchFamily="34" charset="0"/>
+                <a:ea typeface="Arial" pitchFamily="34" charset="-122"/>
+                <a:cs typeface="Arial" pitchFamily="34" charset="-120"/>
+              </a:rPr>
+              <a:t>Same object, two complete descriptions. Neither one wrong.</a:t>
+            </a:r>
+            <a:endParaRPr lang="en-US" sz="1200" dirty="0"/>
+          </a:p>
+        </p:txBody>
+      </p:sp>
+      <p:sp>
+        <p:nvSpPr>
+          <p:cNvPr id="6" name="Text 4"/>
           <p:cNvSpPr/>
           <p:nvPr/>
         </p:nvSpPr>
@@ -3112,7 +3702,7 @@
                 <a:ea typeface="Georgia" pitchFamily="34" charset="-122"/>
                 <a:cs typeface="Georgia" pitchFamily="34" charset="-120"/>
               </a:rPr>
-              <a:t>Citation(s) used in this lesson</a:t>
+              <a:t>Activity (10 min) — Compare-Contrast Worksheet</a:t>
             </a:r>
             <a:endParaRPr lang="en-US" sz="1800" dirty="0"/>
           </a:p>
@@ -3127,7 +3717,7 @@
         <p:spPr>
           <a:xfrm>
             <a:off x="406301" y="870942"/>
-            <a:ext cx="8498026" cy="436066"/>
+            <a:ext cx="8498026" cy="213271"/>
           </a:xfrm>
           <a:prstGeom prst="rect">
             <a:avLst/>
@@ -3160,7 +3750,7 @@
                 <a:ea typeface="Arial" pitchFamily="34" charset="-122"/>
                 <a:cs typeface="Arial" pitchFamily="34" charset="-120"/>
               </a:rPr>
-              <a:t>– No new RAG citations introduced. – Modern science references: NCERT Class 9 Science, Chapters 1 ("Matter in Our Surroundings") and 5 — see </a:t>
+              <a:t>Students pick </a:t>
             </a:r>
             <a:pPr algn="l" indent="0" marL="0">
               <a:lnSpc>
@@ -3175,6 +3765,29 @@
               <a:buNone/>
             </a:pPr>
             <a:r>
+              <a:rPr lang="en-US" sz="1200" b="1" dirty="0">
+                <a:solidFill>
+                  <a:srgbClr val="1C2833"/>
+                </a:solidFill>
+                <a:latin typeface="Arial" pitchFamily="34" charset="0"/>
+                <a:ea typeface="Arial" pitchFamily="34" charset="-122"/>
+                <a:cs typeface="Arial" pitchFamily="34" charset="-120"/>
+              </a:rPr>
+              <a:t>any 3 objects</a:t>
+            </a:r>
+            <a:pPr algn="l" indent="0" marL="0">
+              <a:lnSpc>
+                <a:spcPts val="1680"/>
+              </a:lnSpc>
+              <a:spcBef>
+                <a:spcPts val="300"/>
+              </a:spcBef>
+              <a:spcAft>
+                <a:spcPts val="300"/>
+              </a:spcAft>
+              <a:buNone/>
+            </a:pPr>
+            <a:r>
               <a:rPr lang="en-US" sz="1200" dirty="0">
                 <a:solidFill>
                   <a:srgbClr val="1C2833"/>
@@ -3183,15 +3796,2252 @@
                 <a:ea typeface="Arial" pitchFamily="34" charset="-122"/>
                 <a:cs typeface="Arial" pitchFamily="34" charset="-120"/>
               </a:rPr>
+              <a:t> from the Day 4 sort. For each, they fill in a 2-column row:</a:t>
+            </a:r>
+            <a:endParaRPr lang="en-US" sz="1200" dirty="0"/>
+          </a:p>
+        </p:txBody>
+      </p:sp>
+      <p:sp>
+        <p:nvSpPr>
+          <p:cNvPr id="5" name="Text 3"/>
+          <p:cNvSpPr/>
+          <p:nvPr/>
+        </p:nvSpPr>
+        <p:spPr>
+          <a:xfrm>
+            <a:off x="634901" y="1173063"/>
+            <a:ext cx="8102798" cy="525661"/>
+          </a:xfrm>
+          <a:prstGeom prst="rect">
+            <a:avLst/>
+          </a:prstGeom>
+          <a:noFill/>
+          <a:ln/>
+        </p:spPr>
+        <p:txBody>
+          <a:bodyPr wrap="square" lIns="0" tIns="0" rIns="0" bIns="0" rtlCol="0" anchor="t"/>
+          <a:lstStyle/>
+          <a:p>
+            <a:pPr algn="l" marL="342900" indent="-342900">
+              <a:lnSpc>
+                <a:spcPts val="1620"/>
+              </a:lnSpc>
+              <a:spcAft>
+                <a:spcPts val="300"/>
+              </a:spcAft>
+              <a:buSzPct val="100000"/>
+              <a:buChar char="•"/>
+            </a:pPr>
+            <a:r>
+              <a:rPr lang="en-US" sz="1200" b="1" dirty="0">
+                <a:solidFill>
+                  <a:srgbClr val="1C2833"/>
+                </a:solidFill>
+                <a:latin typeface="Arial" pitchFamily="34" charset="0"/>
+                <a:ea typeface="Arial" pitchFamily="34" charset="-122"/>
+                <a:cs typeface="Arial" pitchFamily="34" charset="-120"/>
+              </a:rPr>
+              <a:t>Pañcabhūta description</a:t>
+            </a:r>
+            <a:pPr algn="l" indent="0" marL="0">
+              <a:lnSpc>
+                <a:spcPts val="1620"/>
+              </a:lnSpc>
+              <a:spcAft>
+                <a:spcPts val="300"/>
+              </a:spcAft>
+              <a:buNone/>
+            </a:pPr>
+            <a:r>
+              <a:rPr lang="en-US" sz="1200" dirty="0">
+                <a:solidFill>
+                  <a:srgbClr val="1C2833"/>
+                </a:solidFill>
+                <a:latin typeface="Arial" pitchFamily="34" charset="0"/>
+                <a:ea typeface="Arial" pitchFamily="34" charset="-122"/>
+                <a:cs typeface="Arial" pitchFamily="34" charset="-120"/>
+              </a:rPr>
+              <a:t> (which element dominates, which tanmātra, which others present)</a:t>
+            </a:r>
+            <a:endParaRPr lang="en-US" sz="1200" dirty="0"/>
+          </a:p>
+          <a:p>
+            <a:pPr algn="l" marL="342900" indent="-342900">
+              <a:lnSpc>
+                <a:spcPts val="1620"/>
+              </a:lnSpc>
+              <a:spcAft>
+                <a:spcPts val="300"/>
+              </a:spcAft>
+              <a:buSzPct val="100000"/>
+              <a:buChar char="•"/>
+            </a:pPr>
+            <a:r>
+              <a:rPr lang="en-US" sz="1200" b="1" dirty="0">
+                <a:solidFill>
+                  <a:srgbClr val="1C2833"/>
+                </a:solidFill>
+                <a:latin typeface="Arial" pitchFamily="34" charset="0"/>
+                <a:ea typeface="Arial" pitchFamily="34" charset="-122"/>
+                <a:cs typeface="Arial" pitchFamily="34" charset="-120"/>
+              </a:rPr>
+              <a:t>Modern science description</a:t>
+            </a:r>
+            <a:pPr algn="l" indent="0" marL="0">
+              <a:lnSpc>
+                <a:spcPts val="1620"/>
+              </a:lnSpc>
+              <a:spcAft>
+                <a:spcPts val="300"/>
+              </a:spcAft>
+              <a:buNone/>
+            </a:pPr>
+            <a:r>
+              <a:rPr lang="en-US" sz="1200" dirty="0">
+                <a:solidFill>
+                  <a:srgbClr val="1C2833"/>
+                </a:solidFill>
+                <a:latin typeface="Arial" pitchFamily="34" charset="0"/>
+                <a:ea typeface="Arial" pitchFamily="34" charset="-122"/>
+                <a:cs typeface="Arial" pitchFamily="34" charset="-120"/>
+              </a:rPr>
+              <a:t> (state of matter, dominant chemical components if known)</a:t>
+            </a:r>
+            <a:endParaRPr lang="en-US" sz="1200" dirty="0"/>
+          </a:p>
+        </p:txBody>
+      </p:sp>
+      <p:sp>
+        <p:nvSpPr>
+          <p:cNvPr id="6" name="Text 4"/>
+          <p:cNvSpPr/>
+          <p:nvPr/>
+        </p:nvSpPr>
+        <p:spPr>
+          <a:xfrm>
+            <a:off x="406301" y="1787575"/>
+            <a:ext cx="8498026" cy="213271"/>
+          </a:xfrm>
+          <a:prstGeom prst="rect">
+            <a:avLst/>
+          </a:prstGeom>
+          <a:noFill/>
+          <a:ln/>
+        </p:spPr>
+        <p:txBody>
+          <a:bodyPr wrap="square" lIns="0" tIns="0" rIns="0" bIns="0" rtlCol="0" anchor="t"/>
+          <a:lstStyle/>
+          <a:p>
+            <a:pPr algn="l" indent="0" marL="0">
+              <a:lnSpc>
+                <a:spcPts val="1680"/>
+              </a:lnSpc>
+              <a:spcBef>
+                <a:spcPts val="300"/>
+              </a:spcBef>
+              <a:spcAft>
+                <a:spcPts val="300"/>
+              </a:spcAft>
+              <a:buNone/>
+            </a:pPr>
+            <a:r>
+              <a:rPr lang="en-US" sz="1200" dirty="0">
+                <a:solidFill>
+                  <a:srgbClr val="1C2833"/>
+                </a:solidFill>
+                <a:latin typeface="Arial" pitchFamily="34" charset="0"/>
+                <a:ea typeface="Arial" pitchFamily="34" charset="-122"/>
+                <a:cs typeface="Arial" pitchFamily="34" charset="-120"/>
+              </a:rPr>
+              <a:t>They then write one sentence: </a:t>
+            </a:r>
+            <a:pPr algn="l" indent="0" marL="0">
+              <a:lnSpc>
+                <a:spcPts val="1680"/>
+              </a:lnSpc>
+              <a:spcBef>
+                <a:spcPts val="300"/>
+              </a:spcBef>
+              <a:spcAft>
+                <a:spcPts val="300"/>
+              </a:spcAft>
+              <a:buNone/>
+            </a:pPr>
+            <a:r>
+              <a:rPr lang="en-US" sz="1200" i="1" dirty="0">
+                <a:solidFill>
+                  <a:srgbClr val="1C2833"/>
+                </a:solidFill>
+                <a:latin typeface="Arial" pitchFamily="34" charset="0"/>
+                <a:ea typeface="Arial" pitchFamily="34" charset="-122"/>
+                <a:cs typeface="Arial" pitchFamily="34" charset="-120"/>
+              </a:rPr>
+              <a:t>"For this object, the framework I'd choose to describe it depends on ..."</a:t>
+            </a:r>
+            <a:endParaRPr lang="en-US" sz="1200" dirty="0"/>
+          </a:p>
+        </p:txBody>
+      </p:sp>
+      <p:sp>
+        <p:nvSpPr>
+          <p:cNvPr id="7" name="Text 5"/>
+          <p:cNvSpPr/>
+          <p:nvPr/>
+        </p:nvSpPr>
+        <p:spPr>
+          <a:xfrm>
+            <a:off x="406301" y="4434929"/>
+            <a:ext cx="8498026" cy="213271"/>
+          </a:xfrm>
+          <a:prstGeom prst="rect">
+            <a:avLst/>
+          </a:prstGeom>
+          <a:noFill/>
+          <a:ln/>
+        </p:spPr>
+        <p:txBody>
+          <a:bodyPr wrap="square" lIns="0" tIns="0" rIns="0" bIns="0" rtlCol="0" anchor="t"/>
+          <a:lstStyle/>
+          <a:p>
+            <a:pPr algn="l" indent="0" marL="0">
+              <a:lnSpc>
+                <a:spcPts val="1680"/>
+              </a:lnSpc>
+              <a:spcBef>
+                <a:spcPts val="300"/>
+              </a:spcBef>
+              <a:spcAft>
+                <a:spcPts val="300"/>
+              </a:spcAft>
+              <a:buNone/>
+            </a:pPr>
+            <a:r>
+              <a:rPr lang="en-US" sz="1200" dirty="0">
+                <a:solidFill>
+                  <a:srgbClr val="1C2833"/>
+                </a:solidFill>
+                <a:latin typeface="Arial" pitchFamily="34" charset="0"/>
+                <a:ea typeface="Arial" pitchFamily="34" charset="-122"/>
+                <a:cs typeface="Arial" pitchFamily="34" charset="-120"/>
+              </a:rPr>
+              <a:t>Middle ·  · IKS Curriculum</a:t>
+            </a:r>
+            <a:endParaRPr lang="en-US" sz="1200" dirty="0"/>
+          </a:p>
+        </p:txBody>
+      </p:sp>
+    </p:spTree>
+  </p:cSld>
+  <p:clrMapOvr>
+    <a:masterClrMapping/>
+  </p:clrMapOvr>
+</p:sld>
+</file>
+
+<file path=ppt/slides/slide13.xml><?xml version="1.0" encoding="utf-8"?>
+<p:sld xmlns:a="http://schemas.openxmlformats.org/drawingml/2006/main" xmlns:r="http://schemas.openxmlformats.org/officeDocument/2006/relationships" xmlns:p="http://schemas.openxmlformats.org/presentationml/2006/main">
+  <p:cSld name="Slide 13">
+    <p:bg>
+      <p:bgPr>
+        <a:solidFill>
+          <a:srgbClr val="FFFFFF"/>
+        </a:solidFill>
+      </p:bgPr>
+    </p:bg>
+    <p:spTree>
+      <p:nvGrpSpPr>
+        <p:cNvPr id="1" name=""/>
+        <p:cNvGrpSpPr/>
+        <p:nvPr/>
+      </p:nvGrpSpPr>
+      <p:grpSpPr>
+        <a:xfrm>
+          <a:off x="0" y="0"/>
+          <a:ext cx="0" cy="0"/>
+          <a:chOff x="0" y="0"/>
+          <a:chExt cx="0" cy="0"/>
+        </a:xfrm>
+      </p:grpSpPr>
+      <p:sp>
+        <p:nvSpPr>
+          <p:cNvPr id="2" name="Text 0"/>
+          <p:cNvSpPr/>
+          <p:nvPr/>
+        </p:nvSpPr>
+        <p:spPr>
+          <a:xfrm>
+            <a:off x="0" y="0"/>
+            <a:ext cx="9144000" cy="101501"/>
+          </a:xfrm>
+          <a:prstGeom prst="rect">
+            <a:avLst/>
+          </a:prstGeom>
+          <a:solidFill>
+            <a:srgbClr val="277884"/>
+          </a:solidFill>
+          <a:ln/>
+        </p:spPr>
+        <p:txBody>
+          <a:bodyPr wrap="square" rtlCol="0" anchor="ctr"/>
+          <a:lstStyle/>
+          <a:p>
+            <a:pPr indent="0" marL="0">
+              <a:buNone/>
+            </a:pPr>
+            <a:endParaRPr lang="en-US" dirty="0"/>
+          </a:p>
+        </p:txBody>
+      </p:sp>
+      <p:sp>
+        <p:nvSpPr>
+          <p:cNvPr id="3" name="Text 1"/>
+          <p:cNvSpPr/>
+          <p:nvPr/>
+        </p:nvSpPr>
+        <p:spPr>
+          <a:xfrm>
+            <a:off x="406301" y="457051"/>
+            <a:ext cx="8498026" cy="274290"/>
+          </a:xfrm>
+          <a:prstGeom prst="rect">
+            <a:avLst/>
+          </a:prstGeom>
+          <a:noFill/>
+          <a:ln/>
+        </p:spPr>
+        <p:txBody>
+          <a:bodyPr wrap="square" lIns="0" tIns="0" rIns="0" bIns="0" rtlCol="0" anchor="t"/>
+          <a:lstStyle/>
+          <a:p>
+            <a:pPr algn="l" indent="0" marL="0">
+              <a:lnSpc>
+                <a:spcPts val="2160"/>
+              </a:lnSpc>
+              <a:spcBef>
+                <a:spcPts val="600"/>
+              </a:spcBef>
+              <a:spcAft>
+                <a:spcPts val="800"/>
+              </a:spcAft>
+              <a:buNone/>
+            </a:pPr>
+            <a:r>
+              <a:rPr lang="en-US" sz="1800" b="1" dirty="0">
+                <a:solidFill>
+                  <a:srgbClr val="FE4447"/>
+                </a:solidFill>
+                <a:latin typeface="Georgia" pitchFamily="34" charset="0"/>
+                <a:ea typeface="Georgia" pitchFamily="34" charset="-122"/>
+                <a:cs typeface="Georgia" pitchFamily="34" charset="-120"/>
+              </a:rPr>
+              <a:t>Wrap-up (5 min)</a:t>
+            </a:r>
+            <a:endParaRPr lang="en-US" sz="1800" dirty="0"/>
+          </a:p>
+        </p:txBody>
+      </p:sp>
+      <p:sp>
+        <p:nvSpPr>
+          <p:cNvPr id="4" name="Text 2"/>
+          <p:cNvSpPr/>
+          <p:nvPr/>
+        </p:nvSpPr>
+        <p:spPr>
+          <a:xfrm>
+            <a:off x="634901" y="883593"/>
+            <a:ext cx="8102798" cy="975122"/>
+          </a:xfrm>
+          <a:prstGeom prst="rect">
+            <a:avLst/>
+          </a:prstGeom>
+          <a:noFill/>
+          <a:ln/>
+        </p:spPr>
+        <p:txBody>
+          <a:bodyPr wrap="square" lIns="0" tIns="0" rIns="0" bIns="0" rtlCol="0" anchor="t"/>
+          <a:lstStyle/>
+          <a:p>
+            <a:pPr algn="l" marL="342900" indent="-342900">
+              <a:lnSpc>
+                <a:spcPts val="1620"/>
+              </a:lnSpc>
+              <a:spcAft>
+                <a:spcPts val="300"/>
+              </a:spcAft>
+              <a:buSzPct val="100000"/>
+              <a:buChar char="•"/>
+            </a:pPr>
+            <a:r>
+              <a:rPr lang="en-US" sz="1200" dirty="0">
+                <a:solidFill>
+                  <a:srgbClr val="1C2833"/>
+                </a:solidFill>
+                <a:latin typeface="Arial" pitchFamily="34" charset="0"/>
+                <a:ea typeface="Arial" pitchFamily="34" charset="-122"/>
+                <a:cs typeface="Arial" pitchFamily="34" charset="-120"/>
+              </a:rPr>
+              <a:t>Cold-call 3 students to share their "I'd choose framework X because ..." sentence.</a:t>
+            </a:r>
+            <a:endParaRPr lang="en-US" sz="1200" dirty="0"/>
+          </a:p>
+          <a:p>
+            <a:pPr algn="l" marL="342900" indent="-342900">
+              <a:lnSpc>
+                <a:spcPts val="1620"/>
+              </a:lnSpc>
+              <a:spcAft>
+                <a:spcPts val="300"/>
+              </a:spcAft>
+              <a:buSzPct val="100000"/>
+              <a:buChar char="•"/>
+            </a:pPr>
+            <a:r>
+              <a:rPr lang="en-US" sz="1200" dirty="0">
+                <a:solidFill>
+                  <a:srgbClr val="1C2833"/>
+                </a:solidFill>
+                <a:latin typeface="Arial" pitchFamily="34" charset="0"/>
+                <a:ea typeface="Arial" pitchFamily="34" charset="-122"/>
+                <a:cs typeface="Arial" pitchFamily="34" charset="-120"/>
+              </a:rPr>
+              <a:t>Note out loud: there's no universal right answer. The framework depends on the question.</a:t>
+            </a:r>
+            <a:endParaRPr lang="en-US" sz="1200" dirty="0"/>
+          </a:p>
+          <a:p>
+            <a:pPr algn="l" marL="342900" indent="-342900">
+              <a:lnSpc>
+                <a:spcPts val="1620"/>
+              </a:lnSpc>
+              <a:spcAft>
+                <a:spcPts val="300"/>
+              </a:spcAft>
+              <a:buSzPct val="100000"/>
+              <a:buChar char="•"/>
+            </a:pPr>
+            <a:r>
+              <a:rPr lang="en-US" sz="1200" dirty="0">
+                <a:solidFill>
+                  <a:srgbClr val="1C2833"/>
+                </a:solidFill>
+                <a:latin typeface="Arial" pitchFamily="34" charset="0"/>
+                <a:ea typeface="Arial" pitchFamily="34" charset="-122"/>
+                <a:cs typeface="Arial" pitchFamily="34" charset="-120"/>
+              </a:rPr>
+              <a:t>Preview Day 7: "Tomorrow we'll look at what happens when one of the five elements is </a:t>
+            </a:r>
+            <a:pPr algn="l" indent="0" marL="0">
+              <a:lnSpc>
+                <a:spcPts val="1620"/>
+              </a:lnSpc>
+              <a:spcAft>
+                <a:spcPts val="300"/>
+              </a:spcAft>
+              <a:buNone/>
+            </a:pPr>
+            <a:r>
+              <a:rPr lang="en-US" sz="1200" i="1" dirty="0">
+                <a:solidFill>
+                  <a:srgbClr val="1C2833"/>
+                </a:solidFill>
+                <a:latin typeface="Arial" pitchFamily="34" charset="0"/>
+                <a:ea typeface="Arial" pitchFamily="34" charset="-122"/>
+                <a:cs typeface="Arial" pitchFamily="34" charset="-120"/>
+              </a:rPr>
+              <a:t>out of balance</a:t>
+            </a:r>
+            <a:pPr algn="l" indent="0" marL="0">
+              <a:lnSpc>
+                <a:spcPts val="1620"/>
+              </a:lnSpc>
+              <a:spcAft>
+                <a:spcPts val="300"/>
+              </a:spcAft>
+              <a:buNone/>
+            </a:pPr>
+            <a:r>
+              <a:rPr lang="en-US" sz="1200" dirty="0">
+                <a:solidFill>
+                  <a:srgbClr val="1C2833"/>
+                </a:solidFill>
+                <a:latin typeface="Arial" pitchFamily="34" charset="0"/>
+                <a:ea typeface="Arial" pitchFamily="34" charset="-122"/>
+                <a:cs typeface="Arial" pitchFamily="34" charset="-120"/>
+              </a:rPr>
+              <a:t> in a real ecosystem — and what that has to do with us."</a:t>
+            </a:r>
+            <a:endParaRPr lang="en-US" sz="1200" dirty="0"/>
+          </a:p>
+        </p:txBody>
+      </p:sp>
+      <p:sp>
+        <p:nvSpPr>
+          <p:cNvPr id="5" name="Text 3"/>
+          <p:cNvSpPr/>
+          <p:nvPr/>
+        </p:nvSpPr>
+        <p:spPr>
+          <a:xfrm>
+            <a:off x="406301" y="4434929"/>
+            <a:ext cx="8498026" cy="213271"/>
+          </a:xfrm>
+          <a:prstGeom prst="rect">
+            <a:avLst/>
+          </a:prstGeom>
+          <a:noFill/>
+          <a:ln/>
+        </p:spPr>
+        <p:txBody>
+          <a:bodyPr wrap="square" lIns="0" tIns="0" rIns="0" bIns="0" rtlCol="0" anchor="t"/>
+          <a:lstStyle/>
+          <a:p>
+            <a:pPr algn="l" indent="0" marL="0">
+              <a:lnSpc>
+                <a:spcPts val="1680"/>
+              </a:lnSpc>
+              <a:spcBef>
+                <a:spcPts val="300"/>
+              </a:spcBef>
+              <a:spcAft>
+                <a:spcPts val="300"/>
+              </a:spcAft>
+              <a:buNone/>
+            </a:pPr>
+            <a:r>
+              <a:rPr lang="en-US" sz="1200" dirty="0">
+                <a:solidFill>
+                  <a:srgbClr val="1C2833"/>
+                </a:solidFill>
+                <a:latin typeface="Arial" pitchFamily="34" charset="0"/>
+                <a:ea typeface="Arial" pitchFamily="34" charset="-122"/>
+                <a:cs typeface="Arial" pitchFamily="34" charset="-120"/>
+              </a:rPr>
+              <a:t>Middle ·  · IKS Curriculum</a:t>
+            </a:r>
+            <a:endParaRPr lang="en-US" sz="1200" dirty="0"/>
+          </a:p>
+        </p:txBody>
+      </p:sp>
+    </p:spTree>
+  </p:cSld>
+  <p:clrMapOvr>
+    <a:masterClrMapping/>
+  </p:clrMapOvr>
+</p:sld>
+</file>
+
+<file path=ppt/slides/slide14.xml><?xml version="1.0" encoding="utf-8"?>
+<p:sld xmlns:a="http://schemas.openxmlformats.org/drawingml/2006/main" xmlns:r="http://schemas.openxmlformats.org/officeDocument/2006/relationships" xmlns:p="http://schemas.openxmlformats.org/presentationml/2006/main">
+  <p:cSld name="Slide 14">
+    <p:bg>
+      <p:bgPr>
+        <a:solidFill>
+          <a:srgbClr val="FFFFFF"/>
+        </a:solidFill>
+      </p:bgPr>
+    </p:bg>
+    <p:spTree>
+      <p:nvGrpSpPr>
+        <p:cNvPr id="1" name=""/>
+        <p:cNvGrpSpPr/>
+        <p:nvPr/>
+      </p:nvGrpSpPr>
+      <p:grpSpPr>
+        <a:xfrm>
+          <a:off x="0" y="0"/>
+          <a:ext cx="0" cy="0"/>
+          <a:chOff x="0" y="0"/>
+          <a:chExt cx="0" cy="0"/>
+        </a:xfrm>
+      </p:grpSpPr>
+      <p:sp>
+        <p:nvSpPr>
+          <p:cNvPr id="2" name="Text 0"/>
+          <p:cNvSpPr/>
+          <p:nvPr/>
+        </p:nvSpPr>
+        <p:spPr>
+          <a:xfrm>
+            <a:off x="0" y="0"/>
+            <a:ext cx="9144000" cy="101501"/>
+          </a:xfrm>
+          <a:prstGeom prst="rect">
+            <a:avLst/>
+          </a:prstGeom>
+          <a:solidFill>
+            <a:srgbClr val="277884"/>
+          </a:solidFill>
+          <a:ln/>
+        </p:spPr>
+        <p:txBody>
+          <a:bodyPr wrap="square" rtlCol="0" anchor="ctr"/>
+          <a:lstStyle/>
+          <a:p>
+            <a:pPr indent="0" marL="0">
+              <a:buNone/>
+            </a:pPr>
+            <a:endParaRPr lang="en-US" dirty="0"/>
+          </a:p>
+        </p:txBody>
+      </p:sp>
+      <p:sp>
+        <p:nvSpPr>
+          <p:cNvPr id="3" name="Text 1"/>
+          <p:cNvSpPr/>
+          <p:nvPr/>
+        </p:nvSpPr>
+        <p:spPr>
+          <a:xfrm>
+            <a:off x="406301" y="457051"/>
+            <a:ext cx="8498026" cy="274290"/>
+          </a:xfrm>
+          <a:prstGeom prst="rect">
+            <a:avLst/>
+          </a:prstGeom>
+          <a:noFill/>
+          <a:ln/>
+        </p:spPr>
+        <p:txBody>
+          <a:bodyPr wrap="square" lIns="0" tIns="0" rIns="0" bIns="0" rtlCol="0" anchor="t"/>
+          <a:lstStyle/>
+          <a:p>
+            <a:pPr algn="l" indent="0" marL="0">
+              <a:lnSpc>
+                <a:spcPts val="2160"/>
+              </a:lnSpc>
+              <a:spcBef>
+                <a:spcPts val="600"/>
+              </a:spcBef>
+              <a:spcAft>
+                <a:spcPts val="800"/>
+              </a:spcAft>
+              <a:buNone/>
+            </a:pPr>
+            <a:r>
+              <a:rPr lang="en-US" sz="1800" b="1" dirty="0">
+                <a:solidFill>
+                  <a:srgbClr val="FE4447"/>
+                </a:solidFill>
+                <a:latin typeface="Georgia" pitchFamily="34" charset="0"/>
+                <a:ea typeface="Georgia" pitchFamily="34" charset="-122"/>
+                <a:cs typeface="Georgia" pitchFamily="34" charset="-120"/>
+              </a:rPr>
+              <a:t>Student-facing content</a:t>
+            </a:r>
+            <a:endParaRPr lang="en-US" sz="1800" dirty="0"/>
+          </a:p>
+        </p:txBody>
+      </p:sp>
+      <p:sp>
+        <p:nvSpPr>
+          <p:cNvPr id="4" name="Text 2"/>
+          <p:cNvSpPr/>
+          <p:nvPr/>
+        </p:nvSpPr>
+        <p:spPr>
+          <a:xfrm>
+            <a:off x="406301" y="883593"/>
+            <a:ext cx="8331398" cy="2343150"/>
+          </a:xfrm>
+          <a:prstGeom prst="rect">
+            <a:avLst/>
+          </a:prstGeom>
+          <a:solidFill>
+            <a:srgbClr val="F4F8F9"/>
+          </a:solidFill>
+          <a:ln/>
+        </p:spPr>
+        <p:txBody>
+          <a:bodyPr wrap="square" rtlCol="0" anchor="ctr"/>
+          <a:lstStyle/>
+          <a:p>
+            <a:pPr indent="0" marL="0">
+              <a:buNone/>
+            </a:pPr>
+            <a:endParaRPr lang="en-US" dirty="0"/>
+          </a:p>
+        </p:txBody>
+      </p:sp>
+      <p:sp>
+        <p:nvSpPr>
+          <p:cNvPr id="5" name="Shape 3"/>
+          <p:cNvSpPr/>
+          <p:nvPr/>
+        </p:nvSpPr>
+        <p:spPr>
+          <a:xfrm>
+            <a:off x="434876" y="883593"/>
+            <a:ext cx="0" cy="2343150"/>
+          </a:xfrm>
+          <a:prstGeom prst="line">
+            <a:avLst/>
+          </a:prstGeom>
+          <a:noFill/>
+          <a:ln w="57150">
+            <a:solidFill>
+              <a:srgbClr val="FE4447"/>
+            </a:solidFill>
+            <a:prstDash val="solid"/>
+          </a:ln>
+        </p:spPr>
+      </p:sp>
+      <p:sp>
+        <p:nvSpPr>
+          <p:cNvPr id="6" name="Text 4"/>
+          <p:cNvSpPr/>
+          <p:nvPr/>
+        </p:nvSpPr>
+        <p:spPr>
+          <a:xfrm>
+            <a:off x="692051" y="1074093"/>
+            <a:ext cx="7973389" cy="230981"/>
+          </a:xfrm>
+          <a:prstGeom prst="rect">
+            <a:avLst/>
+          </a:prstGeom>
+          <a:noFill/>
+          <a:ln/>
+        </p:spPr>
+        <p:txBody>
+          <a:bodyPr wrap="square" lIns="0" tIns="0" rIns="0" bIns="0" rtlCol="0" anchor="t"/>
+          <a:lstStyle/>
+          <a:p>
+            <a:pPr algn="l" indent="0" marL="0">
+              <a:lnSpc>
+                <a:spcPts val="1820"/>
+              </a:lnSpc>
+              <a:spcBef>
+                <a:spcPts val="300"/>
+              </a:spcBef>
+              <a:spcAft>
+                <a:spcPts val="300"/>
+              </a:spcAft>
+              <a:buNone/>
+            </a:pPr>
+            <a:r>
+              <a:rPr lang="en-US" sz="1300" b="1" i="1" dirty="0">
+                <a:solidFill>
+                  <a:srgbClr val="1C2833"/>
+                </a:solidFill>
+                <a:latin typeface="Georgia" pitchFamily="34" charset="0"/>
+                <a:ea typeface="Georgia" pitchFamily="34" charset="-122"/>
+                <a:cs typeface="Georgia" pitchFamily="34" charset="-120"/>
+              </a:rPr>
+              <a:t>Two frameworks for the same world</a:t>
+            </a:r>
+            <a:endParaRPr lang="en-US" sz="1300" dirty="0"/>
+          </a:p>
+        </p:txBody>
+      </p:sp>
+      <p:sp>
+        <p:nvSpPr>
+          <p:cNvPr id="7" name="Text 5"/>
+          <p:cNvSpPr/>
+          <p:nvPr/>
+        </p:nvSpPr>
+        <p:spPr>
+          <a:xfrm>
+            <a:off x="692051" y="1343174"/>
+            <a:ext cx="7973389" cy="692944"/>
+          </a:xfrm>
+          <a:prstGeom prst="rect">
+            <a:avLst/>
+          </a:prstGeom>
+          <a:noFill/>
+          <a:ln/>
+        </p:spPr>
+        <p:txBody>
+          <a:bodyPr wrap="square" lIns="0" tIns="0" rIns="0" bIns="0" rtlCol="0" anchor="t"/>
+          <a:lstStyle/>
+          <a:p>
+            <a:pPr algn="l" indent="0" marL="0">
+              <a:lnSpc>
+                <a:spcPts val="1820"/>
+              </a:lnSpc>
+              <a:spcBef>
+                <a:spcPts val="300"/>
+              </a:spcBef>
+              <a:spcAft>
+                <a:spcPts val="300"/>
+              </a:spcAft>
+              <a:buNone/>
+            </a:pPr>
+            <a:r>
+              <a:rPr lang="en-US" sz="1300" dirty="0">
+                <a:solidFill>
+                  <a:srgbClr val="1C2833"/>
+                </a:solidFill>
+                <a:latin typeface="Georgia" pitchFamily="34" charset="0"/>
+                <a:ea typeface="Georgia" pitchFamily="34" charset="-122"/>
+                <a:cs typeface="Georgia" pitchFamily="34" charset="-120"/>
+              </a:rPr>
+              <a:t>The </a:t>
+            </a:r>
+            <a:pPr algn="l" indent="0" marL="0">
+              <a:lnSpc>
+                <a:spcPts val="1820"/>
+              </a:lnSpc>
+              <a:spcBef>
+                <a:spcPts val="300"/>
+              </a:spcBef>
+              <a:spcAft>
+                <a:spcPts val="300"/>
+              </a:spcAft>
+              <a:buNone/>
+            </a:pPr>
+            <a:r>
+              <a:rPr lang="en-US" sz="1300" i="1" dirty="0">
+                <a:solidFill>
+                  <a:srgbClr val="1C2833"/>
+                </a:solidFill>
+                <a:latin typeface="Georgia" pitchFamily="34" charset="0"/>
+                <a:ea typeface="Georgia" pitchFamily="34" charset="-122"/>
+                <a:cs typeface="Georgia" pitchFamily="34" charset="-120"/>
+              </a:rPr>
+              <a:t>pañcabhūta</a:t>
+            </a:r>
+            <a:pPr algn="l" indent="0" marL="0">
+              <a:lnSpc>
+                <a:spcPts val="1820"/>
+              </a:lnSpc>
+              <a:spcBef>
+                <a:spcPts val="300"/>
+              </a:spcBef>
+              <a:spcAft>
+                <a:spcPts val="300"/>
+              </a:spcAft>
+              <a:buNone/>
+            </a:pPr>
+            <a:r>
+              <a:rPr lang="en-US" sz="1300" dirty="0">
+                <a:solidFill>
+                  <a:srgbClr val="1C2833"/>
+                </a:solidFill>
+                <a:latin typeface="Georgia" pitchFamily="34" charset="0"/>
+                <a:ea typeface="Georgia" pitchFamily="34" charset="-122"/>
+                <a:cs typeface="Georgia" pitchFamily="34" charset="-120"/>
+              </a:rPr>
+              <a:t> tradition organises matter and space into 5 categories using sensory observation. Modern science organises matter into 118 elements (and 4+ states of matter) using experiments and measurement. They are answering different questions.</a:t>
+            </a:r>
+            <a:endParaRPr lang="en-US" sz="1300" dirty="0"/>
+          </a:p>
+        </p:txBody>
+      </p:sp>
+      <p:sp>
+        <p:nvSpPr>
+          <p:cNvPr id="8" name="Text 6"/>
+          <p:cNvSpPr/>
+          <p:nvPr/>
+        </p:nvSpPr>
+        <p:spPr>
+          <a:xfrm>
+            <a:off x="692051" y="2074218"/>
+            <a:ext cx="7973389" cy="692944"/>
+          </a:xfrm>
+          <a:prstGeom prst="rect">
+            <a:avLst/>
+          </a:prstGeom>
+          <a:noFill/>
+          <a:ln/>
+        </p:spPr>
+        <p:txBody>
+          <a:bodyPr wrap="square" lIns="0" tIns="0" rIns="0" bIns="0" rtlCol="0" anchor="t"/>
+          <a:lstStyle/>
+          <a:p>
+            <a:pPr algn="l" indent="0" marL="0">
+              <a:lnSpc>
+                <a:spcPts val="1820"/>
+              </a:lnSpc>
+              <a:spcBef>
+                <a:spcPts val="300"/>
+              </a:spcBef>
+              <a:spcAft>
+                <a:spcPts val="300"/>
+              </a:spcAft>
+              <a:buNone/>
+            </a:pPr>
+            <a:r>
+              <a:rPr lang="en-US" sz="1300" dirty="0">
+                <a:solidFill>
+                  <a:srgbClr val="1C2833"/>
+                </a:solidFill>
+                <a:latin typeface="Georgia" pitchFamily="34" charset="0"/>
+                <a:ea typeface="Georgia" pitchFamily="34" charset="-122"/>
+                <a:cs typeface="Georgia" pitchFamily="34" charset="-120"/>
+              </a:rPr>
+              <a:t>| Question | Framework that fits | |----------|--------------------| | "What's the dominant </a:t>
+            </a:r>
+            <a:pPr algn="l" indent="0" marL="0">
+              <a:lnSpc>
+                <a:spcPts val="1820"/>
+              </a:lnSpc>
+              <a:spcBef>
+                <a:spcPts val="300"/>
+              </a:spcBef>
+              <a:spcAft>
+                <a:spcPts val="300"/>
+              </a:spcAft>
+              <a:buNone/>
+            </a:pPr>
+            <a:r>
+              <a:rPr lang="en-US" sz="1300" i="1" dirty="0">
+                <a:solidFill>
+                  <a:srgbClr val="1C2833"/>
+                </a:solidFill>
+                <a:latin typeface="Georgia" pitchFamily="34" charset="0"/>
+                <a:ea typeface="Georgia" pitchFamily="34" charset="-122"/>
+                <a:cs typeface="Georgia" pitchFamily="34" charset="-120"/>
+              </a:rPr>
+              <a:t>feel</a:t>
+            </a:r>
+            <a:pPr algn="l" indent="0" marL="0">
+              <a:lnSpc>
+                <a:spcPts val="1820"/>
+              </a:lnSpc>
+              <a:spcBef>
+                <a:spcPts val="300"/>
+              </a:spcBef>
+              <a:spcAft>
+                <a:spcPts val="300"/>
+              </a:spcAft>
+              <a:buNone/>
+            </a:pPr>
+            <a:r>
+              <a:rPr lang="en-US" sz="1300" dirty="0">
+                <a:solidFill>
+                  <a:srgbClr val="1C2833"/>
+                </a:solidFill>
+                <a:latin typeface="Georgia" pitchFamily="34" charset="0"/>
+                <a:ea typeface="Georgia" pitchFamily="34" charset="-122"/>
+                <a:cs typeface="Georgia" pitchFamily="34" charset="-120"/>
+              </a:rPr>
+              <a:t> of this object?" | Pañcabhūta | | "What atoms make up this object?" | Periodic table | | "Why does soil smell after rain?" | Both, in different ways |</a:t>
+            </a:r>
+            <a:endParaRPr lang="en-US" sz="1300" dirty="0"/>
+          </a:p>
+        </p:txBody>
+      </p:sp>
+      <p:sp>
+        <p:nvSpPr>
+          <p:cNvPr id="9" name="Text 7"/>
+          <p:cNvSpPr/>
+          <p:nvPr/>
+        </p:nvSpPr>
+        <p:spPr>
+          <a:xfrm>
+            <a:off x="692051" y="2805261"/>
+            <a:ext cx="7973389" cy="230981"/>
+          </a:xfrm>
+          <a:prstGeom prst="rect">
+            <a:avLst/>
+          </a:prstGeom>
+          <a:noFill/>
+          <a:ln/>
+        </p:spPr>
+        <p:txBody>
+          <a:bodyPr wrap="square" lIns="0" tIns="0" rIns="0" bIns="0" rtlCol="0" anchor="t"/>
+          <a:lstStyle/>
+          <a:p>
+            <a:pPr algn="l" indent="0" marL="0">
+              <a:lnSpc>
+                <a:spcPts val="1820"/>
+              </a:lnSpc>
+              <a:spcBef>
+                <a:spcPts val="300"/>
+              </a:spcBef>
+              <a:spcAft>
+                <a:spcPts val="300"/>
+              </a:spcAft>
+              <a:buNone/>
+            </a:pPr>
+            <a:r>
+              <a:rPr lang="en-US" sz="1300" i="1" dirty="0">
+                <a:solidFill>
+                  <a:srgbClr val="1C2833"/>
+                </a:solidFill>
+                <a:latin typeface="Georgia" pitchFamily="34" charset="0"/>
+                <a:ea typeface="Georgia" pitchFamily="34" charset="-122"/>
+                <a:cs typeface="Georgia" pitchFamily="34" charset="-120"/>
+              </a:rPr>
+              <a:t>Both frameworks are still in use today. Neither one is "wrong."</a:t>
+            </a:r>
+            <a:endParaRPr lang="en-US" sz="1300" dirty="0"/>
+          </a:p>
+        </p:txBody>
+      </p:sp>
+      <p:sp>
+        <p:nvSpPr>
+          <p:cNvPr id="10" name="Text 8"/>
+          <p:cNvSpPr/>
+          <p:nvPr/>
+        </p:nvSpPr>
+        <p:spPr>
+          <a:xfrm>
+            <a:off x="406301" y="4434929"/>
+            <a:ext cx="8498026" cy="213271"/>
+          </a:xfrm>
+          <a:prstGeom prst="rect">
+            <a:avLst/>
+          </a:prstGeom>
+          <a:noFill/>
+          <a:ln/>
+        </p:spPr>
+        <p:txBody>
+          <a:bodyPr wrap="square" lIns="0" tIns="0" rIns="0" bIns="0" rtlCol="0" anchor="t"/>
+          <a:lstStyle/>
+          <a:p>
+            <a:pPr algn="l" indent="0" marL="0">
+              <a:lnSpc>
+                <a:spcPts val="1680"/>
+              </a:lnSpc>
+              <a:spcBef>
+                <a:spcPts val="300"/>
+              </a:spcBef>
+              <a:spcAft>
+                <a:spcPts val="300"/>
+              </a:spcAft>
+              <a:buNone/>
+            </a:pPr>
+            <a:r>
+              <a:rPr lang="en-US" sz="1200" dirty="0">
+                <a:solidFill>
+                  <a:srgbClr val="1C2833"/>
+                </a:solidFill>
+                <a:latin typeface="Arial" pitchFamily="34" charset="0"/>
+                <a:ea typeface="Arial" pitchFamily="34" charset="-122"/>
+                <a:cs typeface="Arial" pitchFamily="34" charset="-120"/>
+              </a:rPr>
+              <a:t>Middle ·  · IKS Curriculum</a:t>
+            </a:r>
+            <a:endParaRPr lang="en-US" sz="1200" dirty="0"/>
+          </a:p>
+        </p:txBody>
+      </p:sp>
+    </p:spTree>
+  </p:cSld>
+  <p:clrMapOvr>
+    <a:masterClrMapping/>
+  </p:clrMapOvr>
+</p:sld>
+</file>
+
+<file path=ppt/slides/slide15.xml><?xml version="1.0" encoding="utf-8"?>
+<p:sld xmlns:a="http://schemas.openxmlformats.org/drawingml/2006/main" xmlns:r="http://schemas.openxmlformats.org/officeDocument/2006/relationships" xmlns:p="http://schemas.openxmlformats.org/presentationml/2006/main">
+  <p:cSld name="Slide 15">
+    <p:bg>
+      <p:bgPr>
+        <a:solidFill>
+          <a:srgbClr val="FFFFFF"/>
+        </a:solidFill>
+      </p:bgPr>
+    </p:bg>
+    <p:spTree>
+      <p:nvGrpSpPr>
+        <p:cNvPr id="1" name=""/>
+        <p:cNvGrpSpPr/>
+        <p:nvPr/>
+      </p:nvGrpSpPr>
+      <p:grpSpPr>
+        <a:xfrm>
+          <a:off x="0" y="0"/>
+          <a:ext cx="0" cy="0"/>
+          <a:chOff x="0" y="0"/>
+          <a:chExt cx="0" cy="0"/>
+        </a:xfrm>
+      </p:grpSpPr>
+      <p:sp>
+        <p:nvSpPr>
+          <p:cNvPr id="2" name="Text 0"/>
+          <p:cNvSpPr/>
+          <p:nvPr/>
+        </p:nvSpPr>
+        <p:spPr>
+          <a:xfrm>
+            <a:off x="0" y="0"/>
+            <a:ext cx="9144000" cy="101501"/>
+          </a:xfrm>
+          <a:prstGeom prst="rect">
+            <a:avLst/>
+          </a:prstGeom>
+          <a:solidFill>
+            <a:srgbClr val="277884"/>
+          </a:solidFill>
+          <a:ln/>
+        </p:spPr>
+        <p:txBody>
+          <a:bodyPr wrap="square" rtlCol="0" anchor="ctr"/>
+          <a:lstStyle/>
+          <a:p>
+            <a:pPr indent="0" marL="0">
+              <a:buNone/>
+            </a:pPr>
+            <a:endParaRPr lang="en-US" dirty="0"/>
+          </a:p>
+        </p:txBody>
+      </p:sp>
+      <p:sp>
+        <p:nvSpPr>
+          <p:cNvPr id="3" name="Text 1"/>
+          <p:cNvSpPr/>
+          <p:nvPr/>
+        </p:nvSpPr>
+        <p:spPr>
+          <a:xfrm>
+            <a:off x="406301" y="457051"/>
+            <a:ext cx="8498026" cy="274290"/>
+          </a:xfrm>
+          <a:prstGeom prst="rect">
+            <a:avLst/>
+          </a:prstGeom>
+          <a:noFill/>
+          <a:ln/>
+        </p:spPr>
+        <p:txBody>
+          <a:bodyPr wrap="square" lIns="0" tIns="0" rIns="0" bIns="0" rtlCol="0" anchor="t"/>
+          <a:lstStyle/>
+          <a:p>
+            <a:pPr algn="l" indent="0" marL="0">
+              <a:lnSpc>
+                <a:spcPts val="2160"/>
+              </a:lnSpc>
+              <a:spcBef>
+                <a:spcPts val="600"/>
+              </a:spcBef>
+              <a:spcAft>
+                <a:spcPts val="800"/>
+              </a:spcAft>
+              <a:buNone/>
+            </a:pPr>
+            <a:r>
+              <a:rPr lang="en-US" sz="1800" b="1" dirty="0">
+                <a:solidFill>
+                  <a:srgbClr val="FE4447"/>
+                </a:solidFill>
+                <a:latin typeface="Georgia" pitchFamily="34" charset="0"/>
+                <a:ea typeface="Georgia" pitchFamily="34" charset="-122"/>
+                <a:cs typeface="Georgia" pitchFamily="34" charset="-120"/>
+              </a:rPr>
+              <a:t>Homework</a:t>
+            </a:r>
+            <a:endParaRPr lang="en-US" sz="1800" dirty="0"/>
+          </a:p>
+        </p:txBody>
+      </p:sp>
+      <p:sp>
+        <p:nvSpPr>
+          <p:cNvPr id="4" name="Text 2"/>
+          <p:cNvSpPr/>
+          <p:nvPr/>
+        </p:nvSpPr>
+        <p:spPr>
+          <a:xfrm>
+            <a:off x="634901" y="883593"/>
+            <a:ext cx="8102798" cy="487561"/>
+          </a:xfrm>
+          <a:prstGeom prst="rect">
+            <a:avLst/>
+          </a:prstGeom>
+          <a:noFill/>
+          <a:ln/>
+        </p:spPr>
+        <p:txBody>
+          <a:bodyPr wrap="square" lIns="0" tIns="0" rIns="0" bIns="0" rtlCol="0" anchor="t"/>
+          <a:lstStyle/>
+          <a:p>
+            <a:pPr algn="l" marL="342900" indent="-342900">
+              <a:lnSpc>
+                <a:spcPts val="1620"/>
+              </a:lnSpc>
+              <a:spcAft>
+                <a:spcPts val="300"/>
+              </a:spcAft>
+              <a:buSzPct val="100000"/>
+              <a:buChar char="•"/>
+            </a:pPr>
+            <a:r>
+              <a:rPr lang="en-US" sz="1200" dirty="0">
+                <a:solidFill>
+                  <a:srgbClr val="1C2833"/>
+                </a:solidFill>
+                <a:latin typeface="Arial" pitchFamily="34" charset="0"/>
+                <a:ea typeface="Arial" pitchFamily="34" charset="-122"/>
+                <a:cs typeface="Arial" pitchFamily="34" charset="-120"/>
+              </a:rPr>
+              <a:t>Choose </a:t>
+            </a:r>
+            <a:pPr algn="l" indent="0" marL="0">
+              <a:lnSpc>
+                <a:spcPts val="1620"/>
+              </a:lnSpc>
+              <a:spcAft>
+                <a:spcPts val="300"/>
+              </a:spcAft>
+              <a:buNone/>
+            </a:pPr>
+            <a:r>
+              <a:rPr lang="en-US" sz="1200" b="1" dirty="0">
+                <a:solidFill>
+                  <a:srgbClr val="1C2833"/>
+                </a:solidFill>
+                <a:latin typeface="Arial" pitchFamily="34" charset="0"/>
+                <a:ea typeface="Arial" pitchFamily="34" charset="-122"/>
+                <a:cs typeface="Arial" pitchFamily="34" charset="-120"/>
+              </a:rPr>
+              <a:t>one</a:t>
+            </a:r>
+            <a:pPr algn="l" indent="0" marL="0">
+              <a:lnSpc>
+                <a:spcPts val="1620"/>
+              </a:lnSpc>
+              <a:spcAft>
+                <a:spcPts val="300"/>
+              </a:spcAft>
+              <a:buNone/>
+            </a:pPr>
+            <a:r>
+              <a:rPr lang="en-US" sz="1200" dirty="0">
+                <a:solidFill>
+                  <a:srgbClr val="1C2833"/>
+                </a:solidFill>
+                <a:latin typeface="Arial" pitchFamily="34" charset="0"/>
+                <a:ea typeface="Arial" pitchFamily="34" charset="-122"/>
+                <a:cs typeface="Arial" pitchFamily="34" charset="-120"/>
+              </a:rPr>
+              <a:t> of the modules from your science textbook chapter on Matter (states of matter, or the periodic table). Write a 1-paragraph note: </a:t>
+            </a:r>
+            <a:pPr algn="l" indent="0" marL="0">
+              <a:lnSpc>
+                <a:spcPts val="1620"/>
+              </a:lnSpc>
+              <a:spcAft>
+                <a:spcPts val="300"/>
+              </a:spcAft>
+              <a:buNone/>
+            </a:pPr>
+            <a:r>
+              <a:rPr lang="en-US" sz="1200" i="1" dirty="0">
+                <a:solidFill>
+                  <a:srgbClr val="1C2833"/>
+                </a:solidFill>
+                <a:latin typeface="Arial" pitchFamily="34" charset="0"/>
+                <a:ea typeface="Arial" pitchFamily="34" charset="-122"/>
+                <a:cs typeface="Arial" pitchFamily="34" charset="-120"/>
+              </a:rPr>
+              <a:t>what would the pañcabhūta framework get right about this topic, and what would it miss?</a:t>
+            </a:r>
+            <a:endParaRPr lang="en-US" sz="1200" dirty="0"/>
+          </a:p>
+        </p:txBody>
+      </p:sp>
+      <p:sp>
+        <p:nvSpPr>
+          <p:cNvPr id="5" name="Text 3"/>
+          <p:cNvSpPr/>
+          <p:nvPr/>
+        </p:nvSpPr>
+        <p:spPr>
+          <a:xfrm>
+            <a:off x="406301" y="4434929"/>
+            <a:ext cx="8498026" cy="213271"/>
+          </a:xfrm>
+          <a:prstGeom prst="rect">
+            <a:avLst/>
+          </a:prstGeom>
+          <a:noFill/>
+          <a:ln/>
+        </p:spPr>
+        <p:txBody>
+          <a:bodyPr wrap="square" lIns="0" tIns="0" rIns="0" bIns="0" rtlCol="0" anchor="t"/>
+          <a:lstStyle/>
+          <a:p>
+            <a:pPr algn="l" indent="0" marL="0">
+              <a:lnSpc>
+                <a:spcPts val="1680"/>
+              </a:lnSpc>
+              <a:spcBef>
+                <a:spcPts val="300"/>
+              </a:spcBef>
+              <a:spcAft>
+                <a:spcPts val="300"/>
+              </a:spcAft>
+              <a:buNone/>
+            </a:pPr>
+            <a:r>
+              <a:rPr lang="en-US" sz="1200" dirty="0">
+                <a:solidFill>
+                  <a:srgbClr val="1C2833"/>
+                </a:solidFill>
+                <a:latin typeface="Arial" pitchFamily="34" charset="0"/>
+                <a:ea typeface="Arial" pitchFamily="34" charset="-122"/>
+                <a:cs typeface="Arial" pitchFamily="34" charset="-120"/>
+              </a:rPr>
+              <a:t>Middle ·  · IKS Curriculum</a:t>
+            </a:r>
+            <a:endParaRPr lang="en-US" sz="1200" dirty="0"/>
+          </a:p>
+        </p:txBody>
+      </p:sp>
+    </p:spTree>
+  </p:cSld>
+  <p:clrMapOvr>
+    <a:masterClrMapping/>
+  </p:clrMapOvr>
+</p:sld>
+</file>
+
+<file path=ppt/slides/slide16.xml><?xml version="1.0" encoding="utf-8"?>
+<p:sld xmlns:a="http://schemas.openxmlformats.org/drawingml/2006/main" xmlns:r="http://schemas.openxmlformats.org/officeDocument/2006/relationships" xmlns:p="http://schemas.openxmlformats.org/presentationml/2006/main">
+  <p:cSld name="Slide 16">
+    <p:bg>
+      <p:bgPr>
+        <a:solidFill>
+          <a:srgbClr val="FFFFFF"/>
+        </a:solidFill>
+      </p:bgPr>
+    </p:bg>
+    <p:spTree>
+      <p:nvGrpSpPr>
+        <p:cNvPr id="1" name=""/>
+        <p:cNvGrpSpPr/>
+        <p:nvPr/>
+      </p:nvGrpSpPr>
+      <p:grpSpPr>
+        <a:xfrm>
+          <a:off x="0" y="0"/>
+          <a:ext cx="0" cy="0"/>
+          <a:chOff x="0" y="0"/>
+          <a:chExt cx="0" cy="0"/>
+        </a:xfrm>
+      </p:grpSpPr>
+      <p:sp>
+        <p:nvSpPr>
+          <p:cNvPr id="2" name="Text 0"/>
+          <p:cNvSpPr/>
+          <p:nvPr/>
+        </p:nvSpPr>
+        <p:spPr>
+          <a:xfrm>
+            <a:off x="0" y="0"/>
+            <a:ext cx="9144000" cy="101501"/>
+          </a:xfrm>
+          <a:prstGeom prst="rect">
+            <a:avLst/>
+          </a:prstGeom>
+          <a:solidFill>
+            <a:srgbClr val="277884"/>
+          </a:solidFill>
+          <a:ln/>
+        </p:spPr>
+        <p:txBody>
+          <a:bodyPr wrap="square" rtlCol="0" anchor="ctr"/>
+          <a:lstStyle/>
+          <a:p>
+            <a:pPr indent="0" marL="0">
+              <a:buNone/>
+            </a:pPr>
+            <a:endParaRPr lang="en-US" dirty="0"/>
+          </a:p>
+        </p:txBody>
+      </p:sp>
+      <p:sp>
+        <p:nvSpPr>
+          <p:cNvPr id="3" name="Text 1"/>
+          <p:cNvSpPr/>
+          <p:nvPr/>
+        </p:nvSpPr>
+        <p:spPr>
+          <a:xfrm>
+            <a:off x="406301" y="457051"/>
+            <a:ext cx="8498026" cy="274290"/>
+          </a:xfrm>
+          <a:prstGeom prst="rect">
+            <a:avLst/>
+          </a:prstGeom>
+          <a:noFill/>
+          <a:ln/>
+        </p:spPr>
+        <p:txBody>
+          <a:bodyPr wrap="square" lIns="0" tIns="0" rIns="0" bIns="0" rtlCol="0" anchor="t"/>
+          <a:lstStyle/>
+          <a:p>
+            <a:pPr algn="l" indent="0" marL="0">
+              <a:lnSpc>
+                <a:spcPts val="2160"/>
+              </a:lnSpc>
+              <a:spcBef>
+                <a:spcPts val="600"/>
+              </a:spcBef>
+              <a:spcAft>
+                <a:spcPts val="800"/>
+              </a:spcAft>
+              <a:buNone/>
+            </a:pPr>
+            <a:r>
+              <a:rPr lang="en-US" sz="1800" b="1" dirty="0">
+                <a:solidFill>
+                  <a:srgbClr val="FE4447"/>
+                </a:solidFill>
+                <a:latin typeface="Georgia" pitchFamily="34" charset="0"/>
+                <a:ea typeface="Georgia" pitchFamily="34" charset="-122"/>
+                <a:cs typeface="Georgia" pitchFamily="34" charset="-120"/>
+              </a:rPr>
+              <a:t>Differentiation</a:t>
+            </a:r>
+            <a:endParaRPr lang="en-US" sz="1800" dirty="0"/>
+          </a:p>
+        </p:txBody>
+      </p:sp>
+      <p:sp>
+        <p:nvSpPr>
+          <p:cNvPr id="4" name="Text 2"/>
+          <p:cNvSpPr/>
+          <p:nvPr/>
+        </p:nvSpPr>
+        <p:spPr>
+          <a:xfrm>
+            <a:off x="634901" y="883593"/>
+            <a:ext cx="8102798" cy="937022"/>
+          </a:xfrm>
+          <a:prstGeom prst="rect">
+            <a:avLst/>
+          </a:prstGeom>
+          <a:noFill/>
+          <a:ln/>
+        </p:spPr>
+        <p:txBody>
+          <a:bodyPr wrap="square" lIns="0" tIns="0" rIns="0" bIns="0" rtlCol="0" anchor="t"/>
+          <a:lstStyle/>
+          <a:p>
+            <a:pPr algn="l" marL="342900" indent="-342900">
+              <a:lnSpc>
+                <a:spcPts val="1620"/>
+              </a:lnSpc>
+              <a:spcAft>
+                <a:spcPts val="300"/>
+              </a:spcAft>
+              <a:buSzPct val="100000"/>
+              <a:buChar char="•"/>
+            </a:pPr>
+            <a:r>
+              <a:rPr lang="en-US" sz="1200" b="1" dirty="0">
+                <a:solidFill>
+                  <a:srgbClr val="1C2833"/>
+                </a:solidFill>
+                <a:latin typeface="Arial" pitchFamily="34" charset="0"/>
+                <a:ea typeface="Arial" pitchFamily="34" charset="-122"/>
+                <a:cs typeface="Arial" pitchFamily="34" charset="-120"/>
+              </a:rPr>
+              <a:t>One tier up:</a:t>
+            </a:r>
+            <a:pPr algn="l" indent="0" marL="0">
+              <a:lnSpc>
+                <a:spcPts val="1620"/>
+              </a:lnSpc>
+              <a:spcAft>
+                <a:spcPts val="300"/>
+              </a:spcAft>
+              <a:buNone/>
+            </a:pPr>
+            <a:r>
+              <a:rPr lang="en-US" sz="1200" dirty="0">
+                <a:solidFill>
+                  <a:srgbClr val="1C2833"/>
+                </a:solidFill>
+                <a:latin typeface="Arial" pitchFamily="34" charset="0"/>
+                <a:ea typeface="Arial" pitchFamily="34" charset="-122"/>
+                <a:cs typeface="Arial" pitchFamily="34" charset="-120"/>
+              </a:rPr>
+              <a:t> Read about </a:t>
+            </a:r>
+            <a:pPr algn="l" indent="0" marL="0">
+              <a:lnSpc>
+                <a:spcPts val="1620"/>
+              </a:lnSpc>
+              <a:spcAft>
+                <a:spcPts val="300"/>
+              </a:spcAft>
+              <a:buNone/>
+            </a:pPr>
+            <a:r>
+              <a:rPr lang="en-US" sz="1200" i="1" dirty="0">
+                <a:solidFill>
+                  <a:srgbClr val="1C2833"/>
+                </a:solidFill>
+                <a:latin typeface="Arial" pitchFamily="34" charset="0"/>
+                <a:ea typeface="Arial" pitchFamily="34" charset="-122"/>
+                <a:cs typeface="Arial" pitchFamily="34" charset="-120"/>
+              </a:rPr>
+              <a:t>plasma</a:t>
+            </a:r>
+            <a:pPr algn="l" indent="0" marL="0">
+              <a:lnSpc>
+                <a:spcPts val="1620"/>
+              </a:lnSpc>
+              <a:spcAft>
+                <a:spcPts val="300"/>
+              </a:spcAft>
+              <a:buNone/>
+            </a:pPr>
+            <a:r>
+              <a:rPr lang="en-US" sz="1200" dirty="0">
+                <a:solidFill>
+                  <a:srgbClr val="1C2833"/>
+                </a:solidFill>
+                <a:latin typeface="Arial" pitchFamily="34" charset="0"/>
+                <a:ea typeface="Arial" pitchFamily="34" charset="-122"/>
+                <a:cs typeface="Arial" pitchFamily="34" charset="-120"/>
+              </a:rPr>
+              <a:t> as a fourth state of matter. Where would </a:t>
+            </a:r>
+            <a:pPr algn="l" indent="0" marL="0">
+              <a:lnSpc>
+                <a:spcPts val="1620"/>
+              </a:lnSpc>
+              <a:spcAft>
+                <a:spcPts val="300"/>
+              </a:spcAft>
+              <a:buNone/>
+            </a:pPr>
+            <a:r>
+              <a:rPr lang="en-US" sz="1200" i="1" dirty="0">
+                <a:solidFill>
+                  <a:srgbClr val="1C2833"/>
+                </a:solidFill>
+                <a:latin typeface="Arial" pitchFamily="34" charset="0"/>
+                <a:ea typeface="Arial" pitchFamily="34" charset="-122"/>
+                <a:cs typeface="Arial" pitchFamily="34" charset="-120"/>
+              </a:rPr>
+              <a:t>plasma</a:t>
+            </a:r>
+            <a:pPr algn="l" indent="0" marL="0">
+              <a:lnSpc>
+                <a:spcPts val="1620"/>
+              </a:lnSpc>
+              <a:spcAft>
+                <a:spcPts val="300"/>
+              </a:spcAft>
+              <a:buNone/>
+            </a:pPr>
+            <a:r>
+              <a:rPr lang="en-US" sz="1200" dirty="0">
+                <a:solidFill>
+                  <a:srgbClr val="1C2833"/>
+                </a:solidFill>
+                <a:latin typeface="Arial" pitchFamily="34" charset="0"/>
+                <a:ea typeface="Arial" pitchFamily="34" charset="-122"/>
+                <a:cs typeface="Arial" pitchFamily="34" charset="-120"/>
+              </a:rPr>
+              <a:t> fit in </a:t>
+            </a:r>
+            <a:pPr algn="l" indent="0" marL="0">
+              <a:lnSpc>
+                <a:spcPts val="1620"/>
+              </a:lnSpc>
+              <a:spcAft>
+                <a:spcPts val="300"/>
+              </a:spcAft>
+              <a:buNone/>
+            </a:pPr>
+            <a:r>
+              <a:rPr lang="en-US" sz="1200" i="1" dirty="0">
+                <a:solidFill>
+                  <a:srgbClr val="1C2833"/>
+                </a:solidFill>
+                <a:latin typeface="Arial" pitchFamily="34" charset="0"/>
+                <a:ea typeface="Arial" pitchFamily="34" charset="-122"/>
+                <a:cs typeface="Arial" pitchFamily="34" charset="-120"/>
+              </a:rPr>
+              <a:t>pañcabhūta</a:t>
+            </a:r>
+            <a:pPr algn="l" indent="0" marL="0">
+              <a:lnSpc>
+                <a:spcPts val="1620"/>
+              </a:lnSpc>
+              <a:spcAft>
+                <a:spcPts val="300"/>
+              </a:spcAft>
+              <a:buNone/>
+            </a:pPr>
+            <a:r>
+              <a:rPr lang="en-US" sz="1200" dirty="0">
+                <a:solidFill>
+                  <a:srgbClr val="1C2833"/>
+                </a:solidFill>
+                <a:latin typeface="Arial" pitchFamily="34" charset="0"/>
+                <a:ea typeface="Arial" pitchFamily="34" charset="-122"/>
+                <a:cs typeface="Arial" pitchFamily="34" charset="-120"/>
+              </a:rPr>
+              <a:t>? Defend your placement.</a:t>
+            </a:r>
+            <a:endParaRPr lang="en-US" sz="1200" dirty="0"/>
+          </a:p>
+          <a:p>
+            <a:pPr algn="l" marL="342900" indent="-342900">
+              <a:lnSpc>
+                <a:spcPts val="1620"/>
+              </a:lnSpc>
+              <a:spcAft>
+                <a:spcPts val="300"/>
+              </a:spcAft>
+              <a:buSzPct val="100000"/>
+              <a:buChar char="•"/>
+            </a:pPr>
+            <a:r>
+              <a:rPr lang="en-US" sz="1200" b="1" dirty="0">
+                <a:solidFill>
+                  <a:srgbClr val="1C2833"/>
+                </a:solidFill>
+                <a:latin typeface="Arial" pitchFamily="34" charset="0"/>
+                <a:ea typeface="Arial" pitchFamily="34" charset="-122"/>
+                <a:cs typeface="Arial" pitchFamily="34" charset="-120"/>
+              </a:rPr>
+              <a:t>One tier down:</a:t>
+            </a:r>
+            <a:pPr algn="l" indent="0" marL="0">
+              <a:lnSpc>
+                <a:spcPts val="1620"/>
+              </a:lnSpc>
+              <a:spcAft>
+                <a:spcPts val="300"/>
+              </a:spcAft>
+              <a:buNone/>
+            </a:pPr>
+            <a:r>
+              <a:rPr lang="en-US" sz="1200" dirty="0">
+                <a:solidFill>
+                  <a:srgbClr val="1C2833"/>
+                </a:solidFill>
+                <a:latin typeface="Arial" pitchFamily="34" charset="0"/>
+                <a:ea typeface="Arial" pitchFamily="34" charset="-122"/>
+                <a:cs typeface="Arial" pitchFamily="34" charset="-120"/>
+              </a:rPr>
+              <a:t> Just remember the framing: </a:t>
+            </a:r>
+            <a:pPr algn="l" indent="0" marL="0">
+              <a:lnSpc>
+                <a:spcPts val="1620"/>
+              </a:lnSpc>
+              <a:spcAft>
+                <a:spcPts val="300"/>
+              </a:spcAft>
+              <a:buNone/>
+            </a:pPr>
+            <a:r>
+              <a:rPr lang="en-US" sz="1200" i="1" dirty="0">
+                <a:solidFill>
+                  <a:srgbClr val="1C2833"/>
+                </a:solidFill>
+                <a:latin typeface="Arial" pitchFamily="34" charset="0"/>
+                <a:ea typeface="Arial" pitchFamily="34" charset="-122"/>
+                <a:cs typeface="Arial" pitchFamily="34" charset="-120"/>
+              </a:rPr>
+              <a:t>both frameworks survive because both are useful.</a:t>
+            </a:r>
+            <a:pPr algn="l" indent="0" marL="0">
+              <a:lnSpc>
+                <a:spcPts val="1620"/>
+              </a:lnSpc>
+              <a:spcAft>
+                <a:spcPts val="300"/>
+              </a:spcAft>
+              <a:buNone/>
+            </a:pPr>
+            <a:r>
+              <a:rPr lang="en-US" sz="1200" dirty="0">
+                <a:solidFill>
+                  <a:srgbClr val="1C2833"/>
+                </a:solidFill>
+                <a:latin typeface="Arial" pitchFamily="34" charset="0"/>
+                <a:ea typeface="Arial" pitchFamily="34" charset="-122"/>
+                <a:cs typeface="Arial" pitchFamily="34" charset="-120"/>
+              </a:rPr>
+              <a:t> The comparisons can be filled in over the next few days.</a:t>
+            </a:r>
+            <a:endParaRPr lang="en-US" sz="1200" dirty="0"/>
+          </a:p>
+        </p:txBody>
+      </p:sp>
+      <p:sp>
+        <p:nvSpPr>
+          <p:cNvPr id="5" name="Text 3"/>
+          <p:cNvSpPr/>
+          <p:nvPr/>
+        </p:nvSpPr>
+        <p:spPr>
+          <a:xfrm>
+            <a:off x="406301" y="4434929"/>
+            <a:ext cx="8498026" cy="213271"/>
+          </a:xfrm>
+          <a:prstGeom prst="rect">
+            <a:avLst/>
+          </a:prstGeom>
+          <a:noFill/>
+          <a:ln/>
+        </p:spPr>
+        <p:txBody>
+          <a:bodyPr wrap="square" lIns="0" tIns="0" rIns="0" bIns="0" rtlCol="0" anchor="t"/>
+          <a:lstStyle/>
+          <a:p>
+            <a:pPr algn="l" indent="0" marL="0">
+              <a:lnSpc>
+                <a:spcPts val="1680"/>
+              </a:lnSpc>
+              <a:spcBef>
+                <a:spcPts val="300"/>
+              </a:spcBef>
+              <a:spcAft>
+                <a:spcPts val="300"/>
+              </a:spcAft>
+              <a:buNone/>
+            </a:pPr>
+            <a:r>
+              <a:rPr lang="en-US" sz="1200" dirty="0">
+                <a:solidFill>
+                  <a:srgbClr val="1C2833"/>
+                </a:solidFill>
+                <a:latin typeface="Arial" pitchFamily="34" charset="0"/>
+                <a:ea typeface="Arial" pitchFamily="34" charset="-122"/>
+                <a:cs typeface="Arial" pitchFamily="34" charset="-120"/>
+              </a:rPr>
+              <a:t>Middle ·  · IKS Curriculum</a:t>
+            </a:r>
+            <a:endParaRPr lang="en-US" sz="1200" dirty="0"/>
+          </a:p>
+        </p:txBody>
+      </p:sp>
+    </p:spTree>
+  </p:cSld>
+  <p:clrMapOvr>
+    <a:masterClrMapping/>
+  </p:clrMapOvr>
+</p:sld>
+</file>
+
+<file path=ppt/slides/slide17.xml><?xml version="1.0" encoding="utf-8"?>
+<p:sld xmlns:a="http://schemas.openxmlformats.org/drawingml/2006/main" xmlns:r="http://schemas.openxmlformats.org/officeDocument/2006/relationships" xmlns:p="http://schemas.openxmlformats.org/presentationml/2006/main">
+  <p:cSld name="Slide 17">
+    <p:bg>
+      <p:bgPr>
+        <a:solidFill>
+          <a:srgbClr val="FFFFFF"/>
+        </a:solidFill>
+      </p:bgPr>
+    </p:bg>
+    <p:spTree>
+      <p:nvGrpSpPr>
+        <p:cNvPr id="1" name=""/>
+        <p:cNvGrpSpPr/>
+        <p:nvPr/>
+      </p:nvGrpSpPr>
+      <p:grpSpPr>
+        <a:xfrm>
+          <a:off x="0" y="0"/>
+          <a:ext cx="0" cy="0"/>
+          <a:chOff x="0" y="0"/>
+          <a:chExt cx="0" cy="0"/>
+        </a:xfrm>
+      </p:grpSpPr>
+      <p:sp>
+        <p:nvSpPr>
+          <p:cNvPr id="2" name="Text 0"/>
+          <p:cNvSpPr/>
+          <p:nvPr/>
+        </p:nvSpPr>
+        <p:spPr>
+          <a:xfrm>
+            <a:off x="0" y="0"/>
+            <a:ext cx="9144000" cy="101501"/>
+          </a:xfrm>
+          <a:prstGeom prst="rect">
+            <a:avLst/>
+          </a:prstGeom>
+          <a:solidFill>
+            <a:srgbClr val="277884"/>
+          </a:solidFill>
+          <a:ln/>
+        </p:spPr>
+        <p:txBody>
+          <a:bodyPr wrap="square" rtlCol="0" anchor="ctr"/>
+          <a:lstStyle/>
+          <a:p>
+            <a:pPr indent="0" marL="0">
+              <a:buNone/>
+            </a:pPr>
+            <a:endParaRPr lang="en-US" dirty="0"/>
+          </a:p>
+        </p:txBody>
+      </p:sp>
+      <p:sp>
+        <p:nvSpPr>
+          <p:cNvPr id="3" name="Text 1"/>
+          <p:cNvSpPr/>
+          <p:nvPr/>
+        </p:nvSpPr>
+        <p:spPr>
+          <a:xfrm>
+            <a:off x="406301" y="457051"/>
+            <a:ext cx="8498026" cy="274290"/>
+          </a:xfrm>
+          <a:prstGeom prst="rect">
+            <a:avLst/>
+          </a:prstGeom>
+          <a:noFill/>
+          <a:ln/>
+        </p:spPr>
+        <p:txBody>
+          <a:bodyPr wrap="square" lIns="0" tIns="0" rIns="0" bIns="0" rtlCol="0" anchor="t"/>
+          <a:lstStyle/>
+          <a:p>
+            <a:pPr algn="l" indent="0" marL="0">
+              <a:lnSpc>
+                <a:spcPts val="2160"/>
+              </a:lnSpc>
+              <a:spcBef>
+                <a:spcPts val="600"/>
+              </a:spcBef>
+              <a:spcAft>
+                <a:spcPts val="800"/>
+              </a:spcAft>
+              <a:buNone/>
+            </a:pPr>
+            <a:r>
+              <a:rPr lang="en-US" sz="1800" b="1" dirty="0">
+                <a:solidFill>
+                  <a:srgbClr val="FE4447"/>
+                </a:solidFill>
+                <a:latin typeface="Georgia" pitchFamily="34" charset="0"/>
+                <a:ea typeface="Georgia" pitchFamily="34" charset="-122"/>
+                <a:cs typeface="Georgia" pitchFamily="34" charset="-120"/>
+              </a:rPr>
+              <a:t>Teacher notes</a:t>
+            </a:r>
+            <a:endParaRPr lang="en-US" sz="1800" dirty="0"/>
+          </a:p>
+        </p:txBody>
+      </p:sp>
+      <p:sp>
+        <p:nvSpPr>
+          <p:cNvPr id="4" name="Text 2"/>
+          <p:cNvSpPr/>
+          <p:nvPr/>
+        </p:nvSpPr>
+        <p:spPr>
+          <a:xfrm>
+            <a:off x="634901" y="883593"/>
+            <a:ext cx="8102798" cy="1592163"/>
+          </a:xfrm>
+          <a:prstGeom prst="rect">
+            <a:avLst/>
+          </a:prstGeom>
+          <a:noFill/>
+          <a:ln/>
+        </p:spPr>
+        <p:txBody>
+          <a:bodyPr wrap="square" lIns="0" tIns="0" rIns="0" bIns="0" rtlCol="0" anchor="t"/>
+          <a:lstStyle/>
+          <a:p>
+            <a:pPr algn="l" marL="342900" indent="-342900">
+              <a:lnSpc>
+                <a:spcPts val="1620"/>
+              </a:lnSpc>
+              <a:spcAft>
+                <a:spcPts val="300"/>
+              </a:spcAft>
+              <a:buSzPct val="100000"/>
+              <a:buChar char="•"/>
+            </a:pPr>
+            <a:r>
+              <a:rPr lang="en-US" sz="1200" dirty="0">
+                <a:solidFill>
+                  <a:srgbClr val="1C2833"/>
+                </a:solidFill>
+                <a:latin typeface="Arial" pitchFamily="34" charset="0"/>
+                <a:ea typeface="Arial" pitchFamily="34" charset="-122"/>
+                <a:cs typeface="Arial" pitchFamily="34" charset="-120"/>
+              </a:rPr>
+              <a:t>This is the day skeptical students will engage most. Welcome it. Do not retreat into "ancient Indians were right too" — that defeats the lesson. The honest stance is </a:t>
+            </a:r>
+            <a:pPr algn="l" indent="0" marL="0">
+              <a:lnSpc>
+                <a:spcPts val="1620"/>
+              </a:lnSpc>
+              <a:spcAft>
+                <a:spcPts val="300"/>
+              </a:spcAft>
+              <a:buNone/>
+            </a:pPr>
+            <a:r>
+              <a:rPr lang="en-US" sz="1200" i="1" dirty="0">
+                <a:solidFill>
+                  <a:srgbClr val="1C2833"/>
+                </a:solidFill>
+                <a:latin typeface="Arial" pitchFamily="34" charset="0"/>
+                <a:ea typeface="Arial" pitchFamily="34" charset="-122"/>
+                <a:cs typeface="Arial" pitchFamily="34" charset="-120"/>
+              </a:rPr>
+              <a:t>both frameworks are real intellectual achievements with different scopes</a:t>
+            </a:r>
+            <a:pPr algn="l" indent="0" marL="0">
+              <a:lnSpc>
+                <a:spcPts val="1620"/>
+              </a:lnSpc>
+              <a:spcAft>
+                <a:spcPts val="300"/>
+              </a:spcAft>
+              <a:buNone/>
+            </a:pPr>
+            <a:r>
+              <a:rPr lang="en-US" sz="1200" dirty="0">
+                <a:solidFill>
+                  <a:srgbClr val="1C2833"/>
+                </a:solidFill>
+                <a:latin typeface="Arial" pitchFamily="34" charset="0"/>
+                <a:ea typeface="Arial" pitchFamily="34" charset="-122"/>
+                <a:cs typeface="Arial" pitchFamily="34" charset="-120"/>
+              </a:rPr>
+              <a:t>.</a:t>
+            </a:r>
+            <a:endParaRPr lang="en-US" sz="1200" dirty="0"/>
+          </a:p>
+          <a:p>
+            <a:pPr algn="l" marL="342900" indent="-342900">
+              <a:lnSpc>
+                <a:spcPts val="1620"/>
+              </a:lnSpc>
+              <a:spcAft>
+                <a:spcPts val="300"/>
+              </a:spcAft>
+              <a:buSzPct val="100000"/>
+              <a:buChar char="•"/>
+            </a:pPr>
+            <a:r>
+              <a:rPr lang="en-US" sz="1200" dirty="0">
+                <a:solidFill>
+                  <a:srgbClr val="1C2833"/>
+                </a:solidFill>
+                <a:latin typeface="Arial" pitchFamily="34" charset="0"/>
+                <a:ea typeface="Arial" pitchFamily="34" charset="-122"/>
+                <a:cs typeface="Arial" pitchFamily="34" charset="-120"/>
+              </a:rPr>
+              <a:t>If a student says "the pañcabhūta framework is incomplete because it can't predict chemistry" — they're correct. Acknowledge that. Then ask: "Can the periodic table predict whether the air in this room feels stuffy or fresh? Both frameworks have limits."</a:t>
+            </a:r>
+            <a:endParaRPr lang="en-US" sz="1200" dirty="0"/>
+          </a:p>
+          <a:p>
+            <a:pPr algn="l" marL="342900" indent="-342900">
+              <a:lnSpc>
+                <a:spcPts val="1620"/>
+              </a:lnSpc>
+              <a:spcAft>
+                <a:spcPts val="300"/>
+              </a:spcAft>
+              <a:buSzPct val="100000"/>
+              <a:buChar char="•"/>
+            </a:pPr>
+            <a:r>
+              <a:rPr lang="en-US" sz="1200" dirty="0">
+                <a:solidFill>
+                  <a:srgbClr val="1C2833"/>
+                </a:solidFill>
+                <a:latin typeface="Arial" pitchFamily="34" charset="0"/>
+                <a:ea typeface="Arial" pitchFamily="34" charset="-122"/>
+                <a:cs typeface="Arial" pitchFamily="34" charset="-120"/>
+              </a:rPr>
+              <a:t>For NEP §4.6 compliance, the framing is integration, not replacement. The line to hold: students are learning </a:t>
+            </a:r>
+            <a:pPr algn="l" indent="0" marL="0">
+              <a:lnSpc>
+                <a:spcPts val="1620"/>
+              </a:lnSpc>
+              <a:spcAft>
+                <a:spcPts val="300"/>
+              </a:spcAft>
+              <a:buNone/>
+            </a:pPr>
+            <a:r>
+              <a:rPr lang="en-US" sz="1200" i="1" dirty="0">
+                <a:solidFill>
+                  <a:srgbClr val="1C2833"/>
+                </a:solidFill>
+                <a:latin typeface="Arial" pitchFamily="34" charset="0"/>
+                <a:ea typeface="Arial" pitchFamily="34" charset="-122"/>
+                <a:cs typeface="Arial" pitchFamily="34" charset="-120"/>
+              </a:rPr>
+              <a:t>two</a:t>
+            </a:r>
+            <a:pPr algn="l" indent="0" marL="0">
+              <a:lnSpc>
+                <a:spcPts val="1620"/>
+              </a:lnSpc>
+              <a:spcAft>
+                <a:spcPts val="300"/>
+              </a:spcAft>
+              <a:buNone/>
+            </a:pPr>
+            <a:r>
+              <a:rPr lang="en-US" sz="1200" dirty="0">
+                <a:solidFill>
+                  <a:srgbClr val="1C2833"/>
+                </a:solidFill>
+                <a:latin typeface="Arial" pitchFamily="34" charset="0"/>
+                <a:ea typeface="Arial" pitchFamily="34" charset="-122"/>
+                <a:cs typeface="Arial" pitchFamily="34" charset="-120"/>
+              </a:rPr>
+              <a:t> useful frameworks, not one true one.</a:t>
+            </a:r>
+            <a:endParaRPr lang="en-US" sz="1200" dirty="0"/>
+          </a:p>
+        </p:txBody>
+      </p:sp>
+      <p:sp>
+        <p:nvSpPr>
+          <p:cNvPr id="5" name="Text 3"/>
+          <p:cNvSpPr/>
+          <p:nvPr/>
+        </p:nvSpPr>
+        <p:spPr>
+          <a:xfrm>
+            <a:off x="406301" y="4434929"/>
+            <a:ext cx="8498026" cy="213271"/>
+          </a:xfrm>
+          <a:prstGeom prst="rect">
+            <a:avLst/>
+          </a:prstGeom>
+          <a:noFill/>
+          <a:ln/>
+        </p:spPr>
+        <p:txBody>
+          <a:bodyPr wrap="square" lIns="0" tIns="0" rIns="0" bIns="0" rtlCol="0" anchor="t"/>
+          <a:lstStyle/>
+          <a:p>
+            <a:pPr algn="l" indent="0" marL="0">
+              <a:lnSpc>
+                <a:spcPts val="1680"/>
+              </a:lnSpc>
+              <a:spcBef>
+                <a:spcPts val="300"/>
+              </a:spcBef>
+              <a:spcAft>
+                <a:spcPts val="300"/>
+              </a:spcAft>
+              <a:buNone/>
+            </a:pPr>
+            <a:r>
+              <a:rPr lang="en-US" sz="1200" dirty="0">
+                <a:solidFill>
+                  <a:srgbClr val="1C2833"/>
+                </a:solidFill>
+                <a:latin typeface="Arial" pitchFamily="34" charset="0"/>
+                <a:ea typeface="Arial" pitchFamily="34" charset="-122"/>
+                <a:cs typeface="Arial" pitchFamily="34" charset="-120"/>
+              </a:rPr>
+              <a:t>Middle ·  · IKS Curriculum</a:t>
+            </a:r>
+            <a:endParaRPr lang="en-US" sz="1200" dirty="0"/>
+          </a:p>
+        </p:txBody>
+      </p:sp>
+    </p:spTree>
+  </p:cSld>
+  <p:clrMapOvr>
+    <a:masterClrMapping/>
+  </p:clrMapOvr>
+</p:sld>
+</file>
+
+<file path=ppt/slides/slide18.xml><?xml version="1.0" encoding="utf-8"?>
+<p:sld xmlns:a="http://schemas.openxmlformats.org/drawingml/2006/main" xmlns:r="http://schemas.openxmlformats.org/officeDocument/2006/relationships" xmlns:p="http://schemas.openxmlformats.org/presentationml/2006/main">
+  <p:cSld name="Slide 18">
+    <p:bg>
+      <p:bgPr>
+        <a:solidFill>
+          <a:srgbClr val="FFFFFF"/>
+        </a:solidFill>
+      </p:bgPr>
+    </p:bg>
+    <p:spTree>
+      <p:nvGrpSpPr>
+        <p:cNvPr id="1" name=""/>
+        <p:cNvGrpSpPr/>
+        <p:nvPr/>
+      </p:nvGrpSpPr>
+      <p:grpSpPr>
+        <a:xfrm>
+          <a:off x="0" y="0"/>
+          <a:ext cx="0" cy="0"/>
+          <a:chOff x="0" y="0"/>
+          <a:chExt cx="0" cy="0"/>
+        </a:xfrm>
+      </p:grpSpPr>
+      <p:sp>
+        <p:nvSpPr>
+          <p:cNvPr id="2" name="Text 0"/>
+          <p:cNvSpPr/>
+          <p:nvPr/>
+        </p:nvSpPr>
+        <p:spPr>
+          <a:xfrm>
+            <a:off x="0" y="0"/>
+            <a:ext cx="9144000" cy="101501"/>
+          </a:xfrm>
+          <a:prstGeom prst="rect">
+            <a:avLst/>
+          </a:prstGeom>
+          <a:solidFill>
+            <a:srgbClr val="277884"/>
+          </a:solidFill>
+          <a:ln/>
+        </p:spPr>
+        <p:txBody>
+          <a:bodyPr wrap="square" rtlCol="0" anchor="ctr"/>
+          <a:lstStyle/>
+          <a:p>
+            <a:pPr indent="0" marL="0">
+              <a:buNone/>
+            </a:pPr>
+            <a:endParaRPr lang="en-US" dirty="0"/>
+          </a:p>
+        </p:txBody>
+      </p:sp>
+      <p:sp>
+        <p:nvSpPr>
+          <p:cNvPr id="3" name="Text 1"/>
+          <p:cNvSpPr/>
+          <p:nvPr/>
+        </p:nvSpPr>
+        <p:spPr>
+          <a:xfrm>
+            <a:off x="406301" y="457051"/>
+            <a:ext cx="8498026" cy="274290"/>
+          </a:xfrm>
+          <a:prstGeom prst="rect">
+            <a:avLst/>
+          </a:prstGeom>
+          <a:noFill/>
+          <a:ln/>
+        </p:spPr>
+        <p:txBody>
+          <a:bodyPr wrap="square" lIns="0" tIns="0" rIns="0" bIns="0" rtlCol="0" anchor="t"/>
+          <a:lstStyle/>
+          <a:p>
+            <a:pPr algn="l" indent="0" marL="0">
+              <a:lnSpc>
+                <a:spcPts val="2160"/>
+              </a:lnSpc>
+              <a:spcBef>
+                <a:spcPts val="600"/>
+              </a:spcBef>
+              <a:spcAft>
+                <a:spcPts val="800"/>
+              </a:spcAft>
+              <a:buNone/>
+            </a:pPr>
+            <a:r>
+              <a:rPr lang="en-US" sz="1800" b="1" dirty="0">
+                <a:solidFill>
+                  <a:srgbClr val="FE4447"/>
+                </a:solidFill>
+                <a:latin typeface="Georgia" pitchFamily="34" charset="0"/>
+                <a:ea typeface="Georgia" pitchFamily="34" charset="-122"/>
+                <a:cs typeface="Georgia" pitchFamily="34" charset="-120"/>
+              </a:rPr>
+              <a:t>Citation(s) used in this lesson</a:t>
+            </a:r>
+            <a:endParaRPr lang="en-US" sz="1800" dirty="0"/>
+          </a:p>
+        </p:txBody>
+      </p:sp>
+      <p:sp>
+        <p:nvSpPr>
+          <p:cNvPr id="4" name="Text 2"/>
+          <p:cNvSpPr/>
+          <p:nvPr/>
+        </p:nvSpPr>
+        <p:spPr>
+          <a:xfrm>
+            <a:off x="634901" y="883593"/>
+            <a:ext cx="8102798" cy="750391"/>
+          </a:xfrm>
+          <a:prstGeom prst="rect">
+            <a:avLst/>
+          </a:prstGeom>
+          <a:noFill/>
+          <a:ln/>
+        </p:spPr>
+        <p:txBody>
+          <a:bodyPr wrap="square" lIns="0" tIns="0" rIns="0" bIns="0" rtlCol="0" anchor="t"/>
+          <a:lstStyle/>
+          <a:p>
+            <a:pPr algn="l" marL="342900" indent="-342900">
+              <a:lnSpc>
+                <a:spcPts val="1620"/>
+              </a:lnSpc>
+              <a:spcAft>
+                <a:spcPts val="300"/>
+              </a:spcAft>
+              <a:buSzPct val="100000"/>
+              <a:buChar char="•"/>
+            </a:pPr>
+            <a:r>
+              <a:rPr lang="en-US" sz="1200" dirty="0">
+                <a:solidFill>
+                  <a:srgbClr val="1C2833"/>
+                </a:solidFill>
+                <a:latin typeface="Arial" pitchFamily="34" charset="0"/>
+                <a:ea typeface="Arial" pitchFamily="34" charset="-122"/>
+                <a:cs typeface="Arial" pitchFamily="34" charset="-120"/>
+              </a:rPr>
+              <a:t>No new RAG citations introduced.</a:t>
+            </a:r>
+            <a:endParaRPr lang="en-US" sz="1200" dirty="0"/>
+          </a:p>
+          <a:p>
+            <a:pPr algn="l" marL="342900" indent="-342900">
+              <a:lnSpc>
+                <a:spcPts val="1620"/>
+              </a:lnSpc>
+              <a:spcAft>
+                <a:spcPts val="300"/>
+              </a:spcAft>
+              <a:buSzPct val="100000"/>
+              <a:buChar char="•"/>
+            </a:pPr>
+            <a:r>
+              <a:rPr lang="en-US" sz="1200" dirty="0">
+                <a:solidFill>
+                  <a:srgbClr val="1C2833"/>
+                </a:solidFill>
+                <a:latin typeface="Arial" pitchFamily="34" charset="0"/>
+                <a:ea typeface="Arial" pitchFamily="34" charset="-122"/>
+                <a:cs typeface="Arial" pitchFamily="34" charset="-120"/>
+              </a:rPr>
+              <a:t>Modern science references: NCERT Class 9 Science, Chapters 1 ("Matter in Our Surroundings") and 5 — see </a:t>
+            </a:r>
+            <a:pPr algn="l" indent="0" marL="0">
+              <a:lnSpc>
+                <a:spcPts val="1620"/>
+              </a:lnSpc>
+              <a:spcAft>
+                <a:spcPts val="300"/>
+              </a:spcAft>
+              <a:buNone/>
+            </a:pPr>
+            <a:r>
+              <a:rPr lang="en-US" sz="1200" dirty="0">
+                <a:solidFill>
+                  <a:srgbClr val="1C2833"/>
+                </a:solidFill>
+                <a:latin typeface="Arial" pitchFamily="34" charset="0"/>
+                <a:ea typeface="Arial" pitchFamily="34" charset="-122"/>
+                <a:cs typeface="Arial" pitchFamily="34" charset="-120"/>
+              </a:rPr>
               <a:t>sources.md</a:t>
             </a:r>
             <a:pPr algn="l" indent="0" marL="0">
               <a:lnSpc>
-                <a:spcPts val="1680"/>
-              </a:lnSpc>
-              <a:spcBef>
-                <a:spcPts val="300"/>
-              </a:spcBef>
+                <a:spcPts val="1620"/>
+              </a:lnSpc>
               <a:spcAft>
                 <a:spcPts val="300"/>
               </a:spcAft>
@@ -3364,7 +6214,7 @@
                 <a:ea typeface="Georgia" pitchFamily="34" charset="-122"/>
                 <a:cs typeface="Georgia" pitchFamily="34" charset="-120"/>
               </a:rPr>
-              <a:t>Materials</a:t>
+              <a:t>Learning objective</a:t>
             </a:r>
             <a:endParaRPr lang="en-US" sz="1800" dirty="0"/>
           </a:p>
@@ -3412,7 +6262,7 @@
                 <a:ea typeface="Arial" pitchFamily="34" charset="-122"/>
                 <a:cs typeface="Arial" pitchFamily="34" charset="-120"/>
               </a:rPr>
-              <a:t>– A copy of the standard periodic table on the wall (any classroom poster works). – A printed </a:t>
+              <a:t>By the end of this lesson, students will compare the </a:t>
             </a:r>
             <a:pPr algn="l" indent="0" marL="0">
               <a:lnSpc>
@@ -3458,7 +6308,7 @@
                 <a:ea typeface="Arial" pitchFamily="34" charset="-122"/>
                 <a:cs typeface="Arial" pitchFamily="34" charset="-120"/>
               </a:rPr>
-              <a:t> table (the one built on Day 3). – A two-column comparison worksheet (blank, students fill in).</a:t>
+              <a:t> framework with the modern states-of-matter / periodic-table framework, identifying what each captures that the other does not.</a:t>
             </a:r>
             <a:endParaRPr lang="en-US" sz="1200" dirty="0"/>
           </a:p>
@@ -3616,7 +6466,7 @@
                 <a:ea typeface="Georgia" pitchFamily="34" charset="-122"/>
                 <a:cs typeface="Georgia" pitchFamily="34" charset="-120"/>
               </a:rPr>
-              <a:t>Vocabulary recap</a:t>
+              <a:t>Materials</a:t>
             </a:r>
             <a:endParaRPr lang="en-US" sz="1800" dirty="0"/>
           </a:p>
@@ -3630,8 +6480,8 @@
         </p:nvSpPr>
         <p:spPr>
           <a:xfrm>
-            <a:off x="406301" y="870942"/>
-            <a:ext cx="8498026" cy="213271"/>
+            <a:off x="634901" y="883593"/>
+            <a:ext cx="8102798" cy="769441"/>
           </a:xfrm>
           <a:prstGeom prst="rect">
             <a:avLst/>
@@ -3643,17 +6493,15 @@
           <a:bodyPr wrap="square" lIns="0" tIns="0" rIns="0" bIns="0" rtlCol="0" anchor="t"/>
           <a:lstStyle/>
           <a:p>
-            <a:pPr algn="l" indent="0" marL="0">
-              <a:lnSpc>
-                <a:spcPts val="1680"/>
-              </a:lnSpc>
-              <a:spcBef>
-                <a:spcPts val="300"/>
-              </a:spcBef>
-              <a:spcAft>
-                <a:spcPts val="300"/>
-              </a:spcAft>
-              <a:buNone/>
+            <a:pPr algn="l" marL="342900" indent="-342900">
+              <a:lnSpc>
+                <a:spcPts val="1620"/>
+              </a:lnSpc>
+              <a:spcAft>
+                <a:spcPts val="300"/>
+              </a:spcAft>
+              <a:buSzPct val="100000"/>
+              <a:buChar char="•"/>
             </a:pPr>
             <a:r>
               <a:rPr lang="en-US" sz="1200" dirty="0">
@@ -3664,7 +6512,95 @@
                 <a:ea typeface="Arial" pitchFamily="34" charset="-122"/>
                 <a:cs typeface="Arial" pitchFamily="34" charset="-120"/>
               </a:rPr>
-              <a:t>No new Sanskrit. Today is the day to use English freely and compare frameworks.</a:t>
+              <a:t>A copy of the standard periodic table on the wall (any classroom poster works).</a:t>
+            </a:r>
+            <a:endParaRPr lang="en-US" sz="1200" dirty="0"/>
+          </a:p>
+          <a:p>
+            <a:pPr algn="l" marL="342900" indent="-342900">
+              <a:lnSpc>
+                <a:spcPts val="1620"/>
+              </a:lnSpc>
+              <a:spcAft>
+                <a:spcPts val="300"/>
+              </a:spcAft>
+              <a:buSzPct val="100000"/>
+              <a:buChar char="•"/>
+            </a:pPr>
+            <a:r>
+              <a:rPr lang="en-US" sz="1200" dirty="0">
+                <a:solidFill>
+                  <a:srgbClr val="1C2833"/>
+                </a:solidFill>
+                <a:latin typeface="Arial" pitchFamily="34" charset="0"/>
+                <a:ea typeface="Arial" pitchFamily="34" charset="-122"/>
+                <a:cs typeface="Arial" pitchFamily="34" charset="-120"/>
+              </a:rPr>
+              <a:t>A printed </a:t>
+            </a:r>
+            <a:pPr algn="l" indent="0" marL="0">
+              <a:lnSpc>
+                <a:spcPts val="1620"/>
+              </a:lnSpc>
+              <a:spcAft>
+                <a:spcPts val="300"/>
+              </a:spcAft>
+              <a:buNone/>
+            </a:pPr>
+            <a:r>
+              <a:rPr lang="en-US" sz="1200" i="1" dirty="0">
+                <a:solidFill>
+                  <a:srgbClr val="1C2833"/>
+                </a:solidFill>
+                <a:latin typeface="Arial" pitchFamily="34" charset="0"/>
+                <a:ea typeface="Arial" pitchFamily="34" charset="-122"/>
+                <a:cs typeface="Arial" pitchFamily="34" charset="-120"/>
+              </a:rPr>
+              <a:t>pañcabhūta</a:t>
+            </a:r>
+            <a:pPr algn="l" indent="0" marL="0">
+              <a:lnSpc>
+                <a:spcPts val="1620"/>
+              </a:lnSpc>
+              <a:spcAft>
+                <a:spcPts val="300"/>
+              </a:spcAft>
+              <a:buNone/>
+            </a:pPr>
+            <a:r>
+              <a:rPr lang="en-US" sz="1200" dirty="0">
+                <a:solidFill>
+                  <a:srgbClr val="1C2833"/>
+                </a:solidFill>
+                <a:latin typeface="Arial" pitchFamily="34" charset="0"/>
+                <a:ea typeface="Arial" pitchFamily="34" charset="-122"/>
+                <a:cs typeface="Arial" pitchFamily="34" charset="-120"/>
+              </a:rPr>
+              <a:t> table (the one built on Day 3).</a:t>
+            </a:r>
+            <a:endParaRPr lang="en-US" sz="1200" dirty="0"/>
+          </a:p>
+          <a:p>
+            <a:pPr algn="l" marL="342900" indent="-342900">
+              <a:lnSpc>
+                <a:spcPts val="1620"/>
+              </a:lnSpc>
+              <a:spcAft>
+                <a:spcPts val="300"/>
+              </a:spcAft>
+              <a:buSzPct val="100000"/>
+              <a:buChar char="•"/>
+            </a:pPr>
+            <a:r>
+              <a:rPr lang="en-US" sz="1200" dirty="0">
+                <a:solidFill>
+                  <a:srgbClr val="1C2833"/>
+                </a:solidFill>
+                <a:latin typeface="Arial" pitchFamily="34" charset="0"/>
+                <a:ea typeface="Arial" pitchFamily="34" charset="-122"/>
+                <a:cs typeface="Arial" pitchFamily="34" charset="-120"/>
+              </a:rPr>
+              <a:t>A two-column comparison worksheet (blank, students fill in).</a:t>
             </a:r>
             <a:endParaRPr lang="en-US" sz="1200" dirty="0"/>
           </a:p>
@@ -3822,7 +6758,7 @@
                 <a:ea typeface="Georgia" pitchFamily="34" charset="-122"/>
                 <a:cs typeface="Georgia" pitchFamily="34" charset="-120"/>
               </a:rPr>
-              <a:t>Lesson flow</a:t>
+              <a:t>Vocabulary recap</a:t>
             </a:r>
             <a:endParaRPr lang="en-US" sz="1800" dirty="0"/>
           </a:p>
@@ -3831,6 +6767,54 @@
       <p:sp>
         <p:nvSpPr>
           <p:cNvPr id="4" name="Text 2"/>
+          <p:cNvSpPr/>
+          <p:nvPr/>
+        </p:nvSpPr>
+        <p:spPr>
+          <a:xfrm>
+            <a:off x="406301" y="870942"/>
+            <a:ext cx="8498026" cy="213271"/>
+          </a:xfrm>
+          <a:prstGeom prst="rect">
+            <a:avLst/>
+          </a:prstGeom>
+          <a:noFill/>
+          <a:ln/>
+        </p:spPr>
+        <p:txBody>
+          <a:bodyPr wrap="square" lIns="0" tIns="0" rIns="0" bIns="0" rtlCol="0" anchor="t"/>
+          <a:lstStyle/>
+          <a:p>
+            <a:pPr algn="l" indent="0" marL="0">
+              <a:lnSpc>
+                <a:spcPts val="1680"/>
+              </a:lnSpc>
+              <a:spcBef>
+                <a:spcPts val="300"/>
+              </a:spcBef>
+              <a:spcAft>
+                <a:spcPts val="300"/>
+              </a:spcAft>
+              <a:buNone/>
+            </a:pPr>
+            <a:r>
+              <a:rPr lang="en-US" sz="1200" dirty="0">
+                <a:solidFill>
+                  <a:srgbClr val="1C2833"/>
+                </a:solidFill>
+                <a:latin typeface="Arial" pitchFamily="34" charset="0"/>
+                <a:ea typeface="Arial" pitchFamily="34" charset="-122"/>
+                <a:cs typeface="Arial" pitchFamily="34" charset="-120"/>
+              </a:rPr>
+              <a:t>No new Sanskrit. Today is the day to use English freely and compare frameworks.</a:t>
+            </a:r>
+            <a:endParaRPr lang="en-US" sz="1200" dirty="0"/>
+          </a:p>
+        </p:txBody>
+      </p:sp>
+      <p:sp>
+        <p:nvSpPr>
+          <p:cNvPr id="5" name="Text 3"/>
           <p:cNvSpPr/>
           <p:nvPr/>
         </p:nvSpPr>
@@ -3980,7 +6964,7 @@
                 <a:ea typeface="Georgia" pitchFamily="34" charset="-122"/>
                 <a:cs typeface="Georgia" pitchFamily="34" charset="-120"/>
               </a:rPr>
-              <a:t>Warm-up (5 min)</a:t>
+              <a:t>Lesson flow</a:t>
             </a:r>
             <a:endParaRPr lang="en-US" sz="1800" dirty="0"/>
           </a:p>
@@ -3989,123 +6973,6 @@
       <p:sp>
         <p:nvSpPr>
           <p:cNvPr id="4" name="Text 2"/>
-          <p:cNvSpPr/>
-          <p:nvPr/>
-        </p:nvSpPr>
-        <p:spPr>
-          <a:xfrm>
-            <a:off x="406301" y="870942"/>
-            <a:ext cx="8498026" cy="426541"/>
-          </a:xfrm>
-          <a:prstGeom prst="rect">
-            <a:avLst/>
-          </a:prstGeom>
-          <a:noFill/>
-          <a:ln/>
-        </p:spPr>
-        <p:txBody>
-          <a:bodyPr wrap="square" lIns="0" tIns="0" rIns="0" bIns="0" rtlCol="0" anchor="t"/>
-          <a:lstStyle/>
-          <a:p>
-            <a:pPr algn="l" indent="0" marL="0">
-              <a:lnSpc>
-                <a:spcPts val="1680"/>
-              </a:lnSpc>
-              <a:spcBef>
-                <a:spcPts val="300"/>
-              </a:spcBef>
-              <a:spcAft>
-                <a:spcPts val="300"/>
-              </a:spcAft>
-              <a:buNone/>
-            </a:pPr>
-            <a:r>
-              <a:rPr lang="en-US" sz="1200" dirty="0">
-                <a:solidFill>
-                  <a:srgbClr val="1C2833"/>
-                </a:solidFill>
-                <a:latin typeface="Arial" pitchFamily="34" charset="0"/>
-                <a:ea typeface="Arial" pitchFamily="34" charset="-122"/>
-                <a:cs typeface="Arial" pitchFamily="34" charset="-120"/>
-              </a:rPr>
-              <a:t>– Daily prompt — 2 students. – Provocation: </a:t>
-            </a:r>
-            <a:pPr algn="l" indent="0" marL="0">
-              <a:lnSpc>
-                <a:spcPts val="1680"/>
-              </a:lnSpc>
-              <a:spcBef>
-                <a:spcPts val="300"/>
-              </a:spcBef>
-              <a:spcAft>
-                <a:spcPts val="300"/>
-              </a:spcAft>
-              <a:buNone/>
-            </a:pPr>
-            <a:r>
-              <a:rPr lang="en-US" sz="1200" i="1" dirty="0">
-                <a:solidFill>
-                  <a:srgbClr val="1C2833"/>
-                </a:solidFill>
-                <a:latin typeface="Arial" pitchFamily="34" charset="0"/>
-                <a:ea typeface="Arial" pitchFamily="34" charset="-122"/>
-                <a:cs typeface="Arial" pitchFamily="34" charset="-120"/>
-              </a:rPr>
-              <a:t>"If I told you 'fire is not an element,' would I be right or wrong?"</a:t>
-            </a:r>
-            <a:pPr algn="l" indent="0" marL="0">
-              <a:lnSpc>
-                <a:spcPts val="1680"/>
-              </a:lnSpc>
-              <a:spcBef>
-                <a:spcPts val="300"/>
-              </a:spcBef>
-              <a:spcAft>
-                <a:spcPts val="300"/>
-              </a:spcAft>
-              <a:buNone/>
-            </a:pPr>
-            <a:r>
-              <a:rPr lang="en-US" sz="1200" dirty="0">
-                <a:solidFill>
-                  <a:srgbClr val="1C2833"/>
-                </a:solidFill>
-                <a:latin typeface="Arial" pitchFamily="34" charset="0"/>
-                <a:ea typeface="Arial" pitchFamily="34" charset="-122"/>
-                <a:cs typeface="Arial" pitchFamily="34" charset="-120"/>
-              </a:rPr>
-              <a:t> – Take both sides. Don't resolve. </a:t>
-            </a:r>
-            <a:pPr algn="l" indent="0" marL="0">
-              <a:lnSpc>
-                <a:spcPts val="1680"/>
-              </a:lnSpc>
-              <a:spcBef>
-                <a:spcPts val="300"/>
-              </a:spcBef>
-              <a:spcAft>
-                <a:spcPts val="300"/>
-              </a:spcAft>
-              <a:buNone/>
-            </a:pPr>
-            <a:r>
-              <a:rPr lang="en-US" sz="1200" i="1" dirty="0">
-                <a:solidFill>
-                  <a:srgbClr val="1C2833"/>
-                </a:solidFill>
-                <a:latin typeface="Arial" pitchFamily="34" charset="0"/>
-                <a:ea typeface="Arial" pitchFamily="34" charset="-122"/>
-                <a:cs typeface="Arial" pitchFamily="34" charset="-120"/>
-              </a:rPr>
-              <a:t>"Today we'll see how both answers can be correct, because they're answering different questions."</a:t>
-            </a:r>
-            <a:endParaRPr lang="en-US" sz="1200" dirty="0"/>
-          </a:p>
-        </p:txBody>
-      </p:sp>
-      <p:sp>
-        <p:nvSpPr>
-          <p:cNvPr id="5" name="Text 3"/>
           <p:cNvSpPr/>
           <p:nvPr/>
         </p:nvSpPr>
@@ -4255,7 +7122,7 @@
                 <a:ea typeface="Georgia" pitchFamily="34" charset="-122"/>
                 <a:cs typeface="Georgia" pitchFamily="34" charset="-120"/>
               </a:rPr>
-              <a:t>Activity (10 min) — Compare-Contrast Worksheet</a:t>
+              <a:t>Warm-up (5 min)</a:t>
             </a:r>
             <a:endParaRPr lang="en-US" sz="1800" dirty="0"/>
           </a:p>
@@ -4269,8 +7136,8 @@
         </p:nvSpPr>
         <p:spPr>
           <a:xfrm>
-            <a:off x="406301" y="870942"/>
-            <a:ext cx="8498026" cy="639812"/>
+            <a:off x="634901" y="883593"/>
+            <a:ext cx="8102798" cy="975122"/>
           </a:xfrm>
           <a:prstGeom prst="rect">
             <a:avLst/>
@@ -4282,17 +7149,15 @@
           <a:bodyPr wrap="square" lIns="0" tIns="0" rIns="0" bIns="0" rtlCol="0" anchor="t"/>
           <a:lstStyle/>
           <a:p>
-            <a:pPr algn="l" indent="0" marL="0">
-              <a:lnSpc>
-                <a:spcPts val="1680"/>
-              </a:lnSpc>
-              <a:spcBef>
-                <a:spcPts val="300"/>
-              </a:spcBef>
-              <a:spcAft>
-                <a:spcPts val="300"/>
-              </a:spcAft>
-              <a:buNone/>
+            <a:pPr algn="l" marL="342900" indent="-342900">
+              <a:lnSpc>
+                <a:spcPts val="1620"/>
+              </a:lnSpc>
+              <a:spcAft>
+                <a:spcPts val="300"/>
+              </a:spcAft>
+              <a:buSzPct val="100000"/>
+              <a:buChar char="•"/>
             </a:pPr>
             <a:r>
               <a:rPr lang="en-US" sz="1200" dirty="0">
@@ -4303,42 +7168,20 @@
                 <a:ea typeface="Arial" pitchFamily="34" charset="-122"/>
                 <a:cs typeface="Arial" pitchFamily="34" charset="-120"/>
               </a:rPr>
-              <a:t>Students pick </a:t>
-            </a:r>
-            <a:pPr algn="l" indent="0" marL="0">
-              <a:lnSpc>
-                <a:spcPts val="1680"/>
-              </a:lnSpc>
-              <a:spcBef>
-                <a:spcPts val="300"/>
-              </a:spcBef>
-              <a:spcAft>
-                <a:spcPts val="300"/>
-              </a:spcAft>
-              <a:buNone/>
-            </a:pPr>
-            <a:r>
-              <a:rPr lang="en-US" sz="1200" b="1" dirty="0">
-                <a:solidFill>
-                  <a:srgbClr val="1C2833"/>
-                </a:solidFill>
-                <a:latin typeface="Arial" pitchFamily="34" charset="0"/>
-                <a:ea typeface="Arial" pitchFamily="34" charset="-122"/>
-                <a:cs typeface="Arial" pitchFamily="34" charset="-120"/>
-              </a:rPr>
-              <a:t>any 3 objects</a:t>
-            </a:r>
-            <a:pPr algn="l" indent="0" marL="0">
-              <a:lnSpc>
-                <a:spcPts val="1680"/>
-              </a:lnSpc>
-              <a:spcBef>
-                <a:spcPts val="300"/>
-              </a:spcBef>
-              <a:spcAft>
-                <a:spcPts val="300"/>
-              </a:spcAft>
-              <a:buNone/>
+              <a:t>Daily prompt — 2 students.</a:t>
+            </a:r>
+            <a:endParaRPr lang="en-US" sz="1200" dirty="0"/>
+          </a:p>
+          <a:p>
+            <a:pPr algn="l" marL="342900" indent="-342900">
+              <a:lnSpc>
+                <a:spcPts val="1620"/>
+              </a:lnSpc>
+              <a:spcAft>
+                <a:spcPts val="300"/>
+              </a:spcAft>
+              <a:buSzPct val="100000"/>
+              <a:buChar char="•"/>
             </a:pPr>
             <a:r>
               <a:rPr lang="en-US" sz="1200" dirty="0">
@@ -4349,42 +7192,40 @@
                 <a:ea typeface="Arial" pitchFamily="34" charset="-122"/>
                 <a:cs typeface="Arial" pitchFamily="34" charset="-120"/>
               </a:rPr>
-              <a:t> from the Day 4 sort. For each, they fill in a 2-column row: - </a:t>
-            </a:r>
-            <a:pPr algn="l" indent="0" marL="0">
-              <a:lnSpc>
-                <a:spcPts val="1680"/>
-              </a:lnSpc>
-              <a:spcBef>
-                <a:spcPts val="300"/>
-              </a:spcBef>
-              <a:spcAft>
-                <a:spcPts val="300"/>
-              </a:spcAft>
-              <a:buNone/>
-            </a:pPr>
-            <a:r>
-              <a:rPr lang="en-US" sz="1200" b="1" dirty="0">
-                <a:solidFill>
-                  <a:srgbClr val="1C2833"/>
-                </a:solidFill>
-                <a:latin typeface="Arial" pitchFamily="34" charset="0"/>
-                <a:ea typeface="Arial" pitchFamily="34" charset="-122"/>
-                <a:cs typeface="Arial" pitchFamily="34" charset="-120"/>
-              </a:rPr>
-              <a:t>Pañcabhūta description</a:t>
-            </a:r>
-            <a:pPr algn="l" indent="0" marL="0">
-              <a:lnSpc>
-                <a:spcPts val="1680"/>
-              </a:lnSpc>
-              <a:spcBef>
-                <a:spcPts val="300"/>
-              </a:spcBef>
-              <a:spcAft>
-                <a:spcPts val="300"/>
-              </a:spcAft>
-              <a:buNone/>
+              <a:t>Provocation: </a:t>
+            </a:r>
+            <a:pPr algn="l" indent="0" marL="0">
+              <a:lnSpc>
+                <a:spcPts val="1620"/>
+              </a:lnSpc>
+              <a:spcAft>
+                <a:spcPts val="300"/>
+              </a:spcAft>
+              <a:buNone/>
+            </a:pPr>
+            <a:r>
+              <a:rPr lang="en-US" sz="1200" i="1" dirty="0">
+                <a:solidFill>
+                  <a:srgbClr val="1C2833"/>
+                </a:solidFill>
+                <a:latin typeface="Arial" pitchFamily="34" charset="0"/>
+                <a:ea typeface="Arial" pitchFamily="34" charset="-122"/>
+                <a:cs typeface="Arial" pitchFamily="34" charset="-120"/>
+              </a:rPr>
+              <a:t>"If I told you 'fire is not an element,' would I be right or wrong?"</a:t>
+            </a:r>
+            <a:endParaRPr lang="en-US" sz="1200" dirty="0"/>
+          </a:p>
+          <a:p>
+            <a:pPr algn="l" marL="342900" indent="-342900">
+              <a:lnSpc>
+                <a:spcPts val="1620"/>
+              </a:lnSpc>
+              <a:spcAft>
+                <a:spcPts val="300"/>
+              </a:spcAft>
+              <a:buSzPct val="100000"/>
+              <a:buChar char="•"/>
             </a:pPr>
             <a:r>
               <a:rPr lang="en-US" sz="1200" dirty="0">
@@ -4395,53 +7236,27 @@
                 <a:ea typeface="Arial" pitchFamily="34" charset="-122"/>
                 <a:cs typeface="Arial" pitchFamily="34" charset="-120"/>
               </a:rPr>
-              <a:t> (which element dominates, which tanmātra, which others present) - </a:t>
-            </a:r>
-            <a:pPr algn="l" indent="0" marL="0">
-              <a:lnSpc>
-                <a:spcPts val="1680"/>
-              </a:lnSpc>
-              <a:spcBef>
-                <a:spcPts val="300"/>
-              </a:spcBef>
-              <a:spcAft>
-                <a:spcPts val="300"/>
-              </a:spcAft>
-              <a:buNone/>
-            </a:pPr>
-            <a:r>
-              <a:rPr lang="en-US" sz="1200" b="1" dirty="0">
-                <a:solidFill>
-                  <a:srgbClr val="1C2833"/>
-                </a:solidFill>
-                <a:latin typeface="Arial" pitchFamily="34" charset="0"/>
-                <a:ea typeface="Arial" pitchFamily="34" charset="-122"/>
-                <a:cs typeface="Arial" pitchFamily="34" charset="-120"/>
-              </a:rPr>
-              <a:t>Modern science description</a:t>
-            </a:r>
-            <a:pPr algn="l" indent="0" marL="0">
-              <a:lnSpc>
-                <a:spcPts val="1680"/>
-              </a:lnSpc>
-              <a:spcBef>
-                <a:spcPts val="300"/>
-              </a:spcBef>
-              <a:spcAft>
-                <a:spcPts val="300"/>
-              </a:spcAft>
-              <a:buNone/>
-            </a:pPr>
-            <a:r>
-              <a:rPr lang="en-US" sz="1200" dirty="0">
-                <a:solidFill>
-                  <a:srgbClr val="1C2833"/>
-                </a:solidFill>
-                <a:latin typeface="Arial" pitchFamily="34" charset="0"/>
-                <a:ea typeface="Arial" pitchFamily="34" charset="-122"/>
-                <a:cs typeface="Arial" pitchFamily="34" charset="-120"/>
-              </a:rPr>
-              <a:t> (state of matter, dominant chemical components if known)</a:t>
+              <a:t>Take both sides. Don't resolve. </a:t>
+            </a:r>
+            <a:pPr algn="l" indent="0" marL="0">
+              <a:lnSpc>
+                <a:spcPts val="1620"/>
+              </a:lnSpc>
+              <a:spcAft>
+                <a:spcPts val="300"/>
+              </a:spcAft>
+              <a:buNone/>
+            </a:pPr>
+            <a:r>
+              <a:rPr lang="en-US" sz="1200" i="1" dirty="0">
+                <a:solidFill>
+                  <a:srgbClr val="1C2833"/>
+                </a:solidFill>
+                <a:latin typeface="Arial" pitchFamily="34" charset="0"/>
+                <a:ea typeface="Arial" pitchFamily="34" charset="-122"/>
+                <a:cs typeface="Arial" pitchFamily="34" charset="-120"/>
+              </a:rPr>
+              <a:t>"Today we'll see how both answers can be correct, because they're answering different questions."</a:t>
             </a:r>
             <a:endParaRPr lang="en-US" sz="1200" dirty="0"/>
           </a:p>
@@ -4450,77 +7265,6 @@
       <p:sp>
         <p:nvSpPr>
           <p:cNvPr id="5" name="Text 3"/>
-          <p:cNvSpPr/>
-          <p:nvPr/>
-        </p:nvSpPr>
-        <p:spPr>
-          <a:xfrm>
-            <a:off x="406301" y="1586954"/>
-            <a:ext cx="8498026" cy="213271"/>
-          </a:xfrm>
-          <a:prstGeom prst="rect">
-            <a:avLst/>
-          </a:prstGeom>
-          <a:noFill/>
-          <a:ln/>
-        </p:spPr>
-        <p:txBody>
-          <a:bodyPr wrap="square" lIns="0" tIns="0" rIns="0" bIns="0" rtlCol="0" anchor="t"/>
-          <a:lstStyle/>
-          <a:p>
-            <a:pPr algn="l" indent="0" marL="0">
-              <a:lnSpc>
-                <a:spcPts val="1680"/>
-              </a:lnSpc>
-              <a:spcBef>
-                <a:spcPts val="300"/>
-              </a:spcBef>
-              <a:spcAft>
-                <a:spcPts val="300"/>
-              </a:spcAft>
-              <a:buNone/>
-            </a:pPr>
-            <a:r>
-              <a:rPr lang="en-US" sz="1200" dirty="0">
-                <a:solidFill>
-                  <a:srgbClr val="1C2833"/>
-                </a:solidFill>
-                <a:latin typeface="Arial" pitchFamily="34" charset="0"/>
-                <a:ea typeface="Arial" pitchFamily="34" charset="-122"/>
-                <a:cs typeface="Arial" pitchFamily="34" charset="-120"/>
-              </a:rPr>
-              <a:t>They then write one sentence: </a:t>
-            </a:r>
-            <a:pPr algn="l" indent="0" marL="0">
-              <a:lnSpc>
-                <a:spcPts val="1680"/>
-              </a:lnSpc>
-              <a:spcBef>
-                <a:spcPts val="300"/>
-              </a:spcBef>
-              <a:spcAft>
-                <a:spcPts val="300"/>
-              </a:spcAft>
-              <a:buNone/>
-            </a:pPr>
-            <a:r>
-              <a:rPr lang="en-US" sz="1200" i="1" dirty="0">
-                <a:solidFill>
-                  <a:srgbClr val="1C2833"/>
-                </a:solidFill>
-                <a:latin typeface="Arial" pitchFamily="34" charset="0"/>
-                <a:ea typeface="Arial" pitchFamily="34" charset="-122"/>
-                <a:cs typeface="Arial" pitchFamily="34" charset="-120"/>
-              </a:rPr>
-              <a:t>"For this object, the framework I'd choose to describe it depends on ..."</a:t>
-            </a:r>
-            <a:endParaRPr lang="en-US" sz="1200" dirty="0"/>
-          </a:p>
-        </p:txBody>
-      </p:sp>
-      <p:sp>
-        <p:nvSpPr>
-          <p:cNvPr id="6" name="Text 4"/>
           <p:cNvSpPr/>
           <p:nvPr/>
         </p:nvSpPr>
@@ -4670,7 +7414,7 @@
                 <a:ea typeface="Georgia" pitchFamily="34" charset="-122"/>
                 <a:cs typeface="Georgia" pitchFamily="34" charset="-120"/>
               </a:rPr>
-              <a:t>Wrap-up (5 min)</a:t>
+              <a:t>Core (25 min)</a:t>
             </a:r>
             <a:endParaRPr lang="en-US" sz="1800" dirty="0"/>
           </a:p>
@@ -4684,8 +7428,8 @@
         </p:nvSpPr>
         <p:spPr>
           <a:xfrm>
-            <a:off x="406301" y="870942"/>
-            <a:ext cx="8498026" cy="639812"/>
+            <a:off x="634901" y="883593"/>
+            <a:ext cx="8102798" cy="281880"/>
           </a:xfrm>
           <a:prstGeom prst="rect">
             <a:avLst/>
@@ -4697,6 +7441,72 @@
           <a:bodyPr wrap="square" lIns="0" tIns="0" rIns="0" bIns="0" rtlCol="0" anchor="t"/>
           <a:lstStyle/>
           <a:p>
+            <a:pPr algn="l" marL="342900" indent="-342900">
+              <a:lnSpc>
+                <a:spcPts val="1620"/>
+              </a:lnSpc>
+              <a:spcAft>
+                <a:spcPts val="300"/>
+              </a:spcAft>
+              <a:buSzPct val="100000"/>
+              <a:buChar char="•"/>
+            </a:pPr>
+            <a:r>
+              <a:rPr lang="en-US" sz="1200" b="1" dirty="0">
+                <a:solidFill>
+                  <a:srgbClr val="1C2833"/>
+                </a:solidFill>
+                <a:latin typeface="Arial" pitchFamily="34" charset="0"/>
+                <a:ea typeface="Arial" pitchFamily="34" charset="-122"/>
+                <a:cs typeface="Arial" pitchFamily="34" charset="-120"/>
+              </a:rPr>
+              <a:t>Two frameworks, two questions</a:t>
+            </a:r>
+            <a:pPr algn="l" indent="0" marL="0">
+              <a:lnSpc>
+                <a:spcPts val="1620"/>
+              </a:lnSpc>
+              <a:spcAft>
+                <a:spcPts val="300"/>
+              </a:spcAft>
+              <a:buNone/>
+            </a:pPr>
+            <a:r>
+              <a:rPr lang="en-US" sz="1200" dirty="0">
+                <a:solidFill>
+                  <a:srgbClr val="1C2833"/>
+                </a:solidFill>
+                <a:latin typeface="Arial" pitchFamily="34" charset="0"/>
+                <a:ea typeface="Arial" pitchFamily="34" charset="-122"/>
+                <a:cs typeface="Arial" pitchFamily="34" charset="-120"/>
+              </a:rPr>
+              <a:t> — put on the board:</a:t>
+            </a:r>
+            <a:endParaRPr lang="en-US" sz="1200" dirty="0"/>
+          </a:p>
+        </p:txBody>
+      </p:sp>
+      <p:sp>
+        <p:nvSpPr>
+          <p:cNvPr id="5" name="Text 3"/>
+          <p:cNvSpPr/>
+          <p:nvPr/>
+        </p:nvSpPr>
+        <p:spPr>
+          <a:xfrm>
+            <a:off x="406301" y="1254323"/>
+            <a:ext cx="8498026" cy="213271"/>
+          </a:xfrm>
+          <a:prstGeom prst="rect">
+            <a:avLst/>
+          </a:prstGeom>
+          <a:noFill/>
+          <a:ln/>
+        </p:spPr>
+        <p:txBody>
+          <a:bodyPr wrap="square" lIns="0" tIns="0" rIns="0" bIns="0" rtlCol="0" anchor="t"/>
+          <a:lstStyle/>
+          <a:p>
             <a:pPr algn="l" indent="0" marL="0">
               <a:lnSpc>
                 <a:spcPts val="1680"/>
@@ -4710,6 +7520,72 @@
               <a:buNone/>
             </a:pPr>
             <a:r>
+              <a:rPr lang="en-US" sz="1200" i="1" dirty="0">
+                <a:solidFill>
+                  <a:srgbClr val="1C2833"/>
+                </a:solidFill>
+                <a:latin typeface="Arial" pitchFamily="34" charset="0"/>
+                <a:ea typeface="Arial" pitchFamily="34" charset="-122"/>
+                <a:cs typeface="Arial" pitchFamily="34" charset="-120"/>
+              </a:rPr>
+              <a:t>Each row: Framework · What it sorts · The question it answers.</a:t>
+            </a:r>
+            <a:endParaRPr lang="en-US" sz="1200" dirty="0"/>
+          </a:p>
+        </p:txBody>
+      </p:sp>
+      <p:sp>
+        <p:nvSpPr>
+          <p:cNvPr id="6" name="Text 4"/>
+          <p:cNvSpPr/>
+          <p:nvPr/>
+        </p:nvSpPr>
+        <p:spPr>
+          <a:xfrm>
+            <a:off x="634901" y="1556445"/>
+            <a:ext cx="8102798" cy="525661"/>
+          </a:xfrm>
+          <a:prstGeom prst="rect">
+            <a:avLst/>
+          </a:prstGeom>
+          <a:noFill/>
+          <a:ln/>
+        </p:spPr>
+        <p:txBody>
+          <a:bodyPr wrap="square" lIns="0" tIns="0" rIns="0" bIns="0" rtlCol="0" anchor="t"/>
+          <a:lstStyle/>
+          <a:p>
+            <a:pPr algn="l" marL="342900" indent="-342900">
+              <a:lnSpc>
+                <a:spcPts val="1620"/>
+              </a:lnSpc>
+              <a:spcAft>
+                <a:spcPts val="300"/>
+              </a:spcAft>
+              <a:buSzPct val="100000"/>
+              <a:buChar char="•"/>
+            </a:pPr>
+            <a:r>
+              <a:rPr lang="en-US" sz="1200" i="1" dirty="0">
+                <a:solidFill>
+                  <a:srgbClr val="1C2833"/>
+                </a:solidFill>
+                <a:latin typeface="Arial" pitchFamily="34" charset="0"/>
+                <a:ea typeface="Arial" pitchFamily="34" charset="-122"/>
+                <a:cs typeface="Arial" pitchFamily="34" charset="-120"/>
+              </a:rPr>
+              <a:t>Pañcabhūta</a:t>
+            </a:r>
+            <a:pPr algn="l" indent="0" marL="0">
+              <a:lnSpc>
+                <a:spcPts val="1620"/>
+              </a:lnSpc>
+              <a:spcAft>
+                <a:spcPts val="300"/>
+              </a:spcAft>
+              <a:buNone/>
+            </a:pPr>
+            <a:r>
               <a:rPr lang="en-US" sz="1200" dirty="0">
                 <a:solidFill>
                   <a:srgbClr val="1C2833"/>
@@ -4718,38 +7594,36 @@
                 <a:ea typeface="Arial" pitchFamily="34" charset="-122"/>
                 <a:cs typeface="Arial" pitchFamily="34" charset="-120"/>
               </a:rPr>
-              <a:t>– Cold-call 3 students to share their "I'd choose framework X because ..." sentence. – Note out loud: there's no universal right answer. The framework depends on the question. – Preview Day 7: "Tomorrow we'll look at what happens when one of the five elements is </a:t>
-            </a:r>
-            <a:pPr algn="l" indent="0" marL="0">
-              <a:lnSpc>
-                <a:spcPts val="1680"/>
-              </a:lnSpc>
-              <a:spcBef>
-                <a:spcPts val="300"/>
-              </a:spcBef>
-              <a:spcAft>
-                <a:spcPts val="300"/>
-              </a:spcAft>
-              <a:buNone/>
-            </a:pPr>
-            <a:r>
-              <a:rPr lang="en-US" sz="1200" i="1" dirty="0">
-                <a:solidFill>
-                  <a:srgbClr val="1C2833"/>
-                </a:solidFill>
-                <a:latin typeface="Arial" pitchFamily="34" charset="0"/>
-                <a:ea typeface="Arial" pitchFamily="34" charset="-122"/>
-                <a:cs typeface="Arial" pitchFamily="34" charset="-120"/>
-              </a:rPr>
-              <a:t>out of balance</a:t>
-            </a:r>
-            <a:pPr algn="l" indent="0" marL="0">
-              <a:lnSpc>
-                <a:spcPts val="1680"/>
-              </a:lnSpc>
-              <a:spcBef>
-                <a:spcPts val="300"/>
-              </a:spcBef>
+              <a:t> (c. 1500 BCE onwards) — Everyday matter and space · "What categories of stuff do I live among?"</a:t>
+            </a:r>
+            <a:endParaRPr lang="en-US" sz="1200" dirty="0"/>
+          </a:p>
+          <a:p>
+            <a:pPr algn="l" marL="342900" indent="-342900">
+              <a:lnSpc>
+                <a:spcPts val="1620"/>
+              </a:lnSpc>
+              <a:spcAft>
+                <a:spcPts val="300"/>
+              </a:spcAft>
+              <a:buSzPct val="100000"/>
+              <a:buChar char="•"/>
+            </a:pPr>
+            <a:r>
+              <a:rPr lang="en-US" sz="1200" b="1" dirty="0">
+                <a:solidFill>
+                  <a:srgbClr val="1C2833"/>
+                </a:solidFill>
+                <a:latin typeface="Arial" pitchFamily="34" charset="0"/>
+                <a:ea typeface="Arial" pitchFamily="34" charset="-122"/>
+                <a:cs typeface="Arial" pitchFamily="34" charset="-120"/>
+              </a:rPr>
+              <a:t>Modern periodic table (1869 onwards)</a:t>
+            </a:r>
+            <a:pPr algn="l" indent="0" marL="0">
+              <a:lnSpc>
+                <a:spcPts val="1620"/>
+              </a:lnSpc>
               <a:spcAft>
                 <a:spcPts val="300"/>
               </a:spcAft>
@@ -4764,7 +7638,7 @@
                 <a:ea typeface="Arial" pitchFamily="34" charset="-122"/>
                 <a:cs typeface="Arial" pitchFamily="34" charset="-120"/>
               </a:rPr>
-              <a:t> in a real ecosystem — and what that has to do with us."</a:t>
+              <a:t> — Atoms · "What kinds of atoms exist?"</a:t>
             </a:r>
             <a:endParaRPr lang="en-US" sz="1200" dirty="0"/>
           </a:p>
@@ -4772,7 +7646,7 @@
       </p:sp>
       <p:sp>
         <p:nvSpPr>
-          <p:cNvPr id="5" name="Text 3"/>
+          <p:cNvPr id="7" name="Text 5"/>
           <p:cNvSpPr/>
           <p:nvPr/>
         </p:nvSpPr>
@@ -4922,7 +7796,7 @@
                 <a:ea typeface="Georgia" pitchFamily="34" charset="-122"/>
                 <a:cs typeface="Georgia" pitchFamily="34" charset="-120"/>
               </a:rPr>
-              <a:t>Student-facing content</a:t>
+              <a:t>Core (25 min) (cont.)</a:t>
             </a:r>
             <a:endParaRPr lang="en-US" sz="1800" dirty="0"/>
           </a:p>
@@ -4936,61 +7810,74 @@
         </p:nvSpPr>
         <p:spPr>
           <a:xfrm>
-            <a:off x="406301" y="883593"/>
-            <a:ext cx="8331398" cy="2343150"/>
+            <a:off x="634901" y="883593"/>
+            <a:ext cx="8102798" cy="281880"/>
           </a:xfrm>
           <a:prstGeom prst="rect">
             <a:avLst/>
           </a:prstGeom>
-          <a:solidFill>
-            <a:srgbClr val="F4F8F9"/>
-          </a:solidFill>
+          <a:noFill/>
           <a:ln/>
         </p:spPr>
         <p:txBody>
-          <a:bodyPr wrap="square" rtlCol="0" anchor="ctr"/>
-          <a:lstStyle/>
-          <a:p>
-            <a:pPr indent="0" marL="0">
-              <a:buNone/>
-            </a:pPr>
-            <a:endParaRPr lang="en-US" dirty="0"/>
-          </a:p>
-        </p:txBody>
-      </p:sp>
-      <p:sp>
-        <p:nvSpPr>
-          <p:cNvPr id="5" name="Shape 3"/>
+          <a:bodyPr wrap="square" lIns="0" tIns="0" rIns="0" bIns="0" rtlCol="0" anchor="t"/>
+          <a:lstStyle/>
+          <a:p>
+            <a:pPr algn="l" marL="342900" indent="-342900">
+              <a:lnSpc>
+                <a:spcPts val="1620"/>
+              </a:lnSpc>
+              <a:spcAft>
+                <a:spcPts val="300"/>
+              </a:spcAft>
+              <a:buSzPct val="100000"/>
+              <a:buChar char="•"/>
+            </a:pPr>
+            <a:r>
+              <a:rPr lang="en-US" sz="1200" b="1" dirty="0">
+                <a:solidFill>
+                  <a:srgbClr val="1C2833"/>
+                </a:solidFill>
+                <a:latin typeface="Arial" pitchFamily="34" charset="0"/>
+                <a:ea typeface="Arial" pitchFamily="34" charset="-122"/>
+                <a:cs typeface="Arial" pitchFamily="34" charset="-120"/>
+              </a:rPr>
+              <a:t>Side-by-side comparison.</a:t>
+            </a:r>
+            <a:pPr algn="l" indent="0" marL="0">
+              <a:lnSpc>
+                <a:spcPts val="1620"/>
+              </a:lnSpc>
+              <a:spcAft>
+                <a:spcPts val="300"/>
+              </a:spcAft>
+              <a:buNone/>
+            </a:pPr>
+            <a:r>
+              <a:rPr lang="en-US" sz="1200" dirty="0">
+                <a:solidFill>
+                  <a:srgbClr val="1C2833"/>
+                </a:solidFill>
+                <a:latin typeface="Arial" pitchFamily="34" charset="0"/>
+                <a:ea typeface="Arial" pitchFamily="34" charset="-122"/>
+                <a:cs typeface="Arial" pitchFamily="34" charset="-120"/>
+              </a:rPr>
+              <a:t> Build this table together on the board (students copy):</a:t>
+            </a:r>
+            <a:endParaRPr lang="en-US" sz="1200" dirty="0"/>
+          </a:p>
+        </p:txBody>
+      </p:sp>
+      <p:sp>
+        <p:nvSpPr>
+          <p:cNvPr id="5" name="Text 3"/>
           <p:cNvSpPr/>
           <p:nvPr/>
         </p:nvSpPr>
         <p:spPr>
           <a:xfrm>
-            <a:off x="434876" y="883593"/>
-            <a:ext cx="0" cy="2343150"/>
-          </a:xfrm>
-          <a:prstGeom prst="line">
-            <a:avLst/>
-          </a:prstGeom>
-          <a:noFill/>
-          <a:ln w="57150">
-            <a:solidFill>
-              <a:srgbClr val="FE4447"/>
-            </a:solidFill>
-            <a:prstDash val="solid"/>
-          </a:ln>
-        </p:spPr>
-      </p:sp>
-      <p:sp>
-        <p:nvSpPr>
-          <p:cNvPr id="6" name="Text 4"/>
-          <p:cNvSpPr/>
-          <p:nvPr/>
-        </p:nvSpPr>
-        <p:spPr>
-          <a:xfrm>
-            <a:off x="692051" y="1074093"/>
-            <a:ext cx="7973389" cy="230981"/>
+            <a:off x="406301" y="1254323"/>
+            <a:ext cx="8498026" cy="213271"/>
           </a:xfrm>
           <a:prstGeom prst="rect">
             <a:avLst/>
@@ -5004,7 +7891,7 @@
           <a:p>
             <a:pPr algn="l" indent="0" marL="0">
               <a:lnSpc>
-                <a:spcPts val="1820"/>
+                <a:spcPts val="1680"/>
               </a:lnSpc>
               <a:spcBef>
                 <a:spcPts val="300"/>
@@ -5015,44 +7902,19 @@
               <a:buNone/>
             </a:pPr>
             <a:r>
-              <a:rPr lang="en-US" sz="1300" b="1" i="1" dirty="0">
-                <a:solidFill>
-                  <a:srgbClr val="1C2833"/>
-                </a:solidFill>
-                <a:latin typeface="Georgia" pitchFamily="34" charset="0"/>
-                <a:ea typeface="Georgia" pitchFamily="34" charset="-122"/>
-                <a:cs typeface="Georgia" pitchFamily="34" charset="-120"/>
-              </a:rPr>
-              <a:t>Two frameworks for the same world</a:t>
-            </a:r>
-            <a:endParaRPr lang="en-US" sz="1300" dirty="0"/>
-          </a:p>
-        </p:txBody>
-      </p:sp>
-      <p:sp>
-        <p:nvSpPr>
-          <p:cNvPr id="7" name="Text 5"/>
-          <p:cNvSpPr/>
-          <p:nvPr/>
-        </p:nvSpPr>
-        <p:spPr>
-          <a:xfrm>
-            <a:off x="692051" y="1343174"/>
-            <a:ext cx="7973389" cy="692944"/>
-          </a:xfrm>
-          <a:prstGeom prst="rect">
-            <a:avLst/>
-          </a:prstGeom>
-          <a:noFill/>
-          <a:ln/>
-        </p:spPr>
-        <p:txBody>
-          <a:bodyPr wrap="square" lIns="0" tIns="0" rIns="0" bIns="0" rtlCol="0" anchor="t"/>
-          <a:lstStyle/>
-          <a:p>
-            <a:pPr algn="l" indent="0" marL="0">
-              <a:lnSpc>
-                <a:spcPts val="1820"/>
+              <a:rPr lang="en-US" sz="1200" i="1" dirty="0">
+                <a:solidFill>
+                  <a:srgbClr val="1C2833"/>
+                </a:solidFill>
+                <a:latin typeface="Arial" pitchFamily="34" charset="0"/>
+                <a:ea typeface="Arial" pitchFamily="34" charset="-122"/>
+                <a:cs typeface="Arial" pitchFamily="34" charset="-120"/>
+              </a:rPr>
+              <a:t>Each row: Property ·</a:t>
+            </a:r>
+            <a:pPr algn="l" indent="0" marL="0">
+              <a:lnSpc>
+                <a:spcPts val="1680"/>
               </a:lnSpc>
               <a:spcBef>
                 <a:spcPts val="300"/>
@@ -5063,19 +7925,19 @@
               <a:buNone/>
             </a:pPr>
             <a:r>
-              <a:rPr lang="en-US" sz="1300" dirty="0">
-                <a:solidFill>
-                  <a:srgbClr val="1C2833"/>
-                </a:solidFill>
-                <a:latin typeface="Georgia" pitchFamily="34" charset="0"/>
-                <a:ea typeface="Georgia" pitchFamily="34" charset="-122"/>
-                <a:cs typeface="Georgia" pitchFamily="34" charset="-120"/>
-              </a:rPr>
-              <a:t>The </a:t>
-            </a:r>
-            <a:pPr algn="l" indent="0" marL="0">
-              <a:lnSpc>
-                <a:spcPts val="1820"/>
+              <a:rPr lang="en-US" sz="1200" dirty="0">
+                <a:solidFill>
+                  <a:srgbClr val="1C2833"/>
+                </a:solidFill>
+                <a:latin typeface="Arial" pitchFamily="34" charset="0"/>
+                <a:ea typeface="Arial" pitchFamily="34" charset="-122"/>
+                <a:cs typeface="Arial" pitchFamily="34" charset="-120"/>
+              </a:rPr>
+              <a:t>Pañcabhūta</a:t>
+            </a:r>
+            <a:pPr algn="l" indent="0" marL="0">
+              <a:lnSpc>
+                <a:spcPts val="1680"/>
               </a:lnSpc>
               <a:spcBef>
                 <a:spcPts val="300"/>
@@ -5086,188 +7948,23 @@
               <a:buNone/>
             </a:pPr>
             <a:r>
-              <a:rPr lang="en-US" sz="1300" i="1" dirty="0">
-                <a:solidFill>
-                  <a:srgbClr val="1C2833"/>
-                </a:solidFill>
-                <a:latin typeface="Georgia" pitchFamily="34" charset="0"/>
-                <a:ea typeface="Georgia" pitchFamily="34" charset="-122"/>
-                <a:cs typeface="Georgia" pitchFamily="34" charset="-120"/>
-              </a:rPr>
-              <a:t>pañcabhūta</a:t>
-            </a:r>
-            <a:pPr algn="l" indent="0" marL="0">
-              <a:lnSpc>
-                <a:spcPts val="1820"/>
-              </a:lnSpc>
-              <a:spcBef>
-                <a:spcPts val="300"/>
-              </a:spcBef>
-              <a:spcAft>
-                <a:spcPts val="300"/>
-              </a:spcAft>
-              <a:buNone/>
-            </a:pPr>
-            <a:r>
-              <a:rPr lang="en-US" sz="1300" dirty="0">
-                <a:solidFill>
-                  <a:srgbClr val="1C2833"/>
-                </a:solidFill>
-                <a:latin typeface="Georgia" pitchFamily="34" charset="0"/>
-                <a:ea typeface="Georgia" pitchFamily="34" charset="-122"/>
-                <a:cs typeface="Georgia" pitchFamily="34" charset="-120"/>
-              </a:rPr>
-              <a:t> tradition organises matter and space into 5 categories using sensory observation. Modern science organises matter into 118 elements (and 4+ states of matter) using experiments and measurement. They are answering different questions.</a:t>
-            </a:r>
-            <a:endParaRPr lang="en-US" sz="1300" dirty="0"/>
-          </a:p>
-        </p:txBody>
-      </p:sp>
-      <p:sp>
-        <p:nvSpPr>
-          <p:cNvPr id="8" name="Text 6"/>
-          <p:cNvSpPr/>
-          <p:nvPr/>
-        </p:nvSpPr>
-        <p:spPr>
-          <a:xfrm>
-            <a:off x="692051" y="2074218"/>
-            <a:ext cx="7973389" cy="692944"/>
-          </a:xfrm>
-          <a:prstGeom prst="rect">
-            <a:avLst/>
-          </a:prstGeom>
-          <a:noFill/>
-          <a:ln/>
-        </p:spPr>
-        <p:txBody>
-          <a:bodyPr wrap="square" lIns="0" tIns="0" rIns="0" bIns="0" rtlCol="0" anchor="t"/>
-          <a:lstStyle/>
-          <a:p>
-            <a:pPr algn="l" indent="0" marL="0">
-              <a:lnSpc>
-                <a:spcPts val="1820"/>
-              </a:lnSpc>
-              <a:spcBef>
-                <a:spcPts val="300"/>
-              </a:spcBef>
-              <a:spcAft>
-                <a:spcPts val="300"/>
-              </a:spcAft>
-              <a:buNone/>
-            </a:pPr>
-            <a:r>
-              <a:rPr lang="en-US" sz="1300" dirty="0">
-                <a:solidFill>
-                  <a:srgbClr val="1C2833"/>
-                </a:solidFill>
-                <a:latin typeface="Georgia" pitchFamily="34" charset="0"/>
-                <a:ea typeface="Georgia" pitchFamily="34" charset="-122"/>
-                <a:cs typeface="Georgia" pitchFamily="34" charset="-120"/>
-              </a:rPr>
-              <a:t>| Question | Framework that fits | |----------|--------------------| | "What's the dominant </a:t>
-            </a:r>
-            <a:pPr algn="l" indent="0" marL="0">
-              <a:lnSpc>
-                <a:spcPts val="1820"/>
-              </a:lnSpc>
-              <a:spcBef>
-                <a:spcPts val="300"/>
-              </a:spcBef>
-              <a:spcAft>
-                <a:spcPts val="300"/>
-              </a:spcAft>
-              <a:buNone/>
-            </a:pPr>
-            <a:r>
-              <a:rPr lang="en-US" sz="1300" i="1" dirty="0">
-                <a:solidFill>
-                  <a:srgbClr val="1C2833"/>
-                </a:solidFill>
-                <a:latin typeface="Georgia" pitchFamily="34" charset="0"/>
-                <a:ea typeface="Georgia" pitchFamily="34" charset="-122"/>
-                <a:cs typeface="Georgia" pitchFamily="34" charset="-120"/>
-              </a:rPr>
-              <a:t>feel</a:t>
-            </a:r>
-            <a:pPr algn="l" indent="0" marL="0">
-              <a:lnSpc>
-                <a:spcPts val="1820"/>
-              </a:lnSpc>
-              <a:spcBef>
-                <a:spcPts val="300"/>
-              </a:spcBef>
-              <a:spcAft>
-                <a:spcPts val="300"/>
-              </a:spcAft>
-              <a:buNone/>
-            </a:pPr>
-            <a:r>
-              <a:rPr lang="en-US" sz="1300" dirty="0">
-                <a:solidFill>
-                  <a:srgbClr val="1C2833"/>
-                </a:solidFill>
-                <a:latin typeface="Georgia" pitchFamily="34" charset="0"/>
-                <a:ea typeface="Georgia" pitchFamily="34" charset="-122"/>
-                <a:cs typeface="Georgia" pitchFamily="34" charset="-120"/>
-              </a:rPr>
-              <a:t> of this object?" | Pañcabhūta | | "What atoms make up this object?" | Periodic table | | "Why does soil smell after rain?" | Both, in different ways |</a:t>
-            </a:r>
-            <a:endParaRPr lang="en-US" sz="1300" dirty="0"/>
-          </a:p>
-        </p:txBody>
-      </p:sp>
-      <p:sp>
-        <p:nvSpPr>
-          <p:cNvPr id="9" name="Text 7"/>
-          <p:cNvSpPr/>
-          <p:nvPr/>
-        </p:nvSpPr>
-        <p:spPr>
-          <a:xfrm>
-            <a:off x="692051" y="2805261"/>
-            <a:ext cx="7973389" cy="230981"/>
-          </a:xfrm>
-          <a:prstGeom prst="rect">
-            <a:avLst/>
-          </a:prstGeom>
-          <a:noFill/>
-          <a:ln/>
-        </p:spPr>
-        <p:txBody>
-          <a:bodyPr wrap="square" lIns="0" tIns="0" rIns="0" bIns="0" rtlCol="0" anchor="t"/>
-          <a:lstStyle/>
-          <a:p>
-            <a:pPr algn="l" indent="0" marL="0">
-              <a:lnSpc>
-                <a:spcPts val="1820"/>
-              </a:lnSpc>
-              <a:spcBef>
-                <a:spcPts val="300"/>
-              </a:spcBef>
-              <a:spcAft>
-                <a:spcPts val="300"/>
-              </a:spcAft>
-              <a:buNone/>
-            </a:pPr>
-            <a:r>
-              <a:rPr lang="en-US" sz="1300" i="1" dirty="0">
-                <a:solidFill>
-                  <a:srgbClr val="1C2833"/>
-                </a:solidFill>
-                <a:latin typeface="Georgia" pitchFamily="34" charset="0"/>
-                <a:ea typeface="Georgia" pitchFamily="34" charset="-122"/>
-                <a:cs typeface="Georgia" pitchFamily="34" charset="-120"/>
-              </a:rPr>
-              <a:t>Both frameworks are still in use today. Neither one is "wrong."</a:t>
-            </a:r>
-            <a:endParaRPr lang="en-US" sz="1300" dirty="0"/>
-          </a:p>
-        </p:txBody>
-      </p:sp>
-      <p:sp>
-        <p:nvSpPr>
-          <p:cNvPr id="10" name="Text 8"/>
+              <a:rPr lang="en-US" sz="1200" i="1" dirty="0">
+                <a:solidFill>
+                  <a:srgbClr val="1C2833"/>
+                </a:solidFill>
+                <a:latin typeface="Arial" pitchFamily="34" charset="0"/>
+                <a:ea typeface="Arial" pitchFamily="34" charset="-122"/>
+                <a:cs typeface="Arial" pitchFamily="34" charset="-120"/>
+              </a:rPr>
+              <a:t> · Modern science.</a:t>
+            </a:r>
+            <a:endParaRPr lang="en-US" sz="1200" dirty="0"/>
+          </a:p>
+        </p:txBody>
+      </p:sp>
+      <p:sp>
+        <p:nvSpPr>
+          <p:cNvPr id="6" name="Text 4"/>
           <p:cNvSpPr/>
           <p:nvPr/>
         </p:nvSpPr>
@@ -5417,7 +8114,7 @@
                 <a:ea typeface="Georgia" pitchFamily="34" charset="-122"/>
                 <a:cs typeface="Georgia" pitchFamily="34" charset="-120"/>
               </a:rPr>
-              <a:t>Homework</a:t>
+              <a:t>Core (25 min) (cont.)</a:t>
             </a:r>
             <a:endParaRPr lang="en-US" sz="1800" dirty="0"/>
           </a:p>
@@ -5431,8 +8128,8 @@
         </p:nvSpPr>
         <p:spPr>
           <a:xfrm>
-            <a:off x="406301" y="870942"/>
-            <a:ext cx="8498026" cy="426541"/>
+            <a:off x="634901" y="883593"/>
+            <a:ext cx="8102798" cy="1500783"/>
           </a:xfrm>
           <a:prstGeom prst="rect">
             <a:avLst/>
@@ -5444,13 +8141,31 @@
           <a:bodyPr wrap="square" lIns="0" tIns="0" rIns="0" bIns="0" rtlCol="0" anchor="t"/>
           <a:lstStyle/>
           <a:p>
-            <a:pPr algn="l" indent="0" marL="0">
-              <a:lnSpc>
-                <a:spcPts val="1680"/>
-              </a:lnSpc>
-              <a:spcBef>
-                <a:spcPts val="300"/>
-              </a:spcBef>
+            <a:pPr algn="l" marL="342900" indent="-342900">
+              <a:lnSpc>
+                <a:spcPts val="1620"/>
+              </a:lnSpc>
+              <a:spcAft>
+                <a:spcPts val="300"/>
+              </a:spcAft>
+              <a:buSzPct val="100000"/>
+              <a:buChar char="•"/>
+            </a:pPr>
+            <a:r>
+              <a:rPr lang="en-US" sz="1200" b="1" dirty="0">
+                <a:solidFill>
+                  <a:srgbClr val="1C2833"/>
+                </a:solidFill>
+                <a:latin typeface="Arial" pitchFamily="34" charset="0"/>
+                <a:ea typeface="Arial" pitchFamily="34" charset="-122"/>
+                <a:cs typeface="Arial" pitchFamily="34" charset="-120"/>
+              </a:rPr>
+              <a:t>Number of categories</a:t>
+            </a:r>
+            <a:pPr algn="l" indent="0" marL="0">
+              <a:lnSpc>
+                <a:spcPts val="1620"/>
+              </a:lnSpc>
               <a:spcAft>
                 <a:spcPts val="300"/>
               </a:spcAft>
@@ -5465,19 +8180,20 @@
                 <a:ea typeface="Arial" pitchFamily="34" charset="-122"/>
                 <a:cs typeface="Arial" pitchFamily="34" charset="-120"/>
               </a:rPr>
-              <a:t>– Choose </a:t>
-            </a:r>
-            <a:pPr algn="l" indent="0" marL="0">
-              <a:lnSpc>
-                <a:spcPts val="1680"/>
-              </a:lnSpc>
-              <a:spcBef>
-                <a:spcPts val="300"/>
-              </a:spcBef>
-              <a:spcAft>
-                <a:spcPts val="300"/>
-              </a:spcAft>
-              <a:buNone/>
+              <a:t> — 5 · 118 elements; ~4 states of matter</a:t>
+            </a:r>
+            <a:endParaRPr lang="en-US" sz="1200" dirty="0"/>
+          </a:p>
+          <a:p>
+            <a:pPr algn="l" marL="342900" indent="-342900">
+              <a:lnSpc>
+                <a:spcPts val="1620"/>
+              </a:lnSpc>
+              <a:spcAft>
+                <a:spcPts val="300"/>
+              </a:spcAft>
+              <a:buSzPct val="100000"/>
+              <a:buChar char="•"/>
             </a:pPr>
             <a:r>
               <a:rPr lang="en-US" sz="1200" b="1" dirty="0">
@@ -5488,15 +8204,12 @@
                 <a:ea typeface="Arial" pitchFamily="34" charset="-122"/>
                 <a:cs typeface="Arial" pitchFamily="34" charset="-120"/>
               </a:rPr>
-              <a:t>one</a:t>
-            </a:r>
-            <a:pPr algn="l" indent="0" marL="0">
-              <a:lnSpc>
-                <a:spcPts val="1680"/>
-              </a:lnSpc>
-              <a:spcBef>
-                <a:spcPts val="300"/>
-              </a:spcBef>
+              <a:t>Includes empty space?</a:t>
+            </a:r>
+            <a:pPr algn="l" indent="0" marL="0">
+              <a:lnSpc>
+                <a:spcPts val="1620"/>
+              </a:lnSpc>
               <a:spcAft>
                 <a:spcPts val="300"/>
               </a:spcAft>
@@ -5511,15 +8224,12 @@
                 <a:ea typeface="Arial" pitchFamily="34" charset="-122"/>
                 <a:cs typeface="Arial" pitchFamily="34" charset="-120"/>
               </a:rPr>
-              <a:t> of the modules from your science textbook chapter on Matter (states of matter, or the periodic table). Write a 1-paragraph note: </a:t>
-            </a:r>
-            <a:pPr algn="l" indent="0" marL="0">
-              <a:lnSpc>
-                <a:spcPts val="1680"/>
-              </a:lnSpc>
-              <a:spcBef>
-                <a:spcPts val="300"/>
-              </a:spcBef>
+              <a:t> — Yes (</a:t>
+            </a:r>
+            <a:pPr algn="l" indent="0" marL="0">
+              <a:lnSpc>
+                <a:spcPts val="1620"/>
+              </a:lnSpc>
               <a:spcAft>
                 <a:spcPts val="300"/>
               </a:spcAft>
@@ -5534,7 +8244,403 @@
                 <a:ea typeface="Arial" pitchFamily="34" charset="-122"/>
                 <a:cs typeface="Arial" pitchFamily="34" charset="-120"/>
               </a:rPr>
-              <a:t>what would the pañcabhūta framework get right about this topic, and what would it miss?</a:t>
+              <a:t>ākāśa</a:t>
+            </a:r>
+            <a:pPr algn="l" indent="0" marL="0">
+              <a:lnSpc>
+                <a:spcPts val="1620"/>
+              </a:lnSpc>
+              <a:spcAft>
+                <a:spcPts val="300"/>
+              </a:spcAft>
+              <a:buNone/>
+            </a:pPr>
+            <a:r>
+              <a:rPr lang="en-US" sz="1200" dirty="0">
+                <a:solidFill>
+                  <a:srgbClr val="1C2833"/>
+                </a:solidFill>
+                <a:latin typeface="Arial" pitchFamily="34" charset="0"/>
+                <a:ea typeface="Arial" pitchFamily="34" charset="-122"/>
+                <a:cs typeface="Arial" pitchFamily="34" charset="-120"/>
+              </a:rPr>
+              <a:t>) · No (space is the </a:t>
+            </a:r>
+            <a:pPr algn="l" indent="0" marL="0">
+              <a:lnSpc>
+                <a:spcPts val="1620"/>
+              </a:lnSpc>
+              <a:spcAft>
+                <a:spcPts val="300"/>
+              </a:spcAft>
+              <a:buNone/>
+            </a:pPr>
+            <a:r>
+              <a:rPr lang="en-US" sz="1200" i="1" dirty="0">
+                <a:solidFill>
+                  <a:srgbClr val="1C2833"/>
+                </a:solidFill>
+                <a:latin typeface="Arial" pitchFamily="34" charset="0"/>
+                <a:ea typeface="Arial" pitchFamily="34" charset="-122"/>
+                <a:cs typeface="Arial" pitchFamily="34" charset="-120"/>
+              </a:rPr>
+              <a:t>absence</a:t>
+            </a:r>
+            <a:pPr algn="l" indent="0" marL="0">
+              <a:lnSpc>
+                <a:spcPts val="1620"/>
+              </a:lnSpc>
+              <a:spcAft>
+                <a:spcPts val="300"/>
+              </a:spcAft>
+              <a:buNone/>
+            </a:pPr>
+            <a:r>
+              <a:rPr lang="en-US" sz="1200" dirty="0">
+                <a:solidFill>
+                  <a:srgbClr val="1C2833"/>
+                </a:solidFill>
+                <a:latin typeface="Arial" pitchFamily="34" charset="0"/>
+                <a:ea typeface="Arial" pitchFamily="34" charset="-122"/>
+                <a:cs typeface="Arial" pitchFamily="34" charset="-120"/>
+              </a:rPr>
+              <a:t> of matter)</a:t>
+            </a:r>
+            <a:endParaRPr lang="en-US" sz="1200" dirty="0"/>
+          </a:p>
+          <a:p>
+            <a:pPr algn="l" marL="342900" indent="-342900">
+              <a:lnSpc>
+                <a:spcPts val="1620"/>
+              </a:lnSpc>
+              <a:spcAft>
+                <a:spcPts val="300"/>
+              </a:spcAft>
+              <a:buSzPct val="100000"/>
+              <a:buChar char="•"/>
+            </a:pPr>
+            <a:r>
+              <a:rPr lang="en-US" sz="1200" b="1" dirty="0">
+                <a:solidFill>
+                  <a:srgbClr val="1C2833"/>
+                </a:solidFill>
+                <a:latin typeface="Arial" pitchFamily="34" charset="0"/>
+                <a:ea typeface="Arial" pitchFamily="34" charset="-122"/>
+                <a:cs typeface="Arial" pitchFamily="34" charset="-120"/>
+              </a:rPr>
+              <a:t>Distinguishes heat/light?</a:t>
+            </a:r>
+            <a:pPr algn="l" indent="0" marL="0">
+              <a:lnSpc>
+                <a:spcPts val="1620"/>
+              </a:lnSpc>
+              <a:spcAft>
+                <a:spcPts val="300"/>
+              </a:spcAft>
+              <a:buNone/>
+            </a:pPr>
+            <a:r>
+              <a:rPr lang="en-US" sz="1200" dirty="0">
+                <a:solidFill>
+                  <a:srgbClr val="1C2833"/>
+                </a:solidFill>
+                <a:latin typeface="Arial" pitchFamily="34" charset="0"/>
+                <a:ea typeface="Arial" pitchFamily="34" charset="-122"/>
+                <a:cs typeface="Arial" pitchFamily="34" charset="-120"/>
+              </a:rPr>
+              <a:t> — Yes (</a:t>
+            </a:r>
+            <a:pPr algn="l" indent="0" marL="0">
+              <a:lnSpc>
+                <a:spcPts val="1620"/>
+              </a:lnSpc>
+              <a:spcAft>
+                <a:spcPts val="300"/>
+              </a:spcAft>
+              <a:buNone/>
+            </a:pPr>
+            <a:r>
+              <a:rPr lang="en-US" sz="1200" i="1" dirty="0">
+                <a:solidFill>
+                  <a:srgbClr val="1C2833"/>
+                </a:solidFill>
+                <a:latin typeface="Arial" pitchFamily="34" charset="0"/>
+                <a:ea typeface="Arial" pitchFamily="34" charset="-122"/>
+                <a:cs typeface="Arial" pitchFamily="34" charset="-120"/>
+              </a:rPr>
+              <a:t>tejas</a:t>
+            </a:r>
+            <a:pPr algn="l" indent="0" marL="0">
+              <a:lnSpc>
+                <a:spcPts val="1620"/>
+              </a:lnSpc>
+              <a:spcAft>
+                <a:spcPts val="300"/>
+              </a:spcAft>
+              <a:buNone/>
+            </a:pPr>
+            <a:r>
+              <a:rPr lang="en-US" sz="1200" dirty="0">
+                <a:solidFill>
+                  <a:srgbClr val="1C2833"/>
+                </a:solidFill>
+                <a:latin typeface="Arial" pitchFamily="34" charset="0"/>
+                <a:ea typeface="Arial" pitchFamily="34" charset="-122"/>
+                <a:cs typeface="Arial" pitchFamily="34" charset="-120"/>
+              </a:rPr>
+              <a:t> is its own element) · No (energy is not an element; fire is hot gas)</a:t>
+            </a:r>
+            <a:endParaRPr lang="en-US" sz="1200" dirty="0"/>
+          </a:p>
+          <a:p>
+            <a:pPr algn="l" marL="342900" indent="-342900">
+              <a:lnSpc>
+                <a:spcPts val="1620"/>
+              </a:lnSpc>
+              <a:spcAft>
+                <a:spcPts val="300"/>
+              </a:spcAft>
+              <a:buSzPct val="100000"/>
+              <a:buChar char="•"/>
+            </a:pPr>
+            <a:r>
+              <a:rPr lang="en-US" sz="1200" b="1" dirty="0">
+                <a:solidFill>
+                  <a:srgbClr val="1C2833"/>
+                </a:solidFill>
+                <a:latin typeface="Arial" pitchFamily="34" charset="0"/>
+                <a:ea typeface="Arial" pitchFamily="34" charset="-122"/>
+                <a:cs typeface="Arial" pitchFamily="34" charset="-120"/>
+              </a:rPr>
+              <a:t>Distinguishes liquid from solid?</a:t>
+            </a:r>
+            <a:pPr algn="l" indent="0" marL="0">
+              <a:lnSpc>
+                <a:spcPts val="1620"/>
+              </a:lnSpc>
+              <a:spcAft>
+                <a:spcPts val="300"/>
+              </a:spcAft>
+              <a:buNone/>
+            </a:pPr>
+            <a:r>
+              <a:rPr lang="en-US" sz="1200" dirty="0">
+                <a:solidFill>
+                  <a:srgbClr val="1C2833"/>
+                </a:solidFill>
+                <a:latin typeface="Arial" pitchFamily="34" charset="0"/>
+                <a:ea typeface="Arial" pitchFamily="34" charset="-122"/>
+                <a:cs typeface="Arial" pitchFamily="34" charset="-120"/>
+              </a:rPr>
+              <a:t> — Yes (</a:t>
+            </a:r>
+            <a:pPr algn="l" indent="0" marL="0">
+              <a:lnSpc>
+                <a:spcPts val="1620"/>
+              </a:lnSpc>
+              <a:spcAft>
+                <a:spcPts val="300"/>
+              </a:spcAft>
+              <a:buNone/>
+            </a:pPr>
+            <a:r>
+              <a:rPr lang="en-US" sz="1200" i="1" dirty="0">
+                <a:solidFill>
+                  <a:srgbClr val="1C2833"/>
+                </a:solidFill>
+                <a:latin typeface="Arial" pitchFamily="34" charset="0"/>
+                <a:ea typeface="Arial" pitchFamily="34" charset="-122"/>
+                <a:cs typeface="Arial" pitchFamily="34" charset="-120"/>
+              </a:rPr>
+              <a:t>ap</a:t>
+            </a:r>
+            <a:pPr algn="l" indent="0" marL="0">
+              <a:lnSpc>
+                <a:spcPts val="1620"/>
+              </a:lnSpc>
+              <a:spcAft>
+                <a:spcPts val="300"/>
+              </a:spcAft>
+              <a:buNone/>
+            </a:pPr>
+            <a:r>
+              <a:rPr lang="en-US" sz="1200" dirty="0">
+                <a:solidFill>
+                  <a:srgbClr val="1C2833"/>
+                </a:solidFill>
+                <a:latin typeface="Arial" pitchFamily="34" charset="0"/>
+                <a:ea typeface="Arial" pitchFamily="34" charset="-122"/>
+                <a:cs typeface="Arial" pitchFamily="34" charset="-120"/>
+              </a:rPr>
+              <a:t> vs </a:t>
+            </a:r>
+            <a:pPr algn="l" indent="0" marL="0">
+              <a:lnSpc>
+                <a:spcPts val="1620"/>
+              </a:lnSpc>
+              <a:spcAft>
+                <a:spcPts val="300"/>
+              </a:spcAft>
+              <a:buNone/>
+            </a:pPr>
+            <a:r>
+              <a:rPr lang="en-US" sz="1200" i="1" dirty="0">
+                <a:solidFill>
+                  <a:srgbClr val="1C2833"/>
+                </a:solidFill>
+                <a:latin typeface="Arial" pitchFamily="34" charset="0"/>
+                <a:ea typeface="Arial" pitchFamily="34" charset="-122"/>
+                <a:cs typeface="Arial" pitchFamily="34" charset="-120"/>
+              </a:rPr>
+              <a:t>pṛthvī</a:t>
+            </a:r>
+            <a:pPr algn="l" indent="0" marL="0">
+              <a:lnSpc>
+                <a:spcPts val="1620"/>
+              </a:lnSpc>
+              <a:spcAft>
+                <a:spcPts val="300"/>
+              </a:spcAft>
+              <a:buNone/>
+            </a:pPr>
+            <a:r>
+              <a:rPr lang="en-US" sz="1200" dirty="0">
+                <a:solidFill>
+                  <a:srgbClr val="1C2833"/>
+                </a:solidFill>
+                <a:latin typeface="Arial" pitchFamily="34" charset="0"/>
+                <a:ea typeface="Arial" pitchFamily="34" charset="-122"/>
+                <a:cs typeface="Arial" pitchFamily="34" charset="-120"/>
+              </a:rPr>
+              <a:t>) · Yes (states of matter)</a:t>
+            </a:r>
+            <a:endParaRPr lang="en-US" sz="1200" dirty="0"/>
+          </a:p>
+          <a:p>
+            <a:pPr algn="l" marL="342900" indent="-342900">
+              <a:lnSpc>
+                <a:spcPts val="1620"/>
+              </a:lnSpc>
+              <a:spcAft>
+                <a:spcPts val="300"/>
+              </a:spcAft>
+              <a:buSzPct val="100000"/>
+              <a:buChar char="•"/>
+            </a:pPr>
+            <a:r>
+              <a:rPr lang="en-US" sz="1200" b="1" dirty="0">
+                <a:solidFill>
+                  <a:srgbClr val="1C2833"/>
+                </a:solidFill>
+                <a:latin typeface="Arial" pitchFamily="34" charset="0"/>
+                <a:ea typeface="Arial" pitchFamily="34" charset="-122"/>
+                <a:cs typeface="Arial" pitchFamily="34" charset="-120"/>
+              </a:rPr>
+              <a:t>Distinguishes hydrogen from helium?</a:t>
+            </a:r>
+            <a:pPr algn="l" indent="0" marL="0">
+              <a:lnSpc>
+                <a:spcPts val="1620"/>
+              </a:lnSpc>
+              <a:spcAft>
+                <a:spcPts val="300"/>
+              </a:spcAft>
+              <a:buNone/>
+            </a:pPr>
+            <a:r>
+              <a:rPr lang="en-US" sz="1200" dirty="0">
+                <a:solidFill>
+                  <a:srgbClr val="1C2833"/>
+                </a:solidFill>
+                <a:latin typeface="Arial" pitchFamily="34" charset="0"/>
+                <a:ea typeface="Arial" pitchFamily="34" charset="-122"/>
+                <a:cs typeface="Arial" pitchFamily="34" charset="-120"/>
+              </a:rPr>
+              <a:t> — No (both are </a:t>
+            </a:r>
+            <a:pPr algn="l" indent="0" marL="0">
+              <a:lnSpc>
+                <a:spcPts val="1620"/>
+              </a:lnSpc>
+              <a:spcAft>
+                <a:spcPts val="300"/>
+              </a:spcAft>
+              <a:buNone/>
+            </a:pPr>
+            <a:r>
+              <a:rPr lang="en-US" sz="1200" i="1" dirty="0">
+                <a:solidFill>
+                  <a:srgbClr val="1C2833"/>
+                </a:solidFill>
+                <a:latin typeface="Arial" pitchFamily="34" charset="0"/>
+                <a:ea typeface="Arial" pitchFamily="34" charset="-122"/>
+                <a:cs typeface="Arial" pitchFamily="34" charset="-120"/>
+              </a:rPr>
+              <a:t>vāyu</a:t>
+            </a:r>
+            <a:pPr algn="l" indent="0" marL="0">
+              <a:lnSpc>
+                <a:spcPts val="1620"/>
+              </a:lnSpc>
+              <a:spcAft>
+                <a:spcPts val="300"/>
+              </a:spcAft>
+              <a:buNone/>
+            </a:pPr>
+            <a:r>
+              <a:rPr lang="en-US" sz="1200" dirty="0">
+                <a:solidFill>
+                  <a:srgbClr val="1C2833"/>
+                </a:solidFill>
+                <a:latin typeface="Arial" pitchFamily="34" charset="0"/>
+                <a:ea typeface="Arial" pitchFamily="34" charset="-122"/>
+                <a:cs typeface="Arial" pitchFamily="34" charset="-120"/>
+              </a:rPr>
+              <a:t>) · Yes (different atoms)</a:t>
+            </a:r>
+            <a:endParaRPr lang="en-US" sz="1200" dirty="0"/>
+          </a:p>
+          <a:p>
+            <a:pPr algn="l" marL="342900" indent="-342900">
+              <a:lnSpc>
+                <a:spcPts val="1620"/>
+              </a:lnSpc>
+              <a:spcAft>
+                <a:spcPts val="300"/>
+              </a:spcAft>
+              <a:buSzPct val="100000"/>
+              <a:buChar char="•"/>
+            </a:pPr>
+            <a:r>
+              <a:rPr lang="en-US" sz="1200" b="1" dirty="0">
+                <a:solidFill>
+                  <a:srgbClr val="1C2833"/>
+                </a:solidFill>
+                <a:latin typeface="Arial" pitchFamily="34" charset="0"/>
+                <a:ea typeface="Arial" pitchFamily="34" charset="-122"/>
+                <a:cs typeface="Arial" pitchFamily="34" charset="-120"/>
+              </a:rPr>
+              <a:t>Method</a:t>
+            </a:r>
+            <a:pPr algn="l" indent="0" marL="0">
+              <a:lnSpc>
+                <a:spcPts val="1620"/>
+              </a:lnSpc>
+              <a:spcAft>
+                <a:spcPts val="300"/>
+              </a:spcAft>
+              <a:buNone/>
+            </a:pPr>
+            <a:r>
+              <a:rPr lang="en-US" sz="1200" dirty="0">
+                <a:solidFill>
+                  <a:srgbClr val="1C2833"/>
+                </a:solidFill>
+                <a:latin typeface="Arial" pitchFamily="34" charset="0"/>
+                <a:ea typeface="Arial" pitchFamily="34" charset="-122"/>
+                <a:cs typeface="Arial" pitchFamily="34" charset="-120"/>
+              </a:rPr>
+              <a:t> — Sensory observation · Experiment + measurement</a:t>
             </a:r>
             <a:endParaRPr lang="en-US" sz="1200" dirty="0"/>
           </a:p>
